--- a/slides/CS764_RAG_Security_Presentation.pptx
+++ b/slides/CS764_RAG_Security_Presentation.pptx
@@ -4,23 +4,26 @@
   <p:sldMasterIdLst>
     <p:sldMasterId id="2147483648" r:id="rId1"/>
   </p:sldMasterIdLst>
+  <p:notesMasterIdLst>
+    <p:notesMasterId r:id="rId16"/>
+  </p:notesMasterIdLst>
   <p:sldIdLst>
-    <p:sldId id="256" r:id="rId7"/>
-    <p:sldId id="257" r:id="rId8"/>
-    <p:sldId id="258" r:id="rId9"/>
-    <p:sldId id="259" r:id="rId10"/>
-    <p:sldId id="260" r:id="rId11"/>
-    <p:sldId id="261" r:id="rId12"/>
-    <p:sldId id="262" r:id="rId13"/>
-    <p:sldId id="263" r:id="rId14"/>
-    <p:sldId id="264" r:id="rId15"/>
-    <p:sldId id="265" r:id="rId16"/>
-    <p:sldId id="266" r:id="rId17"/>
-    <p:sldId id="267" r:id="rId18"/>
-    <p:sldId id="268" r:id="rId19"/>
-    <p:sldId id="269" r:id="rId20"/>
+    <p:sldId id="256" r:id="rId2"/>
+    <p:sldId id="257" r:id="rId3"/>
+    <p:sldId id="258" r:id="rId4"/>
+    <p:sldId id="259" r:id="rId5"/>
+    <p:sldId id="260" r:id="rId6"/>
+    <p:sldId id="261" r:id="rId7"/>
+    <p:sldId id="262" r:id="rId8"/>
+    <p:sldId id="263" r:id="rId9"/>
+    <p:sldId id="264" r:id="rId10"/>
+    <p:sldId id="265" r:id="rId11"/>
+    <p:sldId id="266" r:id="rId12"/>
+    <p:sldId id="267" r:id="rId13"/>
+    <p:sldId id="268" r:id="rId14"/>
+    <p:sldId id="269" r:id="rId15"/>
   </p:sldIdLst>
-  <p:sldSz cx="12191999" cy="6858000" type="screen4x3"/>
+  <p:sldSz cx="12192000" cy="6858000"/>
   <p:notesSz cx="6858000" cy="9144000"/>
   <p:defaultTextStyle>
     <a:defPPr>
@@ -117,19 +120,39 @@
       </a:defRPr>
     </a:lvl9pPr>
   </p:defaultTextStyle>
+  <p:extLst>
+    <p:ext uri="{EFAFB233-063F-42B5-8137-9DF3F51BA10A}">
+      <p15:sldGuideLst xmlns:p15="http://schemas.microsoft.com/office/powerpoint/2012/main">
+        <p15:guide id="1" orient="horz" pos="2160">
+          <p15:clr>
+            <a:srgbClr val="A4A3A4"/>
+          </p15:clr>
+        </p15:guide>
+        <p15:guide id="2" pos="2880">
+          <p15:clr>
+            <a:srgbClr val="A4A3A4"/>
+          </p15:clr>
+        </p15:guide>
+      </p15:sldGuideLst>
+    </p:ext>
+  </p:extLst>
 </p:presentation>
 </file>
 
 <file path=ppt/charts/chart1.xml><?xml version="1.0" encoding="utf-8"?>
-<c:chartSpace xmlns:c="http://schemas.openxmlformats.org/drawingml/2006/chart" xmlns:a="http://schemas.openxmlformats.org/drawingml/2006/main" xmlns:r="http://schemas.openxmlformats.org/officeDocument/2006/relationships">
+<c:chartSpace xmlns:c="http://schemas.openxmlformats.org/drawingml/2006/chart" xmlns:a="http://schemas.openxmlformats.org/drawingml/2006/main" xmlns:r="http://schemas.openxmlformats.org/officeDocument/2006/relationships" xmlns:c16r2="http://schemas.microsoft.com/office/drawing/2015/06/chart">
   <c:date1904 val="0"/>
+  <c:lang val="zh-CN"/>
+  <c:roundedCorners val="1"/>
   <c:style val="10"/>
   <c:chart>
     <c:autoTitleDeleted val="1"/>
     <c:plotArea>
+      <c:layout/>
       <c:barChart>
         <c:barDir val="col"/>
         <c:grouping val="clustered"/>
+        <c:varyColors val="1"/>
         <c:ser>
           <c:idx val="0"/>
           <c:order val="0"/>
@@ -152,46 +175,118 @@
               <a:noFill/>
             </a:ln>
           </c:spPr>
+          <c:invertIfNegative val="1"/>
           <c:dPt>
             <c:idx val="0"/>
+            <c:invertIfNegative val="1"/>
+            <c:bubble3D val="0"/>
             <c:spPr>
               <a:solidFill>
                 <a:srgbClr val="C67A1C"/>
               </a:solidFill>
             </c:spPr>
+            <c:extLst>
+              <c:ext xmlns:c16="http://schemas.microsoft.com/office/drawing/2014/chart" uri="{C3380CC4-5D6E-409C-BE32-E72D297353CC}">
+                <c16:uniqueId val="{00000001-DA4E-46CB-9593-03B1280389B2}"/>
+              </c:ext>
+            </c:extLst>
           </c:dPt>
           <c:dPt>
             <c:idx val="1"/>
+            <c:invertIfNegative val="1"/>
+            <c:bubble3D val="0"/>
             <c:spPr>
               <a:solidFill>
                 <a:srgbClr val="3476BC"/>
               </a:solidFill>
             </c:spPr>
+            <c:extLst>
+              <c:ext xmlns:c16="http://schemas.microsoft.com/office/drawing/2014/chart" uri="{C3380CC4-5D6E-409C-BE32-E72D297353CC}">
+                <c16:uniqueId val="{00000003-DA4E-46CB-9593-03B1280389B2}"/>
+              </c:ext>
+            </c:extLst>
           </c:dPt>
           <c:dPt>
             <c:idx val="2"/>
+            <c:invertIfNegative val="1"/>
+            <c:bubble3D val="0"/>
             <c:spPr>
               <a:solidFill>
                 <a:srgbClr val="098D96"/>
               </a:solidFill>
             </c:spPr>
+            <c:extLst>
+              <c:ext xmlns:c16="http://schemas.microsoft.com/office/drawing/2014/chart" uri="{C3380CC4-5D6E-409C-BE32-E72D297353CC}">
+                <c16:uniqueId val="{00000005-DA4E-46CB-9593-03B1280389B2}"/>
+              </c:ext>
+            </c:extLst>
           </c:dPt>
           <c:dPt>
             <c:idx val="3"/>
+            <c:invertIfNegative val="1"/>
+            <c:bubble3D val="0"/>
             <c:spPr>
               <a:solidFill>
                 <a:srgbClr val="7198C5"/>
               </a:solidFill>
             </c:spPr>
+            <c:extLst>
+              <c:ext xmlns:c16="http://schemas.microsoft.com/office/drawing/2014/chart" uri="{C3380CC4-5D6E-409C-BE32-E72D297353CC}">
+                <c16:uniqueId val="{00000007-DA4E-46CB-9593-03B1280389B2}"/>
+              </c:ext>
+            </c:extLst>
           </c:dPt>
           <c:dPt>
             <c:idx val="4"/>
+            <c:invertIfNegative val="1"/>
+            <c:bubble3D val="0"/>
             <c:spPr>
               <a:solidFill>
                 <a:srgbClr val="875F9B"/>
               </a:solidFill>
             </c:spPr>
+            <c:extLst>
+              <c:ext xmlns:c16="http://schemas.microsoft.com/office/drawing/2014/chart" uri="{C3380CC4-5D6E-409C-BE32-E72D297353CC}">
+                <c16:uniqueId val="{00000009-DA4E-46CB-9593-03B1280389B2}"/>
+              </c:ext>
+            </c:extLst>
           </c:dPt>
+          <c:dLbls>
+            <c:numFmt formatCode="0.0" sourceLinked="0"/>
+            <c:spPr>
+              <a:noFill/>
+              <a:ln>
+                <a:noFill/>
+              </a:ln>
+              <a:effectLst/>
+            </c:spPr>
+            <c:txPr>
+              <a:bodyPr/>
+              <a:lstStyle/>
+              <a:p>
+                <a:pPr>
+                  <a:defRPr sz="1600">
+                    <a:solidFill>
+                      <a:srgbClr val="14283F"/>
+                    </a:solidFill>
+                  </a:defRPr>
+                </a:pPr>
+                <a:endParaRPr lang="zh-CN"/>
+              </a:p>
+            </c:txPr>
+            <c:showLegendKey val="0"/>
+            <c:showVal val="1"/>
+            <c:showCatName val="0"/>
+            <c:showSerName val="0"/>
+            <c:showPercent val="0"/>
+            <c:showBubbleSize val="0"/>
+            <c:showLeaderLines val="0"/>
+            <c:extLst>
+              <c:ext xmlns:c15="http://schemas.microsoft.com/office/drawing/2012/chart" uri="{CE6537A1-D6FC-4f65-9D91-7224C49458BB}">
+                <c15:showLeaderLines val="0"/>
+              </c:ext>
+            </c:extLst>
+          </c:dLbls>
           <c:cat>
             <c:strRef>
               <c:f>Sheet1!$A$2:$A$6</c:f>
@@ -239,29 +334,31 @@
               </c:numCache>
             </c:numRef>
           </c:val>
+          <c:extLst>
+            <c:ext xmlns:c14="http://schemas.microsoft.com/office/drawing/2007/8/2/chart" uri="{6F2FDCE9-48DA-4B69-8628-5D25D57E5C99}">
+              <c14:invertSolidFillFmt>
+                <c14:spPr xmlns:c14="http://schemas.microsoft.com/office/drawing/2007/8/2/chart">
+                  <a:solidFill>
+                    <a:srgbClr val="FFFFFF"/>
+                  </a:solidFill>
+                  <a:ln>
+                    <a:noFill/>
+                  </a:ln>
+                </c14:spPr>
+              </c14:invertSolidFillFmt>
+            </c:ext>
+            <c:ext xmlns:c16="http://schemas.microsoft.com/office/drawing/2014/chart" uri="{C3380CC4-5D6E-409C-BE32-E72D297353CC}">
+              <c16:uniqueId val="{0000000A-DA4E-46CB-9593-03B1280389B2}"/>
+            </c:ext>
+          </c:extLst>
         </c:ser>
         <c:dLbls>
-          <c:numFmt formatCode="0.0" sourceLinked="0"/>
-          <c:txPr>
-            <a:bodyPr/>
-            <a:lstStyle/>
-            <a:p>
-              <a:pPr>
-                <a:defRPr sz="1400">
-                  <a:solidFill>
-                    <a:srgbClr val="14283F"/>
-                  </a:solidFill>
-                </a:defRPr>
-              </a:pPr>
-            </a:p>
-          </c:txPr>
           <c:showLegendKey val="0"/>
           <c:showVal val="1"/>
           <c:showCatName val="0"/>
           <c:showSerName val="0"/>
           <c:showPercent val="0"/>
           <c:showBubbleSize val="0"/>
-          <c:showLeaderLines val="1"/>
         </c:dLbls>
         <c:gapWidth val="75"/>
         <c:axId val="2068027336"/>
@@ -274,6 +371,7 @@
         </c:scaling>
         <c:delete val="0"/>
         <c:axPos val="b"/>
+        <c:numFmt formatCode="General" sourceLinked="0"/>
         <c:majorTickMark val="none"/>
         <c:minorTickMark val="none"/>
         <c:tickLblPos val="nextTo"/>
@@ -282,13 +380,14 @@
           <a:lstStyle/>
           <a:p>
             <a:pPr>
-              <a:defRPr sz="1400">
+              <a:defRPr sz="1600">
                 <a:solidFill>
                   <a:srgbClr val="14283F"/>
                 </a:solidFill>
                 <a:latin typeface="Aptos"/>
               </a:defRPr>
             </a:pPr>
+            <a:endParaRPr lang="zh-CN"/>
           </a:p>
         </c:txPr>
         <c:crossAx val="2113994440"/>
@@ -301,11 +400,13 @@
       <c:valAx>
         <c:axId val="2113994440"/>
         <c:scaling>
-          <c:max val="100.0"/>
-          <c:min val="0.0"/>
+          <c:orientation val="minMax"/>
+          <c:max val="100"/>
+          <c:min val="0"/>
         </c:scaling>
         <c:delete val="0"/>
         <c:axPos val="l"/>
+        <c:numFmt formatCode="General" sourceLinked="1"/>
         <c:majorTickMark val="out"/>
         <c:minorTickMark val="none"/>
         <c:tickLblPos val="nextTo"/>
@@ -314,20 +415,24 @@
           <a:lstStyle/>
           <a:p>
             <a:pPr>
-              <a:defRPr sz="1200">
+              <a:defRPr sz="1400">
                 <a:solidFill>
                   <a:srgbClr val="647488"/>
                 </a:solidFill>
               </a:defRPr>
             </a:pPr>
+            <a:endParaRPr lang="zh-CN"/>
           </a:p>
         </c:txPr>
         <c:crossAx val="2068027336"/>
         <c:crosses val="autoZero"/>
-        <c:majorUnit val="20.0"/>
+        <c:crossBetween val="between"/>
+        <c:majorUnit val="20"/>
       </c:valAx>
     </c:plotArea>
+    <c:plotVisOnly val="1"/>
     <c:dispBlanksAs val="gap"/>
+    <c:showDLblsOverMax val="1"/>
   </c:chart>
   <c:txPr>
     <a:bodyPr/>
@@ -346,15 +451,19 @@
 </file>
 
 <file path=ppt/charts/chart2.xml><?xml version="1.0" encoding="utf-8"?>
-<c:chartSpace xmlns:c="http://schemas.openxmlformats.org/drawingml/2006/chart" xmlns:a="http://schemas.openxmlformats.org/drawingml/2006/main" xmlns:r="http://schemas.openxmlformats.org/officeDocument/2006/relationships">
+<c:chartSpace xmlns:c="http://schemas.openxmlformats.org/drawingml/2006/chart" xmlns:a="http://schemas.openxmlformats.org/drawingml/2006/main" xmlns:r="http://schemas.openxmlformats.org/officeDocument/2006/relationships" xmlns:c16r2="http://schemas.microsoft.com/office/drawing/2015/06/chart">
   <c:date1904 val="0"/>
+  <c:lang val="zh-CN"/>
+  <c:roundedCorners val="1"/>
   <c:style val="10"/>
   <c:chart>
     <c:autoTitleDeleted val="1"/>
     <c:plotArea>
+      <c:layout/>
       <c:barChart>
         <c:barDir val="col"/>
         <c:grouping val="clustered"/>
+        <c:varyColors val="1"/>
         <c:ser>
           <c:idx val="0"/>
           <c:order val="0"/>
@@ -377,38 +486,103 @@
               <a:noFill/>
             </a:ln>
           </c:spPr>
+          <c:invertIfNegative val="1"/>
           <c:dPt>
             <c:idx val="0"/>
+            <c:invertIfNegative val="1"/>
+            <c:bubble3D val="0"/>
             <c:spPr>
               <a:solidFill>
                 <a:srgbClr val="8A929B"/>
               </a:solidFill>
             </c:spPr>
+            <c:extLst>
+              <c:ext xmlns:c16="http://schemas.microsoft.com/office/drawing/2014/chart" uri="{C3380CC4-5D6E-409C-BE32-E72D297353CC}">
+                <c16:uniqueId val="{00000001-16DA-42FE-814D-C6AC8AC8A0B0}"/>
+              </c:ext>
+            </c:extLst>
           </c:dPt>
           <c:dPt>
             <c:idx val="1"/>
+            <c:invertIfNegative val="1"/>
+            <c:bubble3D val="0"/>
             <c:spPr>
               <a:solidFill>
                 <a:srgbClr val="C67A1C"/>
               </a:solidFill>
             </c:spPr>
+            <c:extLst>
+              <c:ext xmlns:c16="http://schemas.microsoft.com/office/drawing/2014/chart" uri="{C3380CC4-5D6E-409C-BE32-E72D297353CC}">
+                <c16:uniqueId val="{00000003-16DA-42FE-814D-C6AC8AC8A0B0}"/>
+              </c:ext>
+            </c:extLst>
           </c:dPt>
           <c:dPt>
             <c:idx val="2"/>
+            <c:invertIfNegative val="1"/>
+            <c:bubble3D val="0"/>
             <c:spPr>
               <a:solidFill>
                 <a:srgbClr val="3476BC"/>
               </a:solidFill>
             </c:spPr>
+            <c:extLst>
+              <c:ext xmlns:c16="http://schemas.microsoft.com/office/drawing/2014/chart" uri="{C3380CC4-5D6E-409C-BE32-E72D297353CC}">
+                <c16:uniqueId val="{00000005-16DA-42FE-814D-C6AC8AC8A0B0}"/>
+              </c:ext>
+            </c:extLst>
           </c:dPt>
           <c:dPt>
             <c:idx val="3"/>
+            <c:invertIfNegative val="1"/>
+            <c:bubble3D val="0"/>
             <c:spPr>
               <a:solidFill>
                 <a:srgbClr val="098D96"/>
               </a:solidFill>
             </c:spPr>
+            <c:extLst>
+              <c:ext xmlns:c16="http://schemas.microsoft.com/office/drawing/2014/chart" uri="{C3380CC4-5D6E-409C-BE32-E72D297353CC}">
+                <c16:uniqueId val="{00000007-16DA-42FE-814D-C6AC8AC8A0B0}"/>
+              </c:ext>
+            </c:extLst>
           </c:dPt>
+          <c:dLbls>
+            <c:numFmt formatCode="0.0" sourceLinked="0"/>
+            <c:spPr>
+              <a:noFill/>
+              <a:ln>
+                <a:noFill/>
+              </a:ln>
+              <a:effectLst/>
+            </c:spPr>
+            <c:txPr>
+              <a:bodyPr/>
+              <a:lstStyle/>
+              <a:p>
+                <a:pPr>
+                  <a:defRPr sz="1600">
+                    <a:solidFill>
+                      <a:srgbClr val="FFFFFF"/>
+                    </a:solidFill>
+                  </a:defRPr>
+                </a:pPr>
+                <a:endParaRPr lang="zh-CN"/>
+              </a:p>
+            </c:txPr>
+            <c:showLegendKey val="0"/>
+            <c:showVal val="1"/>
+            <c:showCatName val="0"/>
+            <c:showSerName val="0"/>
+            <c:showPercent val="0"/>
+            <c:showBubbleSize val="0"/>
+            <c:showLeaderLines val="0"/>
+            <c:extLst>
+              <c:ext xmlns:c15="http://schemas.microsoft.com/office/drawing/2012/chart" uri="{CE6537A1-D6FC-4f65-9D91-7224C49458BB}">
+                <c15:showLeaderLines val="0"/>
+              </c:ext>
+            </c:extLst>
+          </c:dLbls>
           <c:cat>
             <c:strRef>
               <c:f>Sheet1!$A$2:$A$5</c:f>
@@ -442,7 +616,7 @@
                   <c:v>6.1</c:v>
                 </c:pt>
                 <c:pt idx="2">
-                  <c:v>32.2</c:v>
+                  <c:v>32.200000000000003</c:v>
                 </c:pt>
                 <c:pt idx="3">
                   <c:v>2.7</c:v>
@@ -450,29 +624,31 @@
               </c:numCache>
             </c:numRef>
           </c:val>
-        </c:ser>
-        <c:dLbls>
-          <c:numFmt formatCode="0.0" sourceLinked="0"/>
-          <c:txPr>
-            <a:bodyPr/>
-            <a:lstStyle/>
-            <a:p>
-              <a:pPr>
-                <a:defRPr sz="1400">
+          <c:extLst>
+            <c:ext xmlns:c14="http://schemas.microsoft.com/office/drawing/2007/8/2/chart" uri="{6F2FDCE9-48DA-4B69-8628-5D25D57E5C99}">
+              <c14:invertSolidFillFmt>
+                <c14:spPr xmlns:c14="http://schemas.microsoft.com/office/drawing/2007/8/2/chart">
                   <a:solidFill>
                     <a:srgbClr val="FFFFFF"/>
                   </a:solidFill>
-                </a:defRPr>
-              </a:pPr>
-            </a:p>
-          </c:txPr>
+                  <a:ln>
+                    <a:noFill/>
+                  </a:ln>
+                </c14:spPr>
+              </c14:invertSolidFillFmt>
+            </c:ext>
+            <c:ext xmlns:c16="http://schemas.microsoft.com/office/drawing/2014/chart" uri="{C3380CC4-5D6E-409C-BE32-E72D297353CC}">
+              <c16:uniqueId val="{00000008-16DA-42FE-814D-C6AC8AC8A0B0}"/>
+            </c:ext>
+          </c:extLst>
+        </c:ser>
+        <c:dLbls>
           <c:showLegendKey val="0"/>
           <c:showVal val="1"/>
           <c:showCatName val="0"/>
           <c:showSerName val="0"/>
           <c:showPercent val="0"/>
           <c:showBubbleSize val="0"/>
-          <c:showLeaderLines val="1"/>
         </c:dLbls>
         <c:gapWidth val="75"/>
         <c:axId val="2068027336"/>
@@ -485,6 +661,7 @@
         </c:scaling>
         <c:delete val="0"/>
         <c:axPos val="b"/>
+        <c:numFmt formatCode="General" sourceLinked="0"/>
         <c:majorTickMark val="none"/>
         <c:minorTickMark val="none"/>
         <c:tickLblPos val="nextTo"/>
@@ -493,13 +670,14 @@
           <a:lstStyle/>
           <a:p>
             <a:pPr>
-              <a:defRPr sz="1400">
+              <a:defRPr sz="1600">
                 <a:solidFill>
                   <a:srgbClr val="FFFFFF"/>
                 </a:solidFill>
                 <a:latin typeface="Aptos"/>
               </a:defRPr>
             </a:pPr>
+            <a:endParaRPr lang="zh-CN"/>
           </a:p>
         </c:txPr>
         <c:crossAx val="2113994440"/>
@@ -512,11 +690,13 @@
       <c:valAx>
         <c:axId val="2113994440"/>
         <c:scaling>
-          <c:max val="50.0"/>
-          <c:min val="0.0"/>
+          <c:orientation val="minMax"/>
+          <c:max val="50"/>
+          <c:min val="0"/>
         </c:scaling>
         <c:delete val="0"/>
         <c:axPos val="l"/>
+        <c:numFmt formatCode="General" sourceLinked="1"/>
         <c:majorTickMark val="out"/>
         <c:minorTickMark val="none"/>
         <c:tickLblPos val="nextTo"/>
@@ -525,20 +705,24 @@
           <a:lstStyle/>
           <a:p>
             <a:pPr>
-              <a:defRPr sz="1200">
+              <a:defRPr sz="1400">
                 <a:solidFill>
                   <a:srgbClr val="CFD8E2"/>
                 </a:solidFill>
               </a:defRPr>
             </a:pPr>
+            <a:endParaRPr lang="zh-CN"/>
           </a:p>
         </c:txPr>
         <c:crossAx val="2068027336"/>
         <c:crosses val="autoZero"/>
-        <c:majorUnit val="10.0"/>
+        <c:crossBetween val="between"/>
+        <c:majorUnit val="10"/>
       </c:valAx>
     </c:plotArea>
+    <c:plotVisOnly val="1"/>
     <c:dispBlanksAs val="gap"/>
+    <c:showDLblsOverMax val="1"/>
   </c:chart>
   <c:txPr>
     <a:bodyPr/>
@@ -557,15 +741,19 @@
 </file>
 
 <file path=ppt/charts/chart3.xml><?xml version="1.0" encoding="utf-8"?>
-<c:chartSpace xmlns:c="http://schemas.openxmlformats.org/drawingml/2006/chart" xmlns:a="http://schemas.openxmlformats.org/drawingml/2006/main" xmlns:r="http://schemas.openxmlformats.org/officeDocument/2006/relationships">
+<c:chartSpace xmlns:c="http://schemas.openxmlformats.org/drawingml/2006/chart" xmlns:a="http://schemas.openxmlformats.org/drawingml/2006/main" xmlns:r="http://schemas.openxmlformats.org/officeDocument/2006/relationships" xmlns:c16r2="http://schemas.microsoft.com/office/drawing/2015/06/chart">
   <c:date1904 val="0"/>
+  <c:lang val="zh-CN"/>
+  <c:roundedCorners val="1"/>
   <c:style val="10"/>
   <c:chart>
     <c:autoTitleDeleted val="1"/>
     <c:plotArea>
+      <c:layout/>
       <c:barChart>
         <c:barDir val="col"/>
         <c:grouping val="clustered"/>
+        <c:varyColors val="1"/>
         <c:ser>
           <c:idx val="0"/>
           <c:order val="0"/>
@@ -588,38 +776,103 @@
               <a:noFill/>
             </a:ln>
           </c:spPr>
+          <c:invertIfNegative val="1"/>
           <c:dPt>
             <c:idx val="0"/>
+            <c:invertIfNegative val="1"/>
+            <c:bubble3D val="0"/>
             <c:spPr>
               <a:solidFill>
                 <a:srgbClr val="8A929B"/>
               </a:solidFill>
             </c:spPr>
+            <c:extLst>
+              <c:ext xmlns:c16="http://schemas.microsoft.com/office/drawing/2014/chart" uri="{C3380CC4-5D6E-409C-BE32-E72D297353CC}">
+                <c16:uniqueId val="{00000001-70E9-4E6E-837F-80205500B1AD}"/>
+              </c:ext>
+            </c:extLst>
           </c:dPt>
           <c:dPt>
             <c:idx val="1"/>
+            <c:invertIfNegative val="1"/>
+            <c:bubble3D val="0"/>
             <c:spPr>
               <a:solidFill>
                 <a:srgbClr val="C67A1C"/>
               </a:solidFill>
             </c:spPr>
+            <c:extLst>
+              <c:ext xmlns:c16="http://schemas.microsoft.com/office/drawing/2014/chart" uri="{C3380CC4-5D6E-409C-BE32-E72D297353CC}">
+                <c16:uniqueId val="{00000003-70E9-4E6E-837F-80205500B1AD}"/>
+              </c:ext>
+            </c:extLst>
           </c:dPt>
           <c:dPt>
             <c:idx val="2"/>
+            <c:invertIfNegative val="1"/>
+            <c:bubble3D val="0"/>
             <c:spPr>
               <a:solidFill>
                 <a:srgbClr val="3476BC"/>
               </a:solidFill>
             </c:spPr>
+            <c:extLst>
+              <c:ext xmlns:c16="http://schemas.microsoft.com/office/drawing/2014/chart" uri="{C3380CC4-5D6E-409C-BE32-E72D297353CC}">
+                <c16:uniqueId val="{00000005-70E9-4E6E-837F-80205500B1AD}"/>
+              </c:ext>
+            </c:extLst>
           </c:dPt>
           <c:dPt>
             <c:idx val="3"/>
+            <c:invertIfNegative val="1"/>
+            <c:bubble3D val="0"/>
             <c:spPr>
               <a:solidFill>
                 <a:srgbClr val="098D96"/>
               </a:solidFill>
             </c:spPr>
+            <c:extLst>
+              <c:ext xmlns:c16="http://schemas.microsoft.com/office/drawing/2014/chart" uri="{C3380CC4-5D6E-409C-BE32-E72D297353CC}">
+                <c16:uniqueId val="{00000007-70E9-4E6E-837F-80205500B1AD}"/>
+              </c:ext>
+            </c:extLst>
           </c:dPt>
+          <c:dLbls>
+            <c:numFmt formatCode="0.0" sourceLinked="0"/>
+            <c:spPr>
+              <a:noFill/>
+              <a:ln>
+                <a:noFill/>
+              </a:ln>
+              <a:effectLst/>
+            </c:spPr>
+            <c:txPr>
+              <a:bodyPr/>
+              <a:lstStyle/>
+              <a:p>
+                <a:pPr>
+                  <a:defRPr sz="1600">
+                    <a:solidFill>
+                      <a:srgbClr val="FFFFFF"/>
+                    </a:solidFill>
+                  </a:defRPr>
+                </a:pPr>
+                <a:endParaRPr lang="zh-CN"/>
+              </a:p>
+            </c:txPr>
+            <c:showLegendKey val="0"/>
+            <c:showVal val="1"/>
+            <c:showCatName val="0"/>
+            <c:showSerName val="0"/>
+            <c:showPercent val="0"/>
+            <c:showBubbleSize val="0"/>
+            <c:showLeaderLines val="0"/>
+            <c:extLst>
+              <c:ext xmlns:c15="http://schemas.microsoft.com/office/drawing/2012/chart" uri="{CE6537A1-D6FC-4f65-9D91-7224C49458BB}">
+                <c15:showLeaderLines val="0"/>
+              </c:ext>
+            </c:extLst>
+          </c:dLbls>
           <c:cat>
             <c:strRef>
               <c:f>Sheet1!$A$2:$A$5</c:f>
@@ -661,29 +914,31 @@
               </c:numCache>
             </c:numRef>
           </c:val>
-        </c:ser>
-        <c:dLbls>
-          <c:numFmt formatCode="0.0" sourceLinked="0"/>
-          <c:txPr>
-            <a:bodyPr/>
-            <a:lstStyle/>
-            <a:p>
-              <a:pPr>
-                <a:defRPr sz="1400">
+          <c:extLst>
+            <c:ext xmlns:c14="http://schemas.microsoft.com/office/drawing/2007/8/2/chart" uri="{6F2FDCE9-48DA-4B69-8628-5D25D57E5C99}">
+              <c14:invertSolidFillFmt>
+                <c14:spPr xmlns:c14="http://schemas.microsoft.com/office/drawing/2007/8/2/chart">
                   <a:solidFill>
                     <a:srgbClr val="FFFFFF"/>
                   </a:solidFill>
-                </a:defRPr>
-              </a:pPr>
-            </a:p>
-          </c:txPr>
+                  <a:ln>
+                    <a:noFill/>
+                  </a:ln>
+                </c14:spPr>
+              </c14:invertSolidFillFmt>
+            </c:ext>
+            <c:ext xmlns:c16="http://schemas.microsoft.com/office/drawing/2014/chart" uri="{C3380CC4-5D6E-409C-BE32-E72D297353CC}">
+              <c16:uniqueId val="{00000008-70E9-4E6E-837F-80205500B1AD}"/>
+            </c:ext>
+          </c:extLst>
+        </c:ser>
+        <c:dLbls>
           <c:showLegendKey val="0"/>
           <c:showVal val="1"/>
           <c:showCatName val="0"/>
           <c:showSerName val="0"/>
           <c:showPercent val="0"/>
           <c:showBubbleSize val="0"/>
-          <c:showLeaderLines val="1"/>
         </c:dLbls>
         <c:gapWidth val="75"/>
         <c:axId val="2068027336"/>
@@ -696,6 +951,7 @@
         </c:scaling>
         <c:delete val="0"/>
         <c:axPos val="b"/>
+        <c:numFmt formatCode="General" sourceLinked="0"/>
         <c:majorTickMark val="none"/>
         <c:minorTickMark val="none"/>
         <c:tickLblPos val="nextTo"/>
@@ -704,13 +960,14 @@
           <a:lstStyle/>
           <a:p>
             <a:pPr>
-              <a:defRPr sz="1400">
+              <a:defRPr sz="1600">
                 <a:solidFill>
                   <a:srgbClr val="FFFFFF"/>
                 </a:solidFill>
                 <a:latin typeface="Aptos"/>
               </a:defRPr>
             </a:pPr>
+            <a:endParaRPr lang="zh-CN"/>
           </a:p>
         </c:txPr>
         <c:crossAx val="2113994440"/>
@@ -723,11 +980,13 @@
       <c:valAx>
         <c:axId val="2113994440"/>
         <c:scaling>
-          <c:max val="50.0"/>
-          <c:min val="0.0"/>
+          <c:orientation val="minMax"/>
+          <c:max val="50"/>
+          <c:min val="0"/>
         </c:scaling>
         <c:delete val="0"/>
         <c:axPos val="l"/>
+        <c:numFmt formatCode="General" sourceLinked="1"/>
         <c:majorTickMark val="out"/>
         <c:minorTickMark val="none"/>
         <c:tickLblPos val="nextTo"/>
@@ -736,20 +995,24 @@
           <a:lstStyle/>
           <a:p>
             <a:pPr>
-              <a:defRPr sz="1200">
+              <a:defRPr sz="1400">
                 <a:solidFill>
                   <a:srgbClr val="CFD8E2"/>
                 </a:solidFill>
               </a:defRPr>
             </a:pPr>
+            <a:endParaRPr lang="zh-CN"/>
           </a:p>
         </c:txPr>
         <c:crossAx val="2068027336"/>
         <c:crosses val="autoZero"/>
-        <c:majorUnit val="10.0"/>
+        <c:crossBetween val="between"/>
+        <c:majorUnit val="10"/>
       </c:valAx>
     </c:plotArea>
+    <c:plotVisOnly val="1"/>
     <c:dispBlanksAs val="gap"/>
+    <c:showDLblsOverMax val="1"/>
   </c:chart>
   <c:txPr>
     <a:bodyPr/>
@@ -768,15 +1031,19 @@
 </file>
 
 <file path=ppt/charts/chart4.xml><?xml version="1.0" encoding="utf-8"?>
-<c:chartSpace xmlns:c="http://schemas.openxmlformats.org/drawingml/2006/chart" xmlns:a="http://schemas.openxmlformats.org/drawingml/2006/main" xmlns:r="http://schemas.openxmlformats.org/officeDocument/2006/relationships">
+<c:chartSpace xmlns:c="http://schemas.openxmlformats.org/drawingml/2006/chart" xmlns:a="http://schemas.openxmlformats.org/drawingml/2006/main" xmlns:r="http://schemas.openxmlformats.org/officeDocument/2006/relationships" xmlns:c16r2="http://schemas.microsoft.com/office/drawing/2015/06/chart">
   <c:date1904 val="0"/>
+  <c:lang val="zh-CN"/>
+  <c:roundedCorners val="1"/>
   <c:style val="10"/>
   <c:chart>
     <c:autoTitleDeleted val="1"/>
     <c:plotArea>
+      <c:layout/>
       <c:barChart>
         <c:barDir val="bar"/>
         <c:grouping val="stacked"/>
+        <c:varyColors val="1"/>
         <c:ser>
           <c:idx val="0"/>
           <c:order val="0"/>
@@ -799,6 +1066,43 @@
               <a:noFill/>
             </a:ln>
           </c:spPr>
+          <c:invertIfNegative val="1"/>
+          <c:dLbls>
+            <c:numFmt formatCode="0" sourceLinked="0"/>
+            <c:spPr>
+              <a:noFill/>
+              <a:ln>
+                <a:noFill/>
+              </a:ln>
+              <a:effectLst/>
+            </c:spPr>
+            <c:txPr>
+              <a:bodyPr/>
+              <a:lstStyle/>
+              <a:p>
+                <a:pPr>
+                  <a:defRPr sz="1600">
+                    <a:solidFill>
+                      <a:srgbClr val="FFFFFF"/>
+                    </a:solidFill>
+                  </a:defRPr>
+                </a:pPr>
+                <a:endParaRPr lang="zh-CN"/>
+              </a:p>
+            </c:txPr>
+            <c:showLegendKey val="0"/>
+            <c:showVal val="1"/>
+            <c:showCatName val="0"/>
+            <c:showSerName val="0"/>
+            <c:showPercent val="0"/>
+            <c:showBubbleSize val="0"/>
+            <c:showLeaderLines val="0"/>
+            <c:extLst>
+              <c:ext xmlns:c15="http://schemas.microsoft.com/office/drawing/2012/chart" uri="{CE6537A1-D6FC-4f65-9D91-7224C49458BB}">
+                <c15:showLeaderLines val="0"/>
+              </c:ext>
+            </c:extLst>
+          </c:dLbls>
           <c:cat>
             <c:strRef>
               <c:f>Sheet1!$A$2:$A$6</c:f>
@@ -846,6 +1150,23 @@
               </c:numCache>
             </c:numRef>
           </c:val>
+          <c:extLst>
+            <c:ext xmlns:c14="http://schemas.microsoft.com/office/drawing/2007/8/2/chart" uri="{6F2FDCE9-48DA-4B69-8628-5D25D57E5C99}">
+              <c14:invertSolidFillFmt>
+                <c14:spPr xmlns:c14="http://schemas.microsoft.com/office/drawing/2007/8/2/chart">
+                  <a:solidFill>
+                    <a:srgbClr val="FFFFFF"/>
+                  </a:solidFill>
+                  <a:ln>
+                    <a:noFill/>
+                  </a:ln>
+                </c14:spPr>
+              </c14:invertSolidFillFmt>
+            </c:ext>
+            <c:ext xmlns:c16="http://schemas.microsoft.com/office/drawing/2014/chart" uri="{C3380CC4-5D6E-409C-BE32-E72D297353CC}">
+              <c16:uniqueId val="{00000000-B315-40B8-B73D-0A76DD78F9FF}"/>
+            </c:ext>
+          </c:extLst>
         </c:ser>
         <c:ser>
           <c:idx val="1"/>
@@ -869,14 +1190,58 @@
               <a:noFill/>
             </a:ln>
           </c:spPr>
+          <c:invertIfNegative val="1"/>
           <c:dPt>
             <c:idx val="2"/>
+            <c:invertIfNegative val="1"/>
+            <c:bubble3D val="0"/>
             <c:spPr>
               <a:solidFill>
                 <a:srgbClr val="098D96"/>
               </a:solidFill>
             </c:spPr>
+            <c:extLst>
+              <c:ext xmlns:c16="http://schemas.microsoft.com/office/drawing/2014/chart" uri="{C3380CC4-5D6E-409C-BE32-E72D297353CC}">
+                <c16:uniqueId val="{00000002-B315-40B8-B73D-0A76DD78F9FF}"/>
+              </c:ext>
+            </c:extLst>
           </c:dPt>
+          <c:dLbls>
+            <c:numFmt formatCode="0" sourceLinked="0"/>
+            <c:spPr>
+              <a:noFill/>
+              <a:ln>
+                <a:noFill/>
+              </a:ln>
+              <a:effectLst/>
+            </c:spPr>
+            <c:txPr>
+              <a:bodyPr/>
+              <a:lstStyle/>
+              <a:p>
+                <a:pPr>
+                  <a:defRPr sz="1600">
+                    <a:solidFill>
+                      <a:srgbClr val="FFFFFF"/>
+                    </a:solidFill>
+                  </a:defRPr>
+                </a:pPr>
+                <a:endParaRPr lang="zh-CN"/>
+              </a:p>
+            </c:txPr>
+            <c:showLegendKey val="0"/>
+            <c:showVal val="1"/>
+            <c:showCatName val="0"/>
+            <c:showSerName val="0"/>
+            <c:showPercent val="0"/>
+            <c:showBubbleSize val="0"/>
+            <c:showLeaderLines val="0"/>
+            <c:extLst>
+              <c:ext xmlns:c15="http://schemas.microsoft.com/office/drawing/2012/chart" uri="{CE6537A1-D6FC-4f65-9D91-7224C49458BB}">
+                <c15:showLeaderLines val="0"/>
+              </c:ext>
+            </c:extLst>
+          </c:dLbls>
           <c:cat>
             <c:strRef>
               <c:f>Sheet1!$A$2:$A$6</c:f>
@@ -924,29 +1289,31 @@
               </c:numCache>
             </c:numRef>
           </c:val>
-        </c:ser>
-        <c:dLbls>
-          <c:numFmt formatCode="0" sourceLinked="0"/>
-          <c:txPr>
-            <a:bodyPr/>
-            <a:lstStyle/>
-            <a:p>
-              <a:pPr>
-                <a:defRPr sz="1400">
+          <c:extLst>
+            <c:ext xmlns:c14="http://schemas.microsoft.com/office/drawing/2007/8/2/chart" uri="{6F2FDCE9-48DA-4B69-8628-5D25D57E5C99}">
+              <c14:invertSolidFillFmt>
+                <c14:spPr xmlns:c14="http://schemas.microsoft.com/office/drawing/2007/8/2/chart">
                   <a:solidFill>
                     <a:srgbClr val="FFFFFF"/>
                   </a:solidFill>
-                </a:defRPr>
-              </a:pPr>
-            </a:p>
-          </c:txPr>
+                  <a:ln>
+                    <a:noFill/>
+                  </a:ln>
+                </c14:spPr>
+              </c14:invertSolidFillFmt>
+            </c:ext>
+            <c:ext xmlns:c16="http://schemas.microsoft.com/office/drawing/2014/chart" uri="{C3380CC4-5D6E-409C-BE32-E72D297353CC}">
+              <c16:uniqueId val="{00000003-B315-40B8-B73D-0A76DD78F9FF}"/>
+            </c:ext>
+          </c:extLst>
+        </c:ser>
+        <c:dLbls>
           <c:showLegendKey val="0"/>
           <c:showVal val="1"/>
           <c:showCatName val="0"/>
           <c:showSerName val="0"/>
           <c:showPercent val="0"/>
           <c:showBubbleSize val="0"/>
-          <c:showLeaderLines val="1"/>
         </c:dLbls>
         <c:gapWidth val="75"/>
         <c:overlap val="100"/>
@@ -960,6 +1327,7 @@
         </c:scaling>
         <c:delete val="0"/>
         <c:axPos val="l"/>
+        <c:numFmt formatCode="General" sourceLinked="0"/>
         <c:majorTickMark val="none"/>
         <c:minorTickMark val="none"/>
         <c:tickLblPos val="nextTo"/>
@@ -968,13 +1336,14 @@
           <a:lstStyle/>
           <a:p>
             <a:pPr>
-              <a:defRPr sz="1400">
+              <a:defRPr sz="1600">
                 <a:solidFill>
                   <a:srgbClr val="FFFFFF"/>
                 </a:solidFill>
                 <a:latin typeface="Aptos"/>
               </a:defRPr>
             </a:pPr>
+            <a:endParaRPr lang="zh-CN"/>
           </a:p>
         </c:txPr>
         <c:crossAx val="2113994440"/>
@@ -987,11 +1356,13 @@
       <c:valAx>
         <c:axId val="2113994440"/>
         <c:scaling>
-          <c:max val="24.0"/>
-          <c:min val="0.0"/>
+          <c:orientation val="minMax"/>
+          <c:max val="24"/>
+          <c:min val="0"/>
         </c:scaling>
         <c:delete val="0"/>
         <c:axPos val="b"/>
+        <c:numFmt formatCode="General" sourceLinked="1"/>
         <c:majorTickMark val="out"/>
         <c:minorTickMark val="none"/>
         <c:tickLblPos val="nextTo"/>
@@ -1000,17 +1371,19 @@
           <a:lstStyle/>
           <a:p>
             <a:pPr>
-              <a:defRPr sz="1200">
+              <a:defRPr sz="1400">
                 <a:solidFill>
                   <a:srgbClr val="CFD8E2"/>
                 </a:solidFill>
               </a:defRPr>
             </a:pPr>
+            <a:endParaRPr lang="zh-CN"/>
           </a:p>
         </c:txPr>
         <c:crossAx val="2068027336"/>
         <c:crosses val="autoZero"/>
-        <c:majorUnit val="4.0"/>
+        <c:crossBetween val="between"/>
+        <c:majorUnit val="4"/>
       </c:valAx>
     </c:plotArea>
     <c:legend>
@@ -1021,16 +1394,19 @@
         <a:lstStyle/>
         <a:p>
           <a:pPr>
-            <a:defRPr sz="1200">
+            <a:defRPr sz="1400">
               <a:solidFill>
                 <a:srgbClr val="FFFFFF"/>
               </a:solidFill>
             </a:defRPr>
           </a:pPr>
+          <a:endParaRPr lang="zh-CN"/>
         </a:p>
       </c:txPr>
     </c:legend>
+    <c:plotVisOnly val="1"/>
     <c:dispBlanksAs val="gap"/>
+    <c:showDLblsOverMax val="1"/>
   </c:chart>
   <c:txPr>
     <a:bodyPr/>
@@ -1049,15 +1425,19 @@
 </file>
 
 <file path=ppt/charts/chart5.xml><?xml version="1.0" encoding="utf-8"?>
-<c:chartSpace xmlns:c="http://schemas.openxmlformats.org/drawingml/2006/chart" xmlns:a="http://schemas.openxmlformats.org/drawingml/2006/main" xmlns:r="http://schemas.openxmlformats.org/officeDocument/2006/relationships">
+<c:chartSpace xmlns:c="http://schemas.openxmlformats.org/drawingml/2006/chart" xmlns:a="http://schemas.openxmlformats.org/drawingml/2006/main" xmlns:r="http://schemas.openxmlformats.org/officeDocument/2006/relationships" xmlns:c16r2="http://schemas.microsoft.com/office/drawing/2015/06/chart">
   <c:date1904 val="0"/>
+  <c:lang val="zh-CN"/>
+  <c:roundedCorners val="1"/>
   <c:style val="10"/>
   <c:chart>
     <c:autoTitleDeleted val="1"/>
     <c:plotArea>
+      <c:layout/>
       <c:barChart>
         <c:barDir val="bar"/>
         <c:grouping val="clustered"/>
+        <c:varyColors val="1"/>
         <c:ser>
           <c:idx val="0"/>
           <c:order val="0"/>
@@ -1080,22 +1460,73 @@
               <a:noFill/>
             </a:ln>
           </c:spPr>
+          <c:invertIfNegative val="1"/>
           <c:dPt>
             <c:idx val="0"/>
+            <c:invertIfNegative val="1"/>
+            <c:bubble3D val="0"/>
             <c:spPr>
               <a:solidFill>
                 <a:srgbClr val="C67A1C"/>
               </a:solidFill>
             </c:spPr>
+            <c:extLst>
+              <c:ext xmlns:c16="http://schemas.microsoft.com/office/drawing/2014/chart" uri="{C3380CC4-5D6E-409C-BE32-E72D297353CC}">
+                <c16:uniqueId val="{00000001-1243-4BE1-B78C-BF3B7FA54855}"/>
+              </c:ext>
+            </c:extLst>
           </c:dPt>
           <c:dPt>
             <c:idx val="1"/>
+            <c:invertIfNegative val="1"/>
+            <c:bubble3D val="0"/>
             <c:spPr>
               <a:solidFill>
                 <a:srgbClr val="098D96"/>
               </a:solidFill>
             </c:spPr>
+            <c:extLst>
+              <c:ext xmlns:c16="http://schemas.microsoft.com/office/drawing/2014/chart" uri="{C3380CC4-5D6E-409C-BE32-E72D297353CC}">
+                <c16:uniqueId val="{00000003-1243-4BE1-B78C-BF3B7FA54855}"/>
+              </c:ext>
+            </c:extLst>
           </c:dPt>
+          <c:dLbls>
+            <c:numFmt formatCode="0.###" sourceLinked="0"/>
+            <c:spPr>
+              <a:noFill/>
+              <a:ln>
+                <a:noFill/>
+              </a:ln>
+              <a:effectLst/>
+            </c:spPr>
+            <c:txPr>
+              <a:bodyPr/>
+              <a:lstStyle/>
+              <a:p>
+                <a:pPr>
+                  <a:defRPr sz="1600">
+                    <a:solidFill>
+                      <a:srgbClr val="14283F"/>
+                    </a:solidFill>
+                  </a:defRPr>
+                </a:pPr>
+                <a:endParaRPr lang="zh-CN"/>
+              </a:p>
+            </c:txPr>
+            <c:showLegendKey val="0"/>
+            <c:showVal val="1"/>
+            <c:showCatName val="0"/>
+            <c:showSerName val="0"/>
+            <c:showPercent val="0"/>
+            <c:showBubbleSize val="0"/>
+            <c:showLeaderLines val="0"/>
+            <c:extLst>
+              <c:ext xmlns:c15="http://schemas.microsoft.com/office/drawing/2012/chart" uri="{CE6537A1-D6FC-4f65-9D91-7224C49458BB}">
+                <c15:showLeaderLines val="0"/>
+              </c:ext>
+            </c:extLst>
+          </c:dLbls>
           <c:cat>
             <c:strRef>
               <c:f>Sheet1!$A$2:$A$3</c:f>
@@ -1117,7 +1548,7 @@
                 <c:formatCode>General</c:formatCode>
                 <c:ptCount val="2"/>
                 <c:pt idx="0">
-                  <c:v>0.075</c:v>
+                  <c:v>7.4999999999999997E-2</c:v>
                 </c:pt>
                 <c:pt idx="1">
                   <c:v>191.6</c:v>
@@ -1125,29 +1556,31 @@
               </c:numCache>
             </c:numRef>
           </c:val>
+          <c:extLst>
+            <c:ext xmlns:c14="http://schemas.microsoft.com/office/drawing/2007/8/2/chart" uri="{6F2FDCE9-48DA-4B69-8628-5D25D57E5C99}">
+              <c14:invertSolidFillFmt>
+                <c14:spPr xmlns:c14="http://schemas.microsoft.com/office/drawing/2007/8/2/chart">
+                  <a:solidFill>
+                    <a:srgbClr val="FFFFFF"/>
+                  </a:solidFill>
+                  <a:ln>
+                    <a:noFill/>
+                  </a:ln>
+                </c14:spPr>
+              </c14:invertSolidFillFmt>
+            </c:ext>
+            <c:ext xmlns:c16="http://schemas.microsoft.com/office/drawing/2014/chart" uri="{C3380CC4-5D6E-409C-BE32-E72D297353CC}">
+              <c16:uniqueId val="{00000004-1243-4BE1-B78C-BF3B7FA54855}"/>
+            </c:ext>
+          </c:extLst>
         </c:ser>
         <c:dLbls>
-          <c:numFmt formatCode="0.###" sourceLinked="0"/>
-          <c:txPr>
-            <a:bodyPr/>
-            <a:lstStyle/>
-            <a:p>
-              <a:pPr>
-                <a:defRPr sz="1400">
-                  <a:solidFill>
-                    <a:srgbClr val="14283F"/>
-                  </a:solidFill>
-                </a:defRPr>
-              </a:pPr>
-            </a:p>
-          </c:txPr>
           <c:showLegendKey val="0"/>
           <c:showVal val="1"/>
           <c:showCatName val="0"/>
           <c:showSerName val="0"/>
           <c:showPercent val="0"/>
           <c:showBubbleSize val="0"/>
-          <c:showLeaderLines val="1"/>
         </c:dLbls>
         <c:gapWidth val="75"/>
         <c:axId val="2068027336"/>
@@ -1160,6 +1593,7 @@
         </c:scaling>
         <c:delete val="0"/>
         <c:axPos val="l"/>
+        <c:numFmt formatCode="General" sourceLinked="0"/>
         <c:majorTickMark val="none"/>
         <c:minorTickMark val="none"/>
         <c:tickLblPos val="nextTo"/>
@@ -1168,13 +1602,14 @@
           <a:lstStyle/>
           <a:p>
             <a:pPr>
-              <a:defRPr sz="1400">
+              <a:defRPr sz="1600">
                 <a:solidFill>
                   <a:srgbClr val="14283F"/>
                 </a:solidFill>
                 <a:latin typeface="Aptos"/>
               </a:defRPr>
             </a:pPr>
+            <a:endParaRPr lang="zh-CN"/>
           </a:p>
         </c:txPr>
         <c:crossAx val="2113994440"/>
@@ -1187,11 +1622,13 @@
       <c:valAx>
         <c:axId val="2113994440"/>
         <c:scaling>
-          <c:max val="200.0"/>
-          <c:min val="0.0"/>
+          <c:orientation val="minMax"/>
+          <c:max val="200"/>
+          <c:min val="0"/>
         </c:scaling>
         <c:delete val="0"/>
         <c:axPos val="b"/>
+        <c:numFmt formatCode="General" sourceLinked="1"/>
         <c:majorTickMark val="out"/>
         <c:minorTickMark val="none"/>
         <c:tickLblPos val="nextTo"/>
@@ -1200,20 +1637,24 @@
           <a:lstStyle/>
           <a:p>
             <a:pPr>
-              <a:defRPr sz="1200">
+              <a:defRPr sz="1400">
                 <a:solidFill>
                   <a:srgbClr val="647488"/>
                 </a:solidFill>
               </a:defRPr>
             </a:pPr>
+            <a:endParaRPr lang="zh-CN"/>
           </a:p>
         </c:txPr>
         <c:crossAx val="2068027336"/>
         <c:crosses val="autoZero"/>
-        <c:majorUnit val="50.0"/>
+        <c:crossBetween val="between"/>
+        <c:majorUnit val="50"/>
       </c:valAx>
     </c:plotArea>
+    <c:plotVisOnly val="1"/>
     <c:dispBlanksAs val="gap"/>
+    <c:showDLblsOverMax val="1"/>
   </c:chart>
   <c:txPr>
     <a:bodyPr/>
@@ -1232,7 +1673,7 @@
 </file>
 
 <file path=ppt/notesMasters/notesMaster1.xml><?xml version="1.0" encoding="utf-8"?>
-<p:notesMaster xmlns:a="http://schemas.openxmlformats.org/drawingml/2006/main" xmlns:p="http://schemas.openxmlformats.org/presentationml/2006/main" xmlns:r="http://schemas.openxmlformats.org/officeDocument/2006/relationships">
+<p:notesMaster xmlns:a="http://schemas.openxmlformats.org/drawingml/2006/main" xmlns:r="http://schemas.openxmlformats.org/officeDocument/2006/relationships" xmlns:p="http://schemas.openxmlformats.org/presentationml/2006/main">
   <p:cSld>
     <p:bg>
       <p:bgRef idx="1001">
@@ -1253,241 +1694,16 @@
           <a:chExt cx="0" cy="0"/>
         </a:xfrm>
       </p:grpSpPr>
-      <p:sp>
-        <p:nvSpPr>
-          <p:cNvPr id="2" name="Header Placeholder 1"/>
-          <p:cNvSpPr>
-            <a:spLocks noGrp="1"/>
-          </p:cNvSpPr>
-          <p:nvPr>
-            <p:ph type="hdr" sz="quarter"/>
-          </p:nvPr>
-        </p:nvSpPr>
-        <p:spPr>
-          <a:xfrm>
-            <a:off x="0" y="0"/>
-            <a:ext cx="2971800" cy="457200"/>
-          </a:xfrm>
-          <a:prstGeom prst="rect">
-            <a:avLst/>
-          </a:prstGeom>
-        </p:spPr>
-        <p:txBody>
-          <a:bodyPr vert="horz" lIns="91440" tIns="45720" rIns="91440" bIns="45720" rtlCol="0"/>
-          <a:lstStyle>
-            <a:lvl1pPr algn="l">
-              <a:defRPr sz="1200"/>
-            </a:lvl1pPr>
-          </a:lstStyle>
-          <a:p>
-            <a:endParaRPr lang="en-US"/>
-          </a:p>
-        </p:txBody>
-      </p:sp>
-      <p:sp>
-        <p:nvSpPr>
-          <p:cNvPr id="3" name="Date Placeholder 2"/>
-          <p:cNvSpPr>
-            <a:spLocks noGrp="1"/>
-          </p:cNvSpPr>
-          <p:nvPr>
-            <p:ph type="dt" idx="1"/>
-          </p:nvPr>
-        </p:nvSpPr>
-        <p:spPr>
-          <a:xfrm>
-            <a:off x="3884613" y="0"/>
-            <a:ext cx="2971800" cy="457200"/>
-          </a:xfrm>
-          <a:prstGeom prst="rect">
-            <a:avLst/>
-          </a:prstGeom>
-        </p:spPr>
-        <p:txBody>
-          <a:bodyPr vert="horz" lIns="91440" tIns="45720" rIns="91440" bIns="45720" rtlCol="0"/>
-          <a:lstStyle>
-            <a:lvl1pPr algn="r">
-              <a:defRPr sz="1200"/>
-            </a:lvl1pPr>
-          </a:lstStyle>
-          <a:p>
-            <a:fld id="{0F89C1C7-3DCD-1040-A9CF-14679D8B5DDD}" type="datetimeFigureOut">
-              <a:rPr lang="en-US" smtClean="0"/>
-              <a:t>10/17/16</a:t>
-            </a:fld>
-            <a:endParaRPr lang="en-US"/>
-          </a:p>
-        </p:txBody>
-      </p:sp>
-      <p:sp>
-        <p:nvSpPr>
-          <p:cNvPr id="4" name="Slide Image Placeholder 3"/>
-          <p:cNvSpPr>
-            <a:spLocks noGrp="1" noRot="1" noChangeAspect="1"/>
-          </p:cNvSpPr>
-          <p:nvPr>
-            <p:ph type="sldImg" idx="2"/>
-          </p:nvPr>
-        </p:nvSpPr>
-        <p:spPr>
-          <a:xfrm>
-            <a:off x="1143000" y="685800"/>
-            <a:ext cx="4572000" cy="3429000"/>
-          </a:xfrm>
-          <a:prstGeom prst="rect">
-            <a:avLst/>
-          </a:prstGeom>
-          <a:noFill/>
-          <a:ln w="12700">
-            <a:solidFill>
-              <a:prstClr val="black"/>
-            </a:solidFill>
-          </a:ln>
-        </p:spPr>
-        <p:txBody>
-          <a:bodyPr vert="horz" lIns="91440" tIns="45720" rIns="91440" bIns="45720" rtlCol="0" anchor="ctr"/>
-          <a:lstStyle/>
-          <a:p>
-            <a:endParaRPr lang="en-US"/>
-          </a:p>
-        </p:txBody>
-      </p:sp>
-      <p:sp>
-        <p:nvSpPr>
-          <p:cNvPr id="5" name="Notes Placeholder 4"/>
-          <p:cNvSpPr>
-            <a:spLocks noGrp="1"/>
-          </p:cNvSpPr>
-          <p:nvPr>
-            <p:ph type="body" sz="quarter" idx="3"/>
-          </p:nvPr>
-        </p:nvSpPr>
-        <p:spPr>
-          <a:xfrm>
-            <a:off x="685800" y="4343400"/>
-            <a:ext cx="5486400" cy="4114800"/>
-          </a:xfrm>
-          <a:prstGeom prst="rect">
-            <a:avLst/>
-          </a:prstGeom>
-        </p:spPr>
-        <p:txBody>
-          <a:bodyPr vert="horz" lIns="91440" tIns="45720" rIns="91440" bIns="45720" rtlCol="0"/>
-          <a:lstStyle/>
-          <a:p>
-            <a:pPr lvl="0"/>
-            <a:r>
-              <a:rPr lang="en-US" smtClean="0"/>
-              <a:t>Click to edit Master text styles</a:t>
-            </a:r>
-          </a:p>
-          <a:p>
-            <a:pPr lvl="1"/>
-            <a:r>
-              <a:rPr lang="en-US" smtClean="0"/>
-              <a:t>Second level</a:t>
-            </a:r>
-          </a:p>
-          <a:p>
-            <a:pPr lvl="2"/>
-            <a:r>
-              <a:rPr lang="en-US" smtClean="0"/>
-              <a:t>Third level</a:t>
-            </a:r>
-          </a:p>
-          <a:p>
-            <a:pPr lvl="3"/>
-            <a:r>
-              <a:rPr lang="en-US" smtClean="0"/>
-              <a:t>Fourth level</a:t>
-            </a:r>
-          </a:p>
-          <a:p>
-            <a:pPr lvl="4"/>
-            <a:r>
-              <a:rPr lang="en-US" smtClean="0"/>
-              <a:t>Fifth level</a:t>
-            </a:r>
-            <a:endParaRPr lang="en-US"/>
-          </a:p>
-        </p:txBody>
-      </p:sp>
-      <p:sp>
-        <p:nvSpPr>
-          <p:cNvPr id="6" name="Footer Placeholder 5"/>
-          <p:cNvSpPr>
-            <a:spLocks noGrp="1"/>
-          </p:cNvSpPr>
-          <p:nvPr>
-            <p:ph type="ftr" sz="quarter" idx="4"/>
-          </p:nvPr>
-        </p:nvSpPr>
-        <p:spPr>
-          <a:xfrm>
-            <a:off x="0" y="8685213"/>
-            <a:ext cx="2971800" cy="457200"/>
-          </a:xfrm>
-          <a:prstGeom prst="rect">
-            <a:avLst/>
-          </a:prstGeom>
-        </p:spPr>
-        <p:txBody>
-          <a:bodyPr vert="horz" lIns="91440" tIns="45720" rIns="91440" bIns="45720" rtlCol="0" anchor="b"/>
-          <a:lstStyle>
-            <a:lvl1pPr algn="l">
-              <a:defRPr sz="1200"/>
-            </a:lvl1pPr>
-          </a:lstStyle>
-          <a:p>
-            <a:endParaRPr lang="en-US"/>
-          </a:p>
-        </p:txBody>
-      </p:sp>
-      <p:sp>
-        <p:nvSpPr>
-          <p:cNvPr id="7" name="Slide Number Placeholder 6"/>
-          <p:cNvSpPr>
-            <a:spLocks noGrp="1"/>
-          </p:cNvSpPr>
-          <p:nvPr>
-            <p:ph type="sldNum" sz="quarter" idx="5"/>
-          </p:nvPr>
-        </p:nvSpPr>
-        <p:spPr>
-          <a:xfrm>
-            <a:off x="3884613" y="8685213"/>
-            <a:ext cx="2971800" cy="457200"/>
-          </a:xfrm>
-          <a:prstGeom prst="rect">
-            <a:avLst/>
-          </a:prstGeom>
-        </p:spPr>
-        <p:txBody>
-          <a:bodyPr vert="horz" lIns="91440" tIns="45720" rIns="91440" bIns="45720" rtlCol="0" anchor="b"/>
-          <a:lstStyle>
-            <a:lvl1pPr algn="r">
-              <a:defRPr sz="1200"/>
-            </a:lvl1pPr>
-          </a:lstStyle>
-          <a:p>
-            <a:fld id="{BB5E49A5-4136-284D-997B-48E1D791AD67}" type="slidenum">
-              <a:rPr lang="en-US" smtClean="0"/>
-              <a:t>‹#›</a:t>
-            </a:fld>
-            <a:endParaRPr lang="en-US"/>
-          </a:p>
-        </p:txBody>
-      </p:sp>
     </p:spTree>
     <p:extLst>
       <p:ext uri="{BB962C8B-B14F-4D97-AF65-F5344CB8AC3E}">
-        <p14:creationId xmlns:p14="http://schemas.microsoft.com/office/powerpoint/2010/main" val="2623252185"/>
+        <p14:creationId xmlns:p14="http://schemas.microsoft.com/office/powerpoint/2010/main" val="3095212814"/>
       </p:ext>
     </p:extLst>
   </p:cSld>
   <p:clrMap bg1="lt1" tx1="dk1" bg2="lt2" tx2="dk2" accent1="accent1" accent2="accent2" accent3="accent3" accent4="accent4" accent5="accent5" accent6="accent6" hlink="hlink" folHlink="folHlink"/>
   <p:notesStyle>
-    <a:lvl1pPr marL="0" algn="l" defTabSz="457200" rtl="0" eaLnBrk="1" latinLnBrk="0" hangingPunct="1">
+    <a:lvl1pPr marL="0" algn="l" defTabSz="914400" rtl="0" eaLnBrk="1" latinLnBrk="0" hangingPunct="1">
       <a:defRPr sz="1200" kern="1200">
         <a:solidFill>
           <a:schemeClr val="tx1"/>
@@ -1497,7 +1713,7 @@
         <a:cs typeface="+mn-cs"/>
       </a:defRPr>
     </a:lvl1pPr>
-    <a:lvl2pPr marL="457200" algn="l" defTabSz="457200" rtl="0" eaLnBrk="1" latinLnBrk="0" hangingPunct="1">
+    <a:lvl2pPr marL="457200" algn="l" defTabSz="914400" rtl="0" eaLnBrk="1" latinLnBrk="0" hangingPunct="1">
       <a:defRPr sz="1200" kern="1200">
         <a:solidFill>
           <a:schemeClr val="tx1"/>
@@ -1507,7 +1723,7 @@
         <a:cs typeface="+mn-cs"/>
       </a:defRPr>
     </a:lvl2pPr>
-    <a:lvl3pPr marL="914400" algn="l" defTabSz="457200" rtl="0" eaLnBrk="1" latinLnBrk="0" hangingPunct="1">
+    <a:lvl3pPr marL="914400" algn="l" defTabSz="914400" rtl="0" eaLnBrk="1" latinLnBrk="0" hangingPunct="1">
       <a:defRPr sz="1200" kern="1200">
         <a:solidFill>
           <a:schemeClr val="tx1"/>
@@ -1517,7 +1733,7 @@
         <a:cs typeface="+mn-cs"/>
       </a:defRPr>
     </a:lvl3pPr>
-    <a:lvl4pPr marL="1371600" algn="l" defTabSz="457200" rtl="0" eaLnBrk="1" latinLnBrk="0" hangingPunct="1">
+    <a:lvl4pPr marL="1371600" algn="l" defTabSz="914400" rtl="0" eaLnBrk="1" latinLnBrk="0" hangingPunct="1">
       <a:defRPr sz="1200" kern="1200">
         <a:solidFill>
           <a:schemeClr val="tx1"/>
@@ -1527,7 +1743,7 @@
         <a:cs typeface="+mn-cs"/>
       </a:defRPr>
     </a:lvl4pPr>
-    <a:lvl5pPr marL="1828800" algn="l" defTabSz="457200" rtl="0" eaLnBrk="1" latinLnBrk="0" hangingPunct="1">
+    <a:lvl5pPr marL="1828800" algn="l" defTabSz="914400" rtl="0" eaLnBrk="1" latinLnBrk="0" hangingPunct="1">
       <a:defRPr sz="1200" kern="1200">
         <a:solidFill>
           <a:schemeClr val="tx1"/>
@@ -1537,7 +1753,7 @@
         <a:cs typeface="+mn-cs"/>
       </a:defRPr>
     </a:lvl5pPr>
-    <a:lvl6pPr marL="2286000" algn="l" defTabSz="457200" rtl="0" eaLnBrk="1" latinLnBrk="0" hangingPunct="1">
+    <a:lvl6pPr marL="2286000" algn="l" defTabSz="914400" rtl="0" eaLnBrk="1" latinLnBrk="0" hangingPunct="1">
       <a:defRPr sz="1200" kern="1200">
         <a:solidFill>
           <a:schemeClr val="tx1"/>
@@ -1547,7 +1763,7 @@
         <a:cs typeface="+mn-cs"/>
       </a:defRPr>
     </a:lvl6pPr>
-    <a:lvl7pPr marL="2743200" algn="l" defTabSz="457200" rtl="0" eaLnBrk="1" latinLnBrk="0" hangingPunct="1">
+    <a:lvl7pPr marL="2743200" algn="l" defTabSz="914400" rtl="0" eaLnBrk="1" latinLnBrk="0" hangingPunct="1">
       <a:defRPr sz="1200" kern="1200">
         <a:solidFill>
           <a:schemeClr val="tx1"/>
@@ -1557,7 +1773,7 @@
         <a:cs typeface="+mn-cs"/>
       </a:defRPr>
     </a:lvl7pPr>
-    <a:lvl8pPr marL="3200400" algn="l" defTabSz="457200" rtl="0" eaLnBrk="1" latinLnBrk="0" hangingPunct="1">
+    <a:lvl8pPr marL="3200400" algn="l" defTabSz="914400" rtl="0" eaLnBrk="1" latinLnBrk="0" hangingPunct="1">
       <a:defRPr sz="1200" kern="1200">
         <a:solidFill>
           <a:schemeClr val="tx1"/>
@@ -1567,7 +1783,7 @@
         <a:cs typeface="+mn-cs"/>
       </a:defRPr>
     </a:lvl8pPr>
-    <a:lvl9pPr marL="3657600" algn="l" defTabSz="457200" rtl="0" eaLnBrk="1" latinLnBrk="0" hangingPunct="1">
+    <a:lvl9pPr marL="3657600" algn="l" defTabSz="914400" rtl="0" eaLnBrk="1" latinLnBrk="0" hangingPunct="1">
       <a:defRPr sz="1200" kern="1200">
         <a:solidFill>
           <a:schemeClr val="tx1"/>
@@ -1582,7 +1798,7 @@
 </file>
 
 <file path=ppt/notesSlides/notesSlide1.xml><?xml version="1.0" encoding="utf-8"?>
-<p:notes xmlns:a="http://schemas.openxmlformats.org/drawingml/2006/main" xmlns:p="http://schemas.openxmlformats.org/presentationml/2006/main" xmlns:r="http://schemas.openxmlformats.org/officeDocument/2006/relationships">
+<p:notes xmlns:a="http://schemas.openxmlformats.org/drawingml/2006/main" xmlns:r="http://schemas.openxmlformats.org/officeDocument/2006/relationships" xmlns:p="http://schemas.openxmlformats.org/presentationml/2006/main">
   <p:cSld>
     <p:spTree>
       <p:nvGrpSpPr>
@@ -1602,7 +1818,7 @@
         <p:nvSpPr>
           <p:cNvPr id="2" name="Slide Image Placeholder 1"/>
           <p:cNvSpPr>
-            <a:spLocks noGrp="1"/>
+            <a:spLocks noGrp="1" noRot="1" noChangeAspect="1"/>
           </p:cNvSpPr>
           <p:nvPr>
             <p:ph type="sldImg" idx="2"/>
@@ -1617,7 +1833,7 @@
             <a:spLocks noGrp="1"/>
           </p:cNvSpPr>
           <p:nvPr>
-            <p:ph type="body" idx="3" sz="quarter"/>
+            <p:ph type="body" sz="quarter" idx="3"/>
           </p:nvPr>
         </p:nvSpPr>
         <p:spPr/>
@@ -1629,7 +1845,9 @@
               <a:t>Weiyi Xia | Target 15 seconds</a:t>
             </a:r>
           </a:p>
-          <a:p/>
+          <a:p>
+            <a:endParaRPr/>
+          </a:p>
           <a:p>
             <a:r>
               <a:t>We study malicious instructions inside retrieved evidence. Our two-signal gate improves attack coverage, but our experiments also show why attack detection alone cannot establish a useful defence.</a:t>
@@ -1644,7 +1862,7 @@
             <a:spLocks noGrp="1"/>
           </p:cNvSpPr>
           <p:nvPr>
-            <p:ph type="sldNum" idx="5" sz="quarter"/>
+            <p:ph type="sldNum" sz="quarter" idx="5"/>
           </p:nvPr>
         </p:nvSpPr>
         <p:spPr/>
@@ -1658,7 +1876,7 @@
 </file>
 
 <file path=ppt/notesSlides/notesSlide10.xml><?xml version="1.0" encoding="utf-8"?>
-<p:notes xmlns:a="http://schemas.openxmlformats.org/drawingml/2006/main" xmlns:p="http://schemas.openxmlformats.org/presentationml/2006/main" xmlns:r="http://schemas.openxmlformats.org/officeDocument/2006/relationships">
+<p:notes xmlns:a="http://schemas.openxmlformats.org/drawingml/2006/main" xmlns:r="http://schemas.openxmlformats.org/officeDocument/2006/relationships" xmlns:p="http://schemas.openxmlformats.org/presentationml/2006/main">
   <p:cSld>
     <p:spTree>
       <p:nvGrpSpPr>
@@ -1678,7 +1896,7 @@
         <p:nvSpPr>
           <p:cNvPr id="2" name="Slide Image Placeholder 1"/>
           <p:cNvSpPr>
-            <a:spLocks noGrp="1"/>
+            <a:spLocks noGrp="1" noRot="1" noChangeAspect="1"/>
           </p:cNvSpPr>
           <p:nvPr>
             <p:ph type="sldImg" idx="2"/>
@@ -1693,7 +1911,7 @@
             <a:spLocks noGrp="1"/>
           </p:cNvSpPr>
           <p:nvPr>
-            <p:ph type="body" idx="3" sz="quarter"/>
+            <p:ph type="body" sz="quarter" idx="3"/>
           </p:nvPr>
         </p:nvSpPr>
         <p:spPr/>
@@ -1705,13 +1923,17 @@
               <a:t>Xinye He | Target 35 seconds</a:t>
             </a:r>
           </a:p>
-          <a:p/>
+          <a:p>
+            <a:endParaRPr/>
+          </a:p>
           <a:p>
             <a:r>
               <a:t>Each cell contains the same thirty-three source emails. The numbers show rule-only marker successes followed by combined successes. All incremental benefit occurs in the verification template's suffix cell: fourteen falls to five. Its prefix cell stays at two, and the other three templates have zero successes under both gates. This locates nine prevented successes in one construction. It supports complementary coverage in this crossing, while giving no evidence of uniform benefit across unseen attack families.</a:t>
             </a:r>
           </a:p>
-          <a:p/>
+          <a:p>
+            <a:endParaRPr/>
+          </a:p>
           <a:p>
             <a:r>
               <a:t>All 7 remaining successes use the verification template. The probe removes 9 suffix successes beyond the rules; prefix stays at 2. Moving the payload also changes answer accuracy (11/33 prefix vs 19/33 suffix, direct template).</a:t>
@@ -1726,7 +1948,7 @@
             <a:spLocks noGrp="1"/>
           </p:cNvSpPr>
           <p:nvPr>
-            <p:ph type="sldNum" idx="5" sz="quarter"/>
+            <p:ph type="sldNum" sz="quarter" idx="5"/>
           </p:nvPr>
         </p:nvSpPr>
         <p:spPr/>
@@ -1740,7 +1962,7 @@
 </file>
 
 <file path=ppt/notesSlides/notesSlide11.xml><?xml version="1.0" encoding="utf-8"?>
-<p:notes xmlns:a="http://schemas.openxmlformats.org/drawingml/2006/main" xmlns:p="http://schemas.openxmlformats.org/presentationml/2006/main" xmlns:r="http://schemas.openxmlformats.org/officeDocument/2006/relationships">
+<p:notes xmlns:a="http://schemas.openxmlformats.org/drawingml/2006/main" xmlns:r="http://schemas.openxmlformats.org/officeDocument/2006/relationships" xmlns:p="http://schemas.openxmlformats.org/presentationml/2006/main">
   <p:cSld>
     <p:spTree>
       <p:nvGrpSpPr>
@@ -1760,7 +1982,7 @@
         <p:nvSpPr>
           <p:cNvPr id="2" name="Slide Image Placeholder 1"/>
           <p:cNvSpPr>
-            <a:spLocks noGrp="1"/>
+            <a:spLocks noGrp="1" noRot="1" noChangeAspect="1"/>
           </p:cNvSpPr>
           <p:nvPr>
             <p:ph type="sldImg" idx="2"/>
@@ -1775,7 +1997,7 @@
             <a:spLocks noGrp="1"/>
           </p:cNvSpPr>
           <p:nvPr>
-            <p:ph type="body" idx="3" sz="quarter"/>
+            <p:ph type="body" sz="quarter" idx="3"/>
           </p:nvPr>
         </p:nvSpPr>
         <p:spPr/>
@@ -1787,7 +2009,9 @@
               <a:t>Xinye He | Target 40 seconds</a:t>
             </a:r>
           </a:p>
-          <a:p/>
+          <a:p>
+            <a:endParaRPr/>
+          </a:p>
           <a:p>
             <a:r>
               <a:t>The benign challenge overturns a broad clean-retention claim. Each bar separates twelve ordinary instructions from twelve cue-bearing benign paragraphs. Rules reject twelve, the probe twenty-two, and the combination all twenty-four. Mixed-window training rejects eleven, while the external classifier rejects four. These are authored diagnostic negatives, not an estimate of real-world prevalence. They nevertheless show that preserving ordinary emails does not mean preserving legitimate instructions. The combined gate cannot currently be recommended for general deployment.</a:t>
@@ -1802,7 +2026,7 @@
             <a:spLocks noGrp="1"/>
           </p:cNvSpPr>
           <p:nvPr>
-            <p:ph type="sldNum" idx="5" sz="quarter"/>
+            <p:ph type="sldNum" sz="quarter" idx="5"/>
           </p:nvPr>
         </p:nvSpPr>
         <p:spPr/>
@@ -1816,7 +2040,7 @@
 </file>
 
 <file path=ppt/notesSlides/notesSlide12.xml><?xml version="1.0" encoding="utf-8"?>
-<p:notes xmlns:a="http://schemas.openxmlformats.org/drawingml/2006/main" xmlns:p="http://schemas.openxmlformats.org/presentationml/2006/main" xmlns:r="http://schemas.openxmlformats.org/officeDocument/2006/relationships">
+<p:notes xmlns:a="http://schemas.openxmlformats.org/drawingml/2006/main" xmlns:r="http://schemas.openxmlformats.org/officeDocument/2006/relationships" xmlns:p="http://schemas.openxmlformats.org/presentationml/2006/main">
   <p:cSld>
     <p:spTree>
       <p:nvGrpSpPr>
@@ -1836,7 +2060,7 @@
         <p:nvSpPr>
           <p:cNvPr id="2" name="Slide Image Placeholder 1"/>
           <p:cNvSpPr>
-            <a:spLocks noGrp="1"/>
+            <a:spLocks noGrp="1" noRot="1" noChangeAspect="1"/>
           </p:cNvSpPr>
           <p:nvPr>
             <p:ph type="sldImg" idx="2"/>
@@ -1851,7 +2075,7 @@
             <a:spLocks noGrp="1"/>
           </p:cNvSpPr>
           <p:nvPr>
-            <p:ph type="body" idx="3" sz="quarter"/>
+            <p:ph type="body" sz="quarter" idx="3"/>
           </p:nvPr>
         </p:nvSpPr>
         <p:spPr/>
@@ -1863,13 +2087,17 @@
               <a:t>Xinye He | Target 40 seconds</a:t>
             </a:r>
           </a:p>
-          <a:p/>
+          <a:p>
+            <a:endParaRPr/>
+          </a:p>
           <a:p>
             <a:r>
               <a:t>We checked the external model's labels with actual positive and negative controls. Direct model-card-style input at five hundred twelve tokens still gives AUROC point four one five, compared with point four three zero under windows; none of the original passages is truncated. Mixed-window probe training improves AUROC to point nine two six, but fixed-threshold recall falls to eleven point seven percent. The weight sweep is also flat from point two five to one. Neither a better ranking nor a larger cue weight repairs the operating point.</a:t>
             </a:r>
           </a:p>
-          <a:p/>
+          <a:p>
+            <a:endParaRPr/>
+          </a:p>
           <a:p>
             <a:r>
               <a:t>Labels SAFE=0 / INJECTION=1 were verified. Clean financial emails score high; ordinary task requests score low. The checkpoint and 0.5 threshold stay fixed. No original passage exceeds 512 tokens, so truncation cannot explain the low AUROC. Only windows overlapping the inserted payload receive positive labels.</a:t>
@@ -1884,7 +2112,7 @@
             <a:spLocks noGrp="1"/>
           </p:cNvSpPr>
           <p:nvPr>
-            <p:ph type="sldNum" idx="5" sz="quarter"/>
+            <p:ph type="sldNum" sz="quarter" idx="5"/>
           </p:nvPr>
         </p:nvSpPr>
         <p:spPr/>
@@ -1898,7 +2126,7 @@
 </file>
 
 <file path=ppt/notesSlides/notesSlide13.xml><?xml version="1.0" encoding="utf-8"?>
-<p:notes xmlns:a="http://schemas.openxmlformats.org/drawingml/2006/main" xmlns:p="http://schemas.openxmlformats.org/presentationml/2006/main" xmlns:r="http://schemas.openxmlformats.org/officeDocument/2006/relationships">
+<p:notes xmlns:a="http://schemas.openxmlformats.org/drawingml/2006/main" xmlns:r="http://schemas.openxmlformats.org/officeDocument/2006/relationships" xmlns:p="http://schemas.openxmlformats.org/presentationml/2006/main">
   <p:cSld>
     <p:spTree>
       <p:nvGrpSpPr>
@@ -1918,7 +2146,7 @@
         <p:nvSpPr>
           <p:cNvPr id="2" name="Slide Image Placeholder 1"/>
           <p:cNvSpPr>
-            <a:spLocks noGrp="1"/>
+            <a:spLocks noGrp="1" noRot="1" noChangeAspect="1"/>
           </p:cNvSpPr>
           <p:nvPr>
             <p:ph type="sldImg" idx="2"/>
@@ -1933,7 +2161,7 @@
             <a:spLocks noGrp="1"/>
           </p:cNvSpPr>
           <p:nvPr>
-            <p:ph type="body" idx="3" sz="quarter"/>
+            <p:ph type="body" sz="quarter" idx="3"/>
           </p:nvPr>
         </p:nvSpPr>
         <p:spPr/>
@@ -1945,13 +2173,17 @@
               <a:t>Xinye He | Target 35 seconds</a:t>
             </a:r>
           </a:p>
-          <a:p/>
+          <a:p>
+            <a:endParaRPr/>
+          </a:p>
           <a:p>
             <a:r>
               <a:t>Placement can change which facts survive. The expanded suffix example retains the correct Deel amount. In the earlier pilot's prefix case zero, the combined gate removes the fact-containing chunk and answers twenty-five dollars instead. These are distinct recorded cases using the same source email. The uncached median gate cost is point zero seven five milliseconds for rules, versus one hundred ninety-one point six for the combination. Added coverage must justify both evidence loss and computation.</a:t>
             </a:r>
           </a:p>
-          <a:p/>
+          <a:p>
+            <a:endParaRPr/>
+          </a:p>
           <a:p>
             <a:r>
               <a:t>Whole-chunk rejection trades attack suppression for lost evidence, so security and answer quality must be reported together. Sentence-level removal is a future option, but needs its own answer-level check. Timing comes from the uncached pilot. Expanded deterministic responses may be reused, so expanded wall-clock time is not a latency comparison.</a:t>
@@ -1966,7 +2198,7 @@
             <a:spLocks noGrp="1"/>
           </p:cNvSpPr>
           <p:nvPr>
-            <p:ph type="sldNum" idx="5" sz="quarter"/>
+            <p:ph type="sldNum" sz="quarter" idx="5"/>
           </p:nvPr>
         </p:nvSpPr>
         <p:spPr/>
@@ -1980,7 +2212,7 @@
 </file>
 
 <file path=ppt/notesSlides/notesSlide14.xml><?xml version="1.0" encoding="utf-8"?>
-<p:notes xmlns:a="http://schemas.openxmlformats.org/drawingml/2006/main" xmlns:p="http://schemas.openxmlformats.org/presentationml/2006/main" xmlns:r="http://schemas.openxmlformats.org/officeDocument/2006/relationships">
+<p:notes xmlns:a="http://schemas.openxmlformats.org/drawingml/2006/main" xmlns:r="http://schemas.openxmlformats.org/officeDocument/2006/relationships" xmlns:p="http://schemas.openxmlformats.org/presentationml/2006/main">
   <p:cSld>
     <p:spTree>
       <p:nvGrpSpPr>
@@ -2000,7 +2232,7 @@
         <p:nvSpPr>
           <p:cNvPr id="2" name="Slide Image Placeholder 1"/>
           <p:cNvSpPr>
-            <a:spLocks noGrp="1"/>
+            <a:spLocks noGrp="1" noRot="1" noChangeAspect="1"/>
           </p:cNvSpPr>
           <p:nvPr>
             <p:ph type="sldImg" idx="2"/>
@@ -2015,7 +2247,7 @@
             <a:spLocks noGrp="1"/>
           </p:cNvSpPr>
           <p:nvPr>
-            <p:ph type="body" idx="3" sz="quarter"/>
+            <p:ph type="body" sz="quarter" idx="3"/>
           </p:nvPr>
         </p:nvSpPr>
         <p:spPr/>
@@ -2027,7 +2259,9 @@
               <a:t>Xinye He | Target 30 seconds</a:t>
             </a:r>
           </a:p>
-          <a:p/>
+          <a:p>
+            <a:endParaRPr/>
+          </a:p>
           <a:p>
             <a:r>
               <a:t>H1 is supported for complementary attack coverage in this implementation. Overall deployment benefit remains limited by benign rejection and answer failures. Our study uses one small generator, thirty-three emails and fixed attacks. Future work should condition detection on the task, remove suspect sentences while preserving facts, and evaluate adaptive attackers. The repository preserves both improvements and failures. Thank you.</a:t>
@@ -2042,7 +2276,7 @@
             <a:spLocks noGrp="1"/>
           </p:cNvSpPr>
           <p:nvPr>
-            <p:ph type="sldNum" idx="5" sz="quarter"/>
+            <p:ph type="sldNum" sz="quarter" idx="5"/>
           </p:nvPr>
         </p:nvSpPr>
         <p:spPr/>
@@ -2056,7 +2290,7 @@
 </file>
 
 <file path=ppt/notesSlides/notesSlide2.xml><?xml version="1.0" encoding="utf-8"?>
-<p:notes xmlns:a="http://schemas.openxmlformats.org/drawingml/2006/main" xmlns:p="http://schemas.openxmlformats.org/presentationml/2006/main" xmlns:r="http://schemas.openxmlformats.org/officeDocument/2006/relationships">
+<p:notes xmlns:a="http://schemas.openxmlformats.org/drawingml/2006/main" xmlns:r="http://schemas.openxmlformats.org/officeDocument/2006/relationships" xmlns:p="http://schemas.openxmlformats.org/presentationml/2006/main">
   <p:cSld>
     <p:spTree>
       <p:nvGrpSpPr>
@@ -2076,7 +2310,7 @@
         <p:nvSpPr>
           <p:cNvPr id="2" name="Slide Image Placeholder 1"/>
           <p:cNvSpPr>
-            <a:spLocks noGrp="1"/>
+            <a:spLocks noGrp="1" noRot="1" noChangeAspect="1"/>
           </p:cNvSpPr>
           <p:nvPr>
             <p:ph type="sldImg" idx="2"/>
@@ -2091,7 +2325,7 @@
             <a:spLocks noGrp="1"/>
           </p:cNvSpPr>
           <p:nvPr>
-            <p:ph type="body" idx="3" sz="quarter"/>
+            <p:ph type="body" sz="quarter" idx="3"/>
           </p:nvPr>
         </p:nvSpPr>
         <p:spPr/>
@@ -2103,7 +2337,9 @@
               <a:t>Weiyi Xia | Target 40 seconds</a:t>
             </a:r>
           </a:p>
-          <a:p/>
+          <a:p>
+            <a:endParaRPr/>
+          </a:p>
           <a:p>
             <a:r>
               <a:t>The legitimate question asks how much was paid to Deel. The email states eight thousand eight hundred and three dollars and fifteen cents. An attacker adds the highlighted instruction asking for a fixed marker instead. Follow the three steps: the email is retrieved, the model reads the inserted instruction, and the unfiltered answer becomes the marker. This is an observed output from expanded case two, not a hypothetical example. Rules and our combination preserve the correct amount in this suffix case.</a:t>
@@ -2118,7 +2354,7 @@
             <a:spLocks noGrp="1"/>
           </p:cNvSpPr>
           <p:nvPr>
-            <p:ph type="sldNum" idx="5" sz="quarter"/>
+            <p:ph type="sldNum" sz="quarter" idx="5"/>
           </p:nvPr>
         </p:nvSpPr>
         <p:spPr/>
@@ -2132,7 +2368,7 @@
 </file>
 
 <file path=ppt/notesSlides/notesSlide3.xml><?xml version="1.0" encoding="utf-8"?>
-<p:notes xmlns:a="http://schemas.openxmlformats.org/drawingml/2006/main" xmlns:p="http://schemas.openxmlformats.org/presentationml/2006/main" xmlns:r="http://schemas.openxmlformats.org/officeDocument/2006/relationships">
+<p:notes xmlns:a="http://schemas.openxmlformats.org/drawingml/2006/main" xmlns:r="http://schemas.openxmlformats.org/officeDocument/2006/relationships" xmlns:p="http://schemas.openxmlformats.org/presentationml/2006/main">
   <p:cSld>
     <p:spTree>
       <p:nvGrpSpPr>
@@ -2152,7 +2388,7 @@
         <p:nvSpPr>
           <p:cNvPr id="2" name="Slide Image Placeholder 1"/>
           <p:cNvSpPr>
-            <a:spLocks noGrp="1"/>
+            <a:spLocks noGrp="1" noRot="1" noChangeAspect="1"/>
           </p:cNvSpPr>
           <p:nvPr>
             <p:ph type="sldImg" idx="2"/>
@@ -2167,7 +2403,7 @@
             <a:spLocks noGrp="1"/>
           </p:cNvSpPr>
           <p:nvPr>
-            <p:ph type="body" idx="3" sz="quarter"/>
+            <p:ph type="body" sz="quarter" idx="3"/>
           </p:nvPr>
         </p:nvSpPr>
         <p:spPr/>
@@ -2179,13 +2415,17 @@
               <a:t>Weiyi Xia | Target 45 seconds</a:t>
             </a:r>
           </a:p>
-          <a:p/>
+          <a:p>
+            <a:endParaRPr/>
+          </a:p>
           <a:p>
             <a:r>
               <a:t>Existing defences intervene at different points. StruQ separates instructions and data using a compatible trained model. Spotlighting signals evidence provenance. Detection and removal inspect suspect text, while RobustRAG isolates evidence and aggregates answers under a corruption model. Our project asks a narrower evaluation question: what do passage decisions do to security, legitimate answers and cost together? Public BIPIA data supports the study; our document-scoped retrieval and generation adapter is locally implemented.</a:t>
             </a:r>
           </a:p>
-          <a:p/>
+          <a:p>
+            <a:endParaRPr/>
+          </a:p>
           <a:p>
             <a:r>
               <a:t>The gate tests instruction risk before generation. A small, inspectable passage gate compared on three outcomes together: attacks recognised, legitimate answers preserved and computation added. We also test it against an external classifier and benign instructions.</a:t>
@@ -2200,7 +2440,7 @@
             <a:spLocks noGrp="1"/>
           </p:cNvSpPr>
           <p:nvPr>
-            <p:ph type="sldNum" idx="5" sz="quarter"/>
+            <p:ph type="sldNum" sz="quarter" idx="5"/>
           </p:nvPr>
         </p:nvSpPr>
         <p:spPr/>
@@ -2214,7 +2454,7 @@
 </file>
 
 <file path=ppt/notesSlides/notesSlide4.xml><?xml version="1.0" encoding="utf-8"?>
-<p:notes xmlns:a="http://schemas.openxmlformats.org/drawingml/2006/main" xmlns:p="http://schemas.openxmlformats.org/presentationml/2006/main" xmlns:r="http://schemas.openxmlformats.org/officeDocument/2006/relationships">
+<p:notes xmlns:a="http://schemas.openxmlformats.org/drawingml/2006/main" xmlns:r="http://schemas.openxmlformats.org/officeDocument/2006/relationships" xmlns:p="http://schemas.openxmlformats.org/presentationml/2006/main">
   <p:cSld>
     <p:spTree>
       <p:nvGrpSpPr>
@@ -2234,7 +2474,7 @@
         <p:nvSpPr>
           <p:cNvPr id="2" name="Slide Image Placeholder 1"/>
           <p:cNvSpPr>
-            <a:spLocks noGrp="1"/>
+            <a:spLocks noGrp="1" noRot="1" noChangeAspect="1"/>
           </p:cNvSpPr>
           <p:nvPr>
             <p:ph type="sldImg" idx="2"/>
@@ -2249,7 +2489,7 @@
             <a:spLocks noGrp="1"/>
           </p:cNvSpPr>
           <p:nvPr>
-            <p:ph type="body" idx="3" sz="quarter"/>
+            <p:ph type="body" sz="quarter" idx="3"/>
           </p:nvPr>
         </p:nvSpPr>
         <p:spPr/>
@@ -2261,7 +2501,9 @@
               <a:t>Weiyi Xia | Target 40 seconds</a:t>
             </a:r>
           </a:p>
-          <a:p/>
+          <a:p>
+            <a:endParaRPr/>
+          </a:p>
           <a:p>
             <a:r>
               <a:t>We ask three questions. Can a gate detect attacks while preserving legitimate content? Do the two signals provide complementary coverage beyond their components and a released detector? Do those decisions improve actual answers at a reasonable cost? H1 predicts complementary attack coverage. It does not predict universal robustness. We therefore separate evidence for H1 from whether the complete application is useful, and return to that distinction in our conclusion.</a:t>
@@ -2276,7 +2518,7 @@
             <a:spLocks noGrp="1"/>
           </p:cNvSpPr>
           <p:nvPr>
-            <p:ph type="sldNum" idx="5" sz="quarter"/>
+            <p:ph type="sldNum" sz="quarter" idx="5"/>
           </p:nvPr>
         </p:nvSpPr>
         <p:spPr/>
@@ -2290,7 +2532,7 @@
 </file>
 
 <file path=ppt/notesSlides/notesSlide5.xml><?xml version="1.0" encoding="utf-8"?>
-<p:notes xmlns:a="http://schemas.openxmlformats.org/drawingml/2006/main" xmlns:p="http://schemas.openxmlformats.org/presentationml/2006/main" xmlns:r="http://schemas.openxmlformats.org/officeDocument/2006/relationships">
+<p:notes xmlns:a="http://schemas.openxmlformats.org/drawingml/2006/main" xmlns:r="http://schemas.openxmlformats.org/officeDocument/2006/relationships" xmlns:p="http://schemas.openxmlformats.org/presentationml/2006/main">
   <p:cSld>
     <p:spTree>
       <p:nvGrpSpPr>
@@ -2310,7 +2552,7 @@
         <p:nvSpPr>
           <p:cNvPr id="2" name="Slide Image Placeholder 1"/>
           <p:cNvSpPr>
-            <a:spLocks noGrp="1"/>
+            <a:spLocks noGrp="1" noRot="1" noChangeAspect="1"/>
           </p:cNvSpPr>
           <p:nvPr>
             <p:ph type="sldImg" idx="2"/>
@@ -2325,7 +2567,7 @@
             <a:spLocks noGrp="1"/>
           </p:cNvSpPr>
           <p:nvPr>
-            <p:ph type="body" idx="3" sz="quarter"/>
+            <p:ph type="body" sz="quarter" idx="3"/>
           </p:nvPr>
         </p:nvSpPr>
         <p:spPr/>
@@ -2337,13 +2579,17 @@
               <a:t>Weiyi Xia | Target 50 seconds</a:t>
             </a:r>
           </a:p>
-          <a:p/>
+          <a:p>
+            <a:endParaRPr/>
+          </a:p>
           <a:p>
             <a:r>
               <a:t>The attacker inserts text into a source email before chunking. Our document-scoped TF-IDF retriever selects up to two chunks. The gate inspects each retrieved chunk before it crosses the evidence boundary. Accepted chunks go to a fixed Qwen generator; an empty context returns UNKNOWN. The question, system prompt and decoding settings are held fixed across gates. This follows the report's pipeline and lets us trace attack exposure, filtering and generated answers separately, rather than equating detector recall with application safety.</a:t>
             </a:r>
           </a:p>
-          <a:p/>
+          <a:p>
+            <a:endParaRPr/>
+          </a:p>
           <a:p>
             <a:r>
               <a:t>Email split into 600-character chunks (stride 500); the question and system prompt never change. Empty retained context returns UNKNOWN without calling the generator; Qwen2.5-0.5B-Instruct, greedy, CPU. A defence only changes which chunks reach generation; it receives no extra privileged warning.</a:t>
@@ -2358,7 +2604,7 @@
             <a:spLocks noGrp="1"/>
           </p:cNvSpPr>
           <p:nvPr>
-            <p:ph type="sldNum" idx="5" sz="quarter"/>
+            <p:ph type="sldNum" sz="quarter" idx="5"/>
           </p:nvPr>
         </p:nvSpPr>
         <p:spPr/>
@@ -2372,7 +2618,7 @@
 </file>
 
 <file path=ppt/notesSlides/notesSlide6.xml><?xml version="1.0" encoding="utf-8"?>
-<p:notes xmlns:a="http://schemas.openxmlformats.org/drawingml/2006/main" xmlns:p="http://schemas.openxmlformats.org/presentationml/2006/main" xmlns:r="http://schemas.openxmlformats.org/officeDocument/2006/relationships">
+<p:notes xmlns:a="http://schemas.openxmlformats.org/drawingml/2006/main" xmlns:r="http://schemas.openxmlformats.org/officeDocument/2006/relationships" xmlns:p="http://schemas.openxmlformats.org/presentationml/2006/main">
   <p:cSld>
     <p:spTree>
       <p:nvGrpSpPr>
@@ -2392,7 +2638,7 @@
         <p:nvSpPr>
           <p:cNvPr id="2" name="Slide Image Placeholder 1"/>
           <p:cNvSpPr>
-            <a:spLocks noGrp="1"/>
+            <a:spLocks noGrp="1" noRot="1" noChangeAspect="1"/>
           </p:cNvSpPr>
           <p:nvPr>
             <p:ph type="sldImg" idx="2"/>
@@ -2407,7 +2653,7 @@
             <a:spLocks noGrp="1"/>
           </p:cNvSpPr>
           <p:nvPr>
-            <p:ph type="body" idx="3" sz="quarter"/>
+            <p:ph type="body" sz="quarter" idx="3"/>
           </p:nvPr>
         </p:nvSpPr>
         <p:spPr/>
@@ -2419,7 +2665,9 @@
               <a:t>Weiyi Xia | Target 45 seconds</a:t>
             </a:r>
           </a:p>
-          <a:p/>
+          <a:p>
+            <a:endParaRPr/>
+          </a:p>
           <a:p>
             <a:r>
               <a:t>The probe scores frozen BERT windows; the rule detects explicit response-control wording. The combination uses one minus the product shown here, with cue weight point seven five. At the selected threshold, about point one eight five, a rule hit always crosses the threshold. Without a rule hit, the combined score equals the probe score. The rejected set is therefore their union at this operating point: sixty-three plus twenty-two minus eleven overlaps gives seventy-four detections. This is the core ablation explanation.</a:t>
@@ -2434,7 +2682,7 @@
             <a:spLocks noGrp="1"/>
           </p:cNvSpPr>
           <p:nvPr>
-            <p:ph type="sldNum" idx="5" sz="quarter"/>
+            <p:ph type="sldNum" sz="quarter" idx="5"/>
           </p:nvPr>
         </p:nvSpPr>
         <p:spPr/>
@@ -2448,7 +2696,7 @@
 </file>
 
 <file path=ppt/notesSlides/notesSlide7.xml><?xml version="1.0" encoding="utf-8"?>
-<p:notes xmlns:a="http://schemas.openxmlformats.org/drawingml/2006/main" xmlns:p="http://schemas.openxmlformats.org/presentationml/2006/main" xmlns:r="http://schemas.openxmlformats.org/officeDocument/2006/relationships">
+<p:notes xmlns:a="http://schemas.openxmlformats.org/drawingml/2006/main" xmlns:r="http://schemas.openxmlformats.org/officeDocument/2006/relationships" xmlns:p="http://schemas.openxmlformats.org/presentationml/2006/main">
   <p:cSld>
     <p:spTree>
       <p:nvGrpSpPr>
@@ -2468,7 +2716,7 @@
         <p:nvSpPr>
           <p:cNvPr id="2" name="Slide Image Placeholder 1"/>
           <p:cNvSpPr>
-            <a:spLocks noGrp="1"/>
+            <a:spLocks noGrp="1" noRot="1" noChangeAspect="1"/>
           </p:cNvSpPr>
           <p:nvPr>
             <p:ph type="sldImg" idx="2"/>
@@ -2483,7 +2731,7 @@
             <a:spLocks noGrp="1"/>
           </p:cNvSpPr>
           <p:nvPr>
-            <p:ph type="body" idx="3" sz="quarter"/>
+            <p:ph type="body" sz="quarter" idx="3"/>
           </p:nvPr>
         </p:nvSpPr>
         <p:spPr/>
@@ -2495,13 +2743,17 @@
               <a:t>Weiyi Xia | Target 35 seconds</a:t>
             </a:r>
           </a:p>
-          <a:p/>
+          <a:p>
+            <a:endParaRPr/>
+          </a:p>
           <a:p>
             <a:r>
               <a:t>The original passage test contains thirty-seven clean records and one hundred eleven attacks. The expanded RAG evaluation crosses thirty-three distinct emails, four templates and two positions: two hundred sixty-four attacked variants per gate. A separate challenge contains twenty-four legitimate instruction paragraphs. Repeated variants are clustered by source email for uncertainty. The expansion reuses identical deterministic responses; runtime measurements come from a separate uncached pilot. I will now hand over to Xinye for the outcomes.</a:t>
             </a:r>
           </a:p>
-          <a:p/>
+          <a:p>
+            <a:endParaRPr/>
+          </a:p>
           <a:p>
             <a:r>
               <a:t>Marker success is counted only if RAG_OVERRIDE_764 appears in the generated answer. Correctness: amount set must match; an unanswerable question needs exactly UNKNOWN. Variants from one source email are clustered for uncertainty. The 264 variants represent 33 source emails, not 264 independent documents.</a:t>
@@ -2516,7 +2768,7 @@
             <a:spLocks noGrp="1"/>
           </p:cNvSpPr>
           <p:nvPr>
-            <p:ph type="sldNum" idx="5" sz="quarter"/>
+            <p:ph type="sldNum" sz="quarter" idx="5"/>
           </p:nvPr>
         </p:nvSpPr>
         <p:spPr/>
@@ -2530,7 +2782,7 @@
 </file>
 
 <file path=ppt/notesSlides/notesSlide8.xml><?xml version="1.0" encoding="utf-8"?>
-<p:notes xmlns:a="http://schemas.openxmlformats.org/drawingml/2006/main" xmlns:p="http://schemas.openxmlformats.org/presentationml/2006/main" xmlns:r="http://schemas.openxmlformats.org/officeDocument/2006/relationships">
+<p:notes xmlns:a="http://schemas.openxmlformats.org/drawingml/2006/main" xmlns:r="http://schemas.openxmlformats.org/officeDocument/2006/relationships" xmlns:p="http://schemas.openxmlformats.org/presentationml/2006/main">
   <p:cSld>
     <p:spTree>
       <p:nvGrpSpPr>
@@ -2550,7 +2802,7 @@
         <p:nvSpPr>
           <p:cNvPr id="2" name="Slide Image Placeholder 1"/>
           <p:cNvSpPr>
-            <a:spLocks noGrp="1"/>
+            <a:spLocks noGrp="1" noRot="1" noChangeAspect="1"/>
           </p:cNvSpPr>
           <p:nvPr>
             <p:ph type="sldImg" idx="2"/>
@@ -2565,7 +2817,7 @@
             <a:spLocks noGrp="1"/>
           </p:cNvSpPr>
           <p:nvPr>
-            <p:ph type="body" idx="3" sz="quarter"/>
+            <p:ph type="body" sz="quarter" idx="3"/>
           </p:nvPr>
         </p:nvSpPr>
         <p:spPr/>
@@ -2577,7 +2829,9 @@
               <a:t>Xinye He | Target 45 seconds</a:t>
             </a:r>
           </a:p>
-          <a:p/>
+          <a:p>
+            <a:endParaRPr/>
+          </a:p>
           <a:p>
             <a:r>
               <a:t>The combination detects sixty-six point seven percent of attacked passages, compared with fifty-six point eight for rules and nineteen point eight for the probe. The three local detectors reject none of the original thirty-seven clean emails. The external DeBERTa window wrapper detects sixty-five point eight percent, but falsely rejects eighty-three point eight percent of clean emails. The two panels deliberately use separate denominators: one hundred eleven attacks and thirty-seven clean records. That clean sample is not enough to establish benign transfer.</a:t>
@@ -2592,7 +2846,7 @@
             <a:spLocks noGrp="1"/>
           </p:cNvSpPr>
           <p:nvPr>
-            <p:ph type="sldNum" idx="5" sz="quarter"/>
+            <p:ph type="sldNum" sz="quarter" idx="5"/>
           </p:nvPr>
         </p:nvSpPr>
         <p:spPr/>
@@ -2606,7 +2860,7 @@
 </file>
 
 <file path=ppt/notesSlides/notesSlide9.xml><?xml version="1.0" encoding="utf-8"?>
-<p:notes xmlns:a="http://schemas.openxmlformats.org/drawingml/2006/main" xmlns:p="http://schemas.openxmlformats.org/presentationml/2006/main" xmlns:r="http://schemas.openxmlformats.org/officeDocument/2006/relationships">
+<p:notes xmlns:a="http://schemas.openxmlformats.org/drawingml/2006/main" xmlns:r="http://schemas.openxmlformats.org/officeDocument/2006/relationships" xmlns:p="http://schemas.openxmlformats.org/presentationml/2006/main">
   <p:cSld>
     <p:spTree>
       <p:nvGrpSpPr>
@@ -2626,7 +2880,7 @@
         <p:nvSpPr>
           <p:cNvPr id="2" name="Slide Image Placeholder 1"/>
           <p:cNvSpPr>
-            <a:spLocks noGrp="1"/>
+            <a:spLocks noGrp="1" noRot="1" noChangeAspect="1"/>
           </p:cNvSpPr>
           <p:nvPr>
             <p:ph type="sldImg" idx="2"/>
@@ -2641,7 +2895,7 @@
             <a:spLocks noGrp="1"/>
           </p:cNvSpPr>
           <p:nvPr>
-            <p:ph type="body" idx="3" sz="quarter"/>
+            <p:ph type="body" sz="quarter" idx="3"/>
           </p:nvPr>
         </p:nvSpPr>
         <p:spPr/>
@@ -2653,7 +2907,9 @@
               <a:t>Xinye He | Target 45 seconds</a:t>
             </a:r>
           </a:p>
-          <a:p/>
+          <a:p>
+            <a:endParaRPr/>
+          </a:p>
           <a:p>
             <a:r>
               <a:t>Across two hundred sixty-four attacked variants, marker successes fall from one hundred two without filtering to seven with the combination: thirty-eight point six to two point seven percent. Attacked-question accuracy rises from twenty-six point nine to forty-seven point three percent. Clean correctness remains sixteen of thirty-three. The breakdown explains that weak result: thirteen of fourteen answerable questions are correct, but only three of nineteen unsupported questions receive a correct UNKNOWN. Marker suppression and answer quality therefore remain separate outcomes.</a:t>
@@ -2668,7 +2924,7 @@
             <a:spLocks noGrp="1"/>
           </p:cNvSpPr>
           <p:nvPr>
-            <p:ph type="sldNum" idx="5" sz="quarter"/>
+            <p:ph type="sldNum" sz="quarter" idx="5"/>
           </p:nvPr>
         </p:nvSpPr>
         <p:spPr/>
@@ -2719,10 +2975,9 @@
           <a:lstStyle/>
           <a:p>
             <a:r>
-              <a:rPr lang="en-US" smtClean="0"/>
+              <a:rPr lang="en-US"/>
               <a:t>Click to edit Master title style</a:t>
             </a:r>
-            <a:endParaRPr lang="en-US"/>
           </a:p>
         </p:txBody>
       </p:sp>
@@ -2838,10 +3093,9 @@
           </a:lstStyle>
           <a:p>
             <a:r>
-              <a:rPr lang="en-US" smtClean="0"/>
+              <a:rPr lang="en-US"/>
               <a:t>Click to edit Master subtitle style</a:t>
             </a:r>
-            <a:endParaRPr lang="en-US"/>
           </a:p>
         </p:txBody>
       </p:sp>
@@ -2862,7 +3116,7 @@
           <a:p>
             <a:fld id="{5BCAD085-E8A6-8845-BD4E-CB4CCA059FC4}" type="datetimeFigureOut">
               <a:rPr lang="en-US" smtClean="0"/>
-              <a:t>1/27/13</a:t>
+              <a:t>10/22/2026</a:t>
             </a:fld>
             <a:endParaRPr lang="en-US"/>
           </a:p>
@@ -2956,10 +3210,9 @@
           <a:lstStyle/>
           <a:p>
             <a:r>
-              <a:rPr lang="en-US" smtClean="0"/>
+              <a:rPr lang="en-US"/>
               <a:t>Click to edit Master title style</a:t>
             </a:r>
-            <a:endParaRPr lang="en-US"/>
           </a:p>
         </p:txBody>
       </p:sp>
@@ -2980,38 +3233,37 @@
           <a:p>
             <a:pPr lvl="0"/>
             <a:r>
-              <a:rPr lang="en-US" smtClean="0"/>
+              <a:rPr lang="en-US"/>
               <a:t>Click to edit Master text styles</a:t>
             </a:r>
           </a:p>
           <a:p>
             <a:pPr lvl="1"/>
             <a:r>
-              <a:rPr lang="en-US" smtClean="0"/>
+              <a:rPr lang="en-US"/>
               <a:t>Second level</a:t>
             </a:r>
           </a:p>
           <a:p>
             <a:pPr lvl="2"/>
             <a:r>
-              <a:rPr lang="en-US" smtClean="0"/>
+              <a:rPr lang="en-US"/>
               <a:t>Third level</a:t>
             </a:r>
           </a:p>
           <a:p>
             <a:pPr lvl="3"/>
             <a:r>
-              <a:rPr lang="en-US" smtClean="0"/>
+              <a:rPr lang="en-US"/>
               <a:t>Fourth level</a:t>
             </a:r>
           </a:p>
           <a:p>
             <a:pPr lvl="4"/>
             <a:r>
-              <a:rPr lang="en-US" smtClean="0"/>
+              <a:rPr lang="en-US"/>
               <a:t>Fifth level</a:t>
             </a:r>
-            <a:endParaRPr lang="en-US"/>
           </a:p>
         </p:txBody>
       </p:sp>
@@ -3032,7 +3284,7 @@
           <a:p>
             <a:fld id="{5BCAD085-E8A6-8845-BD4E-CB4CCA059FC4}" type="datetimeFigureOut">
               <a:rPr lang="en-US" smtClean="0"/>
-              <a:t>1/27/13</a:t>
+              <a:t>10/22/2026</a:t>
             </a:fld>
             <a:endParaRPr lang="en-US"/>
           </a:p>
@@ -3131,10 +3383,9 @@
           <a:lstStyle/>
           <a:p>
             <a:r>
-              <a:rPr lang="en-US" smtClean="0"/>
+              <a:rPr lang="en-US"/>
               <a:t>Click to edit Master title style</a:t>
             </a:r>
-            <a:endParaRPr lang="en-US"/>
           </a:p>
         </p:txBody>
       </p:sp>
@@ -3160,38 +3411,37 @@
           <a:p>
             <a:pPr lvl="0"/>
             <a:r>
-              <a:rPr lang="en-US" smtClean="0"/>
+              <a:rPr lang="en-US"/>
               <a:t>Click to edit Master text styles</a:t>
             </a:r>
           </a:p>
           <a:p>
             <a:pPr lvl="1"/>
             <a:r>
-              <a:rPr lang="en-US" smtClean="0"/>
+              <a:rPr lang="en-US"/>
               <a:t>Second level</a:t>
             </a:r>
           </a:p>
           <a:p>
             <a:pPr lvl="2"/>
             <a:r>
-              <a:rPr lang="en-US" smtClean="0"/>
+              <a:rPr lang="en-US"/>
               <a:t>Third level</a:t>
             </a:r>
           </a:p>
           <a:p>
             <a:pPr lvl="3"/>
             <a:r>
-              <a:rPr lang="en-US" smtClean="0"/>
+              <a:rPr lang="en-US"/>
               <a:t>Fourth level</a:t>
             </a:r>
           </a:p>
           <a:p>
             <a:pPr lvl="4"/>
             <a:r>
-              <a:rPr lang="en-US" smtClean="0"/>
+              <a:rPr lang="en-US"/>
               <a:t>Fifth level</a:t>
             </a:r>
-            <a:endParaRPr lang="en-US"/>
           </a:p>
         </p:txBody>
       </p:sp>
@@ -3212,7 +3462,7 @@
           <a:p>
             <a:fld id="{5BCAD085-E8A6-8845-BD4E-CB4CCA059FC4}" type="datetimeFigureOut">
               <a:rPr lang="en-US" smtClean="0"/>
-              <a:t>1/27/13</a:t>
+              <a:t>10/22/2026</a:t>
             </a:fld>
             <a:endParaRPr lang="en-US"/>
           </a:p>
@@ -3306,10 +3556,9 @@
           <a:lstStyle/>
           <a:p>
             <a:r>
-              <a:rPr lang="en-US" smtClean="0"/>
+              <a:rPr lang="en-US"/>
               <a:t>Click to edit Master title style</a:t>
             </a:r>
-            <a:endParaRPr lang="en-US"/>
           </a:p>
         </p:txBody>
       </p:sp>
@@ -3330,38 +3579,37 @@
           <a:p>
             <a:pPr lvl="0"/>
             <a:r>
-              <a:rPr lang="en-US" smtClean="0"/>
+              <a:rPr lang="en-US"/>
               <a:t>Click to edit Master text styles</a:t>
             </a:r>
           </a:p>
           <a:p>
             <a:pPr lvl="1"/>
             <a:r>
-              <a:rPr lang="en-US" smtClean="0"/>
+              <a:rPr lang="en-US"/>
               <a:t>Second level</a:t>
             </a:r>
           </a:p>
           <a:p>
             <a:pPr lvl="2"/>
             <a:r>
-              <a:rPr lang="en-US" smtClean="0"/>
+              <a:rPr lang="en-US"/>
               <a:t>Third level</a:t>
             </a:r>
           </a:p>
           <a:p>
             <a:pPr lvl="3"/>
             <a:r>
-              <a:rPr lang="en-US" smtClean="0"/>
+              <a:rPr lang="en-US"/>
               <a:t>Fourth level</a:t>
             </a:r>
           </a:p>
           <a:p>
             <a:pPr lvl="4"/>
             <a:r>
-              <a:rPr lang="en-US" smtClean="0"/>
+              <a:rPr lang="en-US"/>
               <a:t>Fifth level</a:t>
             </a:r>
-            <a:endParaRPr lang="en-US"/>
           </a:p>
         </p:txBody>
       </p:sp>
@@ -3382,7 +3630,7 @@
           <a:p>
             <a:fld id="{5BCAD085-E8A6-8845-BD4E-CB4CCA059FC4}" type="datetimeFigureOut">
               <a:rPr lang="en-US" smtClean="0"/>
-              <a:t>1/27/13</a:t>
+              <a:t>10/22/2026</a:t>
             </a:fld>
             <a:endParaRPr lang="en-US"/>
           </a:p>
@@ -3485,10 +3733,9 @@
           </a:lstStyle>
           <a:p>
             <a:r>
-              <a:rPr lang="en-US" smtClean="0"/>
+              <a:rPr lang="en-US"/>
               <a:t>Click to edit Master title style</a:t>
             </a:r>
-            <a:endParaRPr lang="en-US"/>
           </a:p>
         </p:txBody>
       </p:sp>
@@ -3605,7 +3852,7 @@
           <a:p>
             <a:pPr lvl="0"/>
             <a:r>
-              <a:rPr lang="en-US" smtClean="0"/>
+              <a:rPr lang="en-US"/>
               <a:t>Click to edit Master text styles</a:t>
             </a:r>
           </a:p>
@@ -3628,7 +3875,7 @@
           <a:p>
             <a:fld id="{5BCAD085-E8A6-8845-BD4E-CB4CCA059FC4}" type="datetimeFigureOut">
               <a:rPr lang="en-US" smtClean="0"/>
-              <a:t>1/27/13</a:t>
+              <a:t>10/22/2026</a:t>
             </a:fld>
             <a:endParaRPr lang="en-US"/>
           </a:p>
@@ -3722,10 +3969,9 @@
           <a:lstStyle/>
           <a:p>
             <a:r>
-              <a:rPr lang="en-US" smtClean="0"/>
+              <a:rPr lang="en-US"/>
               <a:t>Click to edit Master title style</a:t>
             </a:r>
-            <a:endParaRPr lang="en-US"/>
           </a:p>
         </p:txBody>
       </p:sp>
@@ -3779,38 +4025,37 @@
           <a:p>
             <a:pPr lvl="0"/>
             <a:r>
-              <a:rPr lang="en-US" smtClean="0"/>
+              <a:rPr lang="en-US"/>
               <a:t>Click to edit Master text styles</a:t>
             </a:r>
           </a:p>
           <a:p>
             <a:pPr lvl="1"/>
             <a:r>
-              <a:rPr lang="en-US" smtClean="0"/>
+              <a:rPr lang="en-US"/>
               <a:t>Second level</a:t>
             </a:r>
           </a:p>
           <a:p>
             <a:pPr lvl="2"/>
             <a:r>
-              <a:rPr lang="en-US" smtClean="0"/>
+              <a:rPr lang="en-US"/>
               <a:t>Third level</a:t>
             </a:r>
           </a:p>
           <a:p>
             <a:pPr lvl="3"/>
             <a:r>
-              <a:rPr lang="en-US" smtClean="0"/>
+              <a:rPr lang="en-US"/>
               <a:t>Fourth level</a:t>
             </a:r>
           </a:p>
           <a:p>
             <a:pPr lvl="4"/>
             <a:r>
-              <a:rPr lang="en-US" smtClean="0"/>
+              <a:rPr lang="en-US"/>
               <a:t>Fifth level</a:t>
             </a:r>
-            <a:endParaRPr lang="en-US"/>
           </a:p>
         </p:txBody>
       </p:sp>
@@ -3864,38 +4109,37 @@
           <a:p>
             <a:pPr lvl="0"/>
             <a:r>
-              <a:rPr lang="en-US" smtClean="0"/>
+              <a:rPr lang="en-US"/>
               <a:t>Click to edit Master text styles</a:t>
             </a:r>
           </a:p>
           <a:p>
             <a:pPr lvl="1"/>
             <a:r>
-              <a:rPr lang="en-US" smtClean="0"/>
+              <a:rPr lang="en-US"/>
               <a:t>Second level</a:t>
             </a:r>
           </a:p>
           <a:p>
             <a:pPr lvl="2"/>
             <a:r>
-              <a:rPr lang="en-US" smtClean="0"/>
+              <a:rPr lang="en-US"/>
               <a:t>Third level</a:t>
             </a:r>
           </a:p>
           <a:p>
             <a:pPr lvl="3"/>
             <a:r>
-              <a:rPr lang="en-US" smtClean="0"/>
+              <a:rPr lang="en-US"/>
               <a:t>Fourth level</a:t>
             </a:r>
           </a:p>
           <a:p>
             <a:pPr lvl="4"/>
             <a:r>
-              <a:rPr lang="en-US" smtClean="0"/>
+              <a:rPr lang="en-US"/>
               <a:t>Fifth level</a:t>
             </a:r>
-            <a:endParaRPr lang="en-US"/>
           </a:p>
         </p:txBody>
       </p:sp>
@@ -3916,7 +4160,7 @@
           <a:p>
             <a:fld id="{5BCAD085-E8A6-8845-BD4E-CB4CCA059FC4}" type="datetimeFigureOut">
               <a:rPr lang="en-US" smtClean="0"/>
-              <a:t>1/27/13</a:t>
+              <a:t>10/22/2026</a:t>
             </a:fld>
             <a:endParaRPr lang="en-US"/>
           </a:p>
@@ -4014,10 +4258,9 @@
           </a:lstStyle>
           <a:p>
             <a:r>
-              <a:rPr lang="en-US" smtClean="0"/>
+              <a:rPr lang="en-US"/>
               <a:t>Click to edit Master title style</a:t>
             </a:r>
-            <a:endParaRPr lang="en-US"/>
           </a:p>
         </p:txBody>
       </p:sp>
@@ -4080,7 +4323,7 @@
           <a:p>
             <a:pPr lvl="0"/>
             <a:r>
-              <a:rPr lang="en-US" smtClean="0"/>
+              <a:rPr lang="en-US"/>
               <a:t>Click to edit Master text styles</a:t>
             </a:r>
           </a:p>
@@ -4136,38 +4379,37 @@
           <a:p>
             <a:pPr lvl="0"/>
             <a:r>
-              <a:rPr lang="en-US" smtClean="0"/>
+              <a:rPr lang="en-US"/>
               <a:t>Click to edit Master text styles</a:t>
             </a:r>
           </a:p>
           <a:p>
             <a:pPr lvl="1"/>
             <a:r>
-              <a:rPr lang="en-US" smtClean="0"/>
+              <a:rPr lang="en-US"/>
               <a:t>Second level</a:t>
             </a:r>
           </a:p>
           <a:p>
             <a:pPr lvl="2"/>
             <a:r>
-              <a:rPr lang="en-US" smtClean="0"/>
+              <a:rPr lang="en-US"/>
               <a:t>Third level</a:t>
             </a:r>
           </a:p>
           <a:p>
             <a:pPr lvl="3"/>
             <a:r>
-              <a:rPr lang="en-US" smtClean="0"/>
+              <a:rPr lang="en-US"/>
               <a:t>Fourth level</a:t>
             </a:r>
           </a:p>
           <a:p>
             <a:pPr lvl="4"/>
             <a:r>
-              <a:rPr lang="en-US" smtClean="0"/>
+              <a:rPr lang="en-US"/>
               <a:t>Fifth level</a:t>
             </a:r>
-            <a:endParaRPr lang="en-US"/>
           </a:p>
         </p:txBody>
       </p:sp>
@@ -4230,7 +4472,7 @@
           <a:p>
             <a:pPr lvl="0"/>
             <a:r>
-              <a:rPr lang="en-US" smtClean="0"/>
+              <a:rPr lang="en-US"/>
               <a:t>Click to edit Master text styles</a:t>
             </a:r>
           </a:p>
@@ -4286,38 +4528,37 @@
           <a:p>
             <a:pPr lvl="0"/>
             <a:r>
-              <a:rPr lang="en-US" smtClean="0"/>
+              <a:rPr lang="en-US"/>
               <a:t>Click to edit Master text styles</a:t>
             </a:r>
           </a:p>
           <a:p>
             <a:pPr lvl="1"/>
             <a:r>
-              <a:rPr lang="en-US" smtClean="0"/>
+              <a:rPr lang="en-US"/>
               <a:t>Second level</a:t>
             </a:r>
           </a:p>
           <a:p>
             <a:pPr lvl="2"/>
             <a:r>
-              <a:rPr lang="en-US" smtClean="0"/>
+              <a:rPr lang="en-US"/>
               <a:t>Third level</a:t>
             </a:r>
           </a:p>
           <a:p>
             <a:pPr lvl="3"/>
             <a:r>
-              <a:rPr lang="en-US" smtClean="0"/>
+              <a:rPr lang="en-US"/>
               <a:t>Fourth level</a:t>
             </a:r>
           </a:p>
           <a:p>
             <a:pPr lvl="4"/>
             <a:r>
-              <a:rPr lang="en-US" smtClean="0"/>
+              <a:rPr lang="en-US"/>
               <a:t>Fifth level</a:t>
             </a:r>
-            <a:endParaRPr lang="en-US"/>
           </a:p>
         </p:txBody>
       </p:sp>
@@ -4338,7 +4579,7 @@
           <a:p>
             <a:fld id="{5BCAD085-E8A6-8845-BD4E-CB4CCA059FC4}" type="datetimeFigureOut">
               <a:rPr lang="en-US" smtClean="0"/>
-              <a:t>1/27/13</a:t>
+              <a:t>10/22/2026</a:t>
             </a:fld>
             <a:endParaRPr lang="en-US"/>
           </a:p>
@@ -4432,10 +4673,9 @@
           <a:lstStyle/>
           <a:p>
             <a:r>
-              <a:rPr lang="en-US" smtClean="0"/>
+              <a:rPr lang="en-US"/>
               <a:t>Click to edit Master title style</a:t>
             </a:r>
-            <a:endParaRPr lang="en-US"/>
           </a:p>
         </p:txBody>
       </p:sp>
@@ -4456,7 +4696,7 @@
           <a:p>
             <a:fld id="{5BCAD085-E8A6-8845-BD4E-CB4CCA059FC4}" type="datetimeFigureOut">
               <a:rPr lang="en-US" smtClean="0"/>
-              <a:t>1/27/13</a:t>
+              <a:t>10/22/2026</a:t>
             </a:fld>
             <a:endParaRPr lang="en-US"/>
           </a:p>
@@ -4551,7 +4791,7 @@
           <a:p>
             <a:fld id="{5BCAD085-E8A6-8845-BD4E-CB4CCA059FC4}" type="datetimeFigureOut">
               <a:rPr lang="en-US" smtClean="0"/>
-              <a:t>1/27/13</a:t>
+              <a:t>10/22/2026</a:t>
             </a:fld>
             <a:endParaRPr lang="en-US"/>
           </a:p>
@@ -4654,10 +4894,9 @@
           </a:lstStyle>
           <a:p>
             <a:r>
-              <a:rPr lang="en-US" smtClean="0"/>
+              <a:rPr lang="en-US"/>
               <a:t>Click to edit Master title style</a:t>
             </a:r>
-            <a:endParaRPr lang="en-US"/>
           </a:p>
         </p:txBody>
       </p:sp>
@@ -4711,38 +4950,37 @@
           <a:p>
             <a:pPr lvl="0"/>
             <a:r>
-              <a:rPr lang="en-US" smtClean="0"/>
+              <a:rPr lang="en-US"/>
               <a:t>Click to edit Master text styles</a:t>
             </a:r>
           </a:p>
           <a:p>
             <a:pPr lvl="1"/>
             <a:r>
-              <a:rPr lang="en-US" smtClean="0"/>
+              <a:rPr lang="en-US"/>
               <a:t>Second level</a:t>
             </a:r>
           </a:p>
           <a:p>
             <a:pPr lvl="2"/>
             <a:r>
-              <a:rPr lang="en-US" smtClean="0"/>
+              <a:rPr lang="en-US"/>
               <a:t>Third level</a:t>
             </a:r>
           </a:p>
           <a:p>
             <a:pPr lvl="3"/>
             <a:r>
-              <a:rPr lang="en-US" smtClean="0"/>
+              <a:rPr lang="en-US"/>
               <a:t>Fourth level</a:t>
             </a:r>
           </a:p>
           <a:p>
             <a:pPr lvl="4"/>
             <a:r>
-              <a:rPr lang="en-US" smtClean="0"/>
+              <a:rPr lang="en-US"/>
               <a:t>Fifth level</a:t>
             </a:r>
-            <a:endParaRPr lang="en-US"/>
           </a:p>
         </p:txBody>
       </p:sp>
@@ -4805,7 +5043,7 @@
           <a:p>
             <a:pPr lvl="0"/>
             <a:r>
-              <a:rPr lang="en-US" smtClean="0"/>
+              <a:rPr lang="en-US"/>
               <a:t>Click to edit Master text styles</a:t>
             </a:r>
           </a:p>
@@ -4828,7 +5066,7 @@
           <a:p>
             <a:fld id="{5BCAD085-E8A6-8845-BD4E-CB4CCA059FC4}" type="datetimeFigureOut">
               <a:rPr lang="en-US" smtClean="0"/>
-              <a:t>1/27/13</a:t>
+              <a:t>10/22/2026</a:t>
             </a:fld>
             <a:endParaRPr lang="en-US"/>
           </a:p>
@@ -4931,10 +5169,9 @@
           </a:lstStyle>
           <a:p>
             <a:r>
-              <a:rPr lang="en-US" smtClean="0"/>
+              <a:rPr lang="en-US"/>
               <a:t>Click to edit Master title style</a:t>
             </a:r>
-            <a:endParaRPr lang="en-US"/>
           </a:p>
         </p:txBody>
       </p:sp>
@@ -5058,7 +5295,7 @@
           <a:p>
             <a:pPr lvl="0"/>
             <a:r>
-              <a:rPr lang="en-US" smtClean="0"/>
+              <a:rPr lang="en-US"/>
               <a:t>Click to edit Master text styles</a:t>
             </a:r>
           </a:p>
@@ -5081,7 +5318,7 @@
           <a:p>
             <a:fld id="{5BCAD085-E8A6-8845-BD4E-CB4CCA059FC4}" type="datetimeFigureOut">
               <a:rPr lang="en-US" smtClean="0"/>
-              <a:t>1/27/13</a:t>
+              <a:t>10/22/2026</a:t>
             </a:fld>
             <a:endParaRPr lang="en-US"/>
           </a:p>
@@ -5190,10 +5427,9 @@
           <a:lstStyle/>
           <a:p>
             <a:r>
-              <a:rPr lang="en-US" smtClean="0"/>
+              <a:rPr lang="en-US"/>
               <a:t>Click to edit Master title style</a:t>
             </a:r>
-            <a:endParaRPr lang="en-US"/>
           </a:p>
         </p:txBody>
       </p:sp>
@@ -5224,38 +5460,37 @@
           <a:p>
             <a:pPr lvl="0"/>
             <a:r>
-              <a:rPr lang="en-US" smtClean="0"/>
+              <a:rPr lang="en-US"/>
               <a:t>Click to edit Master text styles</a:t>
             </a:r>
           </a:p>
           <a:p>
             <a:pPr lvl="1"/>
             <a:r>
-              <a:rPr lang="en-US" smtClean="0"/>
+              <a:rPr lang="en-US"/>
               <a:t>Second level</a:t>
             </a:r>
           </a:p>
           <a:p>
             <a:pPr lvl="2"/>
             <a:r>
-              <a:rPr lang="en-US" smtClean="0"/>
+              <a:rPr lang="en-US"/>
               <a:t>Third level</a:t>
             </a:r>
           </a:p>
           <a:p>
             <a:pPr lvl="3"/>
             <a:r>
-              <a:rPr lang="en-US" smtClean="0"/>
+              <a:rPr lang="en-US"/>
               <a:t>Fourth level</a:t>
             </a:r>
           </a:p>
           <a:p>
             <a:pPr lvl="4"/>
             <a:r>
-              <a:rPr lang="en-US" smtClean="0"/>
+              <a:rPr lang="en-US"/>
               <a:t>Fifth level</a:t>
             </a:r>
-            <a:endParaRPr lang="en-US"/>
           </a:p>
         </p:txBody>
       </p:sp>
@@ -5294,7 +5529,7 @@
           <a:p>
             <a:fld id="{5BCAD085-E8A6-8845-BD4E-CB4CCA059FC4}" type="datetimeFigureOut">
               <a:rPr lang="en-US" smtClean="0"/>
-              <a:t>1/27/13</a:t>
+              <a:t>10/22/2026</a:t>
             </a:fld>
             <a:endParaRPr lang="en-US"/>
           </a:p>
@@ -5653,7 +5888,7 @@
 </file>
 
 <file path=ppt/slides/slide1.xml><?xml version="1.0" encoding="utf-8"?>
-<p:sld xmlns:a="http://schemas.openxmlformats.org/drawingml/2006/main" xmlns:p="http://schemas.openxmlformats.org/presentationml/2006/main" xmlns:r="http://schemas.openxmlformats.org/officeDocument/2006/relationships">
+<p:sld xmlns:a="http://schemas.openxmlformats.org/drawingml/2006/main" xmlns:r="http://schemas.openxmlformats.org/officeDocument/2006/relationships" xmlns:p="http://schemas.openxmlformats.org/presentationml/2006/main">
   <p:cSld>
     <p:bg>
       <p:bgPr>
@@ -5669,7 +5904,14 @@
         <p:cNvGrpSpPr/>
         <p:nvPr/>
       </p:nvGrpSpPr>
-      <p:grpSpPr/>
+      <p:grpSpPr>
+        <a:xfrm>
+          <a:off x="0" y="0"/>
+          <a:ext cx="0" cy="0"/>
+          <a:chOff x="0" y="0"/>
+          <a:chExt cx="0" cy="0"/>
+        </a:xfrm>
+      </p:grpSpPr>
       <p:sp>
         <p:nvSpPr>
           <p:cNvPr id="2" name="TextBox 1"/>
@@ -5687,7 +5929,7 @@
           <a:noFill/>
         </p:spPr>
         <p:txBody>
-          <a:bodyPr wrap="square" lIns="9144" rIns="9144" tIns="0" bIns="0">
+          <a:bodyPr wrap="square" lIns="9144" tIns="0" rIns="9144" bIns="0">
             <a:spAutoFit/>
           </a:bodyPr>
           <a:lstStyle/>
@@ -5726,7 +5968,7 @@
           <a:noFill/>
         </p:spPr>
         <p:txBody>
-          <a:bodyPr wrap="square" lIns="9144" rIns="9144" tIns="0" bIns="0">
+          <a:bodyPr wrap="square" lIns="9144" tIns="0" rIns="9144" bIns="0">
             <a:spAutoFit/>
           </a:bodyPr>
           <a:lstStyle/>
@@ -5765,7 +6007,7 @@
           <a:noFill/>
         </p:spPr>
         <p:txBody>
-          <a:bodyPr wrap="square" lIns="9144" rIns="9144" tIns="0" bIns="0">
+          <a:bodyPr wrap="square" lIns="9144" tIns="0" rIns="9144" bIns="0">
             <a:spAutoFit/>
           </a:bodyPr>
           <a:lstStyle/>
@@ -5774,7 +6016,7 @@
               <a:spcAft>
                 <a:spcPts val="600"/>
               </a:spcAft>
-              <a:defRPr sz="4800" b="0">
+              <a:defRPr sz="3600" b="0">
                 <a:solidFill>
                   <a:srgbClr val="FFFFFF"/>
                 </a:solidFill>
@@ -5782,7 +6024,8 @@
               </a:defRPr>
             </a:pPr>
             <a:r>
-              <a:t>A passage gate</a:t>
+              <a:rPr dirty="0"/>
+              <a:t>Attack coverage, answer quality and cost</a:t>
             </a:r>
           </a:p>
         </p:txBody>
@@ -5804,7 +6047,7 @@
           <a:noFill/>
         </p:spPr>
         <p:txBody>
-          <a:bodyPr wrap="square" lIns="9144" rIns="9144" tIns="0" bIns="0">
+          <a:bodyPr wrap="square" lIns="9144" tIns="0" rIns="9144" bIns="0">
             <a:spAutoFit/>
           </a:bodyPr>
           <a:lstStyle/>
@@ -5835,7 +6078,7 @@
 </file>
 
 <file path=ppt/slides/slide10.xml><?xml version="1.0" encoding="utf-8"?>
-<p:sld xmlns:a="http://schemas.openxmlformats.org/drawingml/2006/main" xmlns:p="http://schemas.openxmlformats.org/presentationml/2006/main" xmlns:r="http://schemas.openxmlformats.org/officeDocument/2006/relationships">
+<p:sld xmlns:a="http://schemas.openxmlformats.org/drawingml/2006/main" xmlns:r="http://schemas.openxmlformats.org/officeDocument/2006/relationships" xmlns:p="http://schemas.openxmlformats.org/presentationml/2006/main">
   <p:cSld>
     <p:bg>
       <p:bgPr>
@@ -5851,7 +6094,14 @@
         <p:cNvGrpSpPr/>
         <p:nvPr/>
       </p:nvGrpSpPr>
-      <p:grpSpPr/>
+      <p:grpSpPr>
+        <a:xfrm>
+          <a:off x="0" y="0"/>
+          <a:ext cx="0" cy="0"/>
+          <a:chOff x="0" y="0"/>
+          <a:chExt cx="0" cy="0"/>
+        </a:xfrm>
+      </p:grpSpPr>
       <p:sp>
         <p:nvSpPr>
           <p:cNvPr id="2" name="TextBox 1"/>
@@ -5869,7 +6119,7 @@
           <a:noFill/>
         </p:spPr>
         <p:txBody>
-          <a:bodyPr wrap="square" lIns="9144" rIns="9144" tIns="0" bIns="0">
+          <a:bodyPr wrap="square" lIns="9144" tIns="0" rIns="9144" bIns="0">
             <a:spAutoFit/>
           </a:bodyPr>
           <a:lstStyle/>
@@ -5908,7 +6158,7 @@
           <a:noFill/>
         </p:spPr>
         <p:txBody>
-          <a:bodyPr wrap="square" lIns="9144" rIns="9144" tIns="0" bIns="0">
+          <a:bodyPr wrap="square" lIns="9144" tIns="0" rIns="9144" bIns="0">
             <a:spAutoFit/>
           </a:bodyPr>
           <a:lstStyle/>
@@ -5947,7 +6197,7 @@
           <a:noFill/>
         </p:spPr>
         <p:txBody>
-          <a:bodyPr wrap="square" lIns="9144" rIns="9144" tIns="0" bIns="0">
+          <a:bodyPr wrap="square" lIns="9144" tIns="0" rIns="9144" bIns="0">
             <a:spAutoFit/>
           </a:bodyPr>
           <a:lstStyle/>
@@ -5986,7 +6236,7 @@
           <a:noFill/>
         </p:spPr>
         <p:txBody>
-          <a:bodyPr wrap="square" lIns="9144" rIns="9144" tIns="0" bIns="0">
+          <a:bodyPr wrap="square" lIns="9144" tIns="0" rIns="9144" bIns="0">
             <a:spAutoFit/>
           </a:bodyPr>
           <a:lstStyle/>
@@ -6025,7 +6275,7 @@
           <a:noFill/>
         </p:spPr>
         <p:txBody>
-          <a:bodyPr wrap="square" lIns="9144" rIns="9144" tIns="0" bIns="0">
+          <a:bodyPr wrap="square" lIns="9144" tIns="0" rIns="9144" bIns="0">
             <a:spAutoFit/>
           </a:bodyPr>
           <a:lstStyle/>
@@ -6064,7 +6314,7 @@
           <a:noFill/>
         </p:spPr>
         <p:txBody>
-          <a:bodyPr wrap="square" lIns="9144" rIns="9144" tIns="0" bIns="0">
+          <a:bodyPr wrap="square" lIns="9144" tIns="0" rIns="9144" bIns="0">
             <a:spAutoFit/>
           </a:bodyPr>
           <a:lstStyle/>
@@ -6126,6 +6376,7 @@
           <a:lstStyle/>
           <a:p>
             <a:pPr algn="ctr"/>
+            <a:endParaRPr/>
           </a:p>
         </p:txBody>
       </p:sp>
@@ -6146,7 +6397,7 @@
           <a:noFill/>
         </p:spPr>
         <p:txBody>
-          <a:bodyPr wrap="square" lIns="9144" rIns="9144" tIns="0" bIns="0">
+          <a:bodyPr wrap="square" lIns="9144" tIns="0" rIns="9144" bIns="0">
             <a:spAutoFit/>
           </a:bodyPr>
           <a:lstStyle/>
@@ -6208,6 +6459,7 @@
           <a:lstStyle/>
           <a:p>
             <a:pPr algn="ctr"/>
+            <a:endParaRPr/>
           </a:p>
         </p:txBody>
       </p:sp>
@@ -6228,7 +6480,7 @@
           <a:noFill/>
         </p:spPr>
         <p:txBody>
-          <a:bodyPr wrap="square" lIns="9144" rIns="9144" tIns="0" bIns="0">
+          <a:bodyPr wrap="square" lIns="9144" tIns="0" rIns="9144" bIns="0">
             <a:spAutoFit/>
           </a:bodyPr>
           <a:lstStyle/>
@@ -6267,7 +6519,7 @@
           <a:noFill/>
         </p:spPr>
         <p:txBody>
-          <a:bodyPr wrap="square" lIns="9144" rIns="9144" tIns="0" bIns="0">
+          <a:bodyPr wrap="square" lIns="9144" tIns="0" rIns="9144" bIns="0">
             <a:spAutoFit/>
           </a:bodyPr>
           <a:lstStyle/>
@@ -6329,6 +6581,7 @@
           <a:lstStyle/>
           <a:p>
             <a:pPr algn="ctr"/>
+            <a:endParaRPr/>
           </a:p>
         </p:txBody>
       </p:sp>
@@ -6349,7 +6602,7 @@
           <a:noFill/>
         </p:spPr>
         <p:txBody>
-          <a:bodyPr wrap="square" lIns="9144" rIns="9144" tIns="0" bIns="0">
+          <a:bodyPr wrap="square" lIns="9144" tIns="0" rIns="9144" bIns="0">
             <a:spAutoFit/>
           </a:bodyPr>
           <a:lstStyle/>
@@ -6411,6 +6664,7 @@
           <a:lstStyle/>
           <a:p>
             <a:pPr algn="ctr"/>
+            <a:endParaRPr/>
           </a:p>
         </p:txBody>
       </p:sp>
@@ -6431,7 +6685,7 @@
           <a:noFill/>
         </p:spPr>
         <p:txBody>
-          <a:bodyPr wrap="square" lIns="9144" rIns="9144" tIns="0" bIns="0">
+          <a:bodyPr wrap="square" lIns="9144" tIns="0" rIns="9144" bIns="0">
             <a:spAutoFit/>
           </a:bodyPr>
           <a:lstStyle/>
@@ -6470,7 +6724,7 @@
           <a:noFill/>
         </p:spPr>
         <p:txBody>
-          <a:bodyPr wrap="square" lIns="9144" rIns="9144" tIns="0" bIns="0">
+          <a:bodyPr wrap="square" lIns="9144" tIns="0" rIns="9144" bIns="0">
             <a:spAutoFit/>
           </a:bodyPr>
           <a:lstStyle/>
@@ -6532,6 +6786,7 @@
           <a:lstStyle/>
           <a:p>
             <a:pPr algn="ctr"/>
+            <a:endParaRPr/>
           </a:p>
         </p:txBody>
       </p:sp>
@@ -6552,7 +6807,7 @@
           <a:noFill/>
         </p:spPr>
         <p:txBody>
-          <a:bodyPr wrap="square" lIns="9144" rIns="9144" tIns="0" bIns="0">
+          <a:bodyPr wrap="square" lIns="9144" tIns="0" rIns="9144" bIns="0">
             <a:spAutoFit/>
           </a:bodyPr>
           <a:lstStyle/>
@@ -6614,6 +6869,7 @@
           <a:lstStyle/>
           <a:p>
             <a:pPr algn="ctr"/>
+            <a:endParaRPr/>
           </a:p>
         </p:txBody>
       </p:sp>
@@ -6634,7 +6890,7 @@
           <a:noFill/>
         </p:spPr>
         <p:txBody>
-          <a:bodyPr wrap="square" lIns="9144" rIns="9144" tIns="0" bIns="0">
+          <a:bodyPr wrap="square" lIns="9144" tIns="0" rIns="9144" bIns="0">
             <a:spAutoFit/>
           </a:bodyPr>
           <a:lstStyle/>
@@ -6673,7 +6929,7 @@
           <a:noFill/>
         </p:spPr>
         <p:txBody>
-          <a:bodyPr wrap="square" lIns="9144" rIns="9144" tIns="0" bIns="0">
+          <a:bodyPr wrap="square" lIns="9144" tIns="0" rIns="9144" bIns="0">
             <a:spAutoFit/>
           </a:bodyPr>
           <a:lstStyle/>
@@ -6735,6 +6991,7 @@
           <a:lstStyle/>
           <a:p>
             <a:pPr algn="ctr"/>
+            <a:endParaRPr/>
           </a:p>
         </p:txBody>
       </p:sp>
@@ -6755,7 +7012,7 @@
           <a:noFill/>
         </p:spPr>
         <p:txBody>
-          <a:bodyPr wrap="square" lIns="9144" rIns="9144" tIns="0" bIns="0">
+          <a:bodyPr wrap="square" lIns="9144" tIns="0" rIns="9144" bIns="0">
             <a:spAutoFit/>
           </a:bodyPr>
           <a:lstStyle/>
@@ -6817,6 +7074,7 @@
           <a:lstStyle/>
           <a:p>
             <a:pPr algn="ctr"/>
+            <a:endParaRPr/>
           </a:p>
         </p:txBody>
       </p:sp>
@@ -6837,7 +7095,7 @@
           <a:noFill/>
         </p:spPr>
         <p:txBody>
-          <a:bodyPr wrap="square" lIns="9144" rIns="9144" tIns="0" bIns="0">
+          <a:bodyPr wrap="square" lIns="9144" tIns="0" rIns="9144" bIns="0">
             <a:spAutoFit/>
           </a:bodyPr>
           <a:lstStyle/>
@@ -6855,6 +7113,45 @@
             </a:pPr>
             <a:r>
               <a:t>0 → 0</a:t>
+            </a:r>
+          </a:p>
+        </p:txBody>
+      </p:sp>
+      <p:sp>
+        <p:nvSpPr>
+          <p:cNvPr id="27" name="TextBox 26"/>
+          <p:cNvSpPr txBox="1"/>
+          <p:nvPr/>
+        </p:nvSpPr>
+        <p:spPr>
+          <a:xfrm>
+            <a:off x="594360" y="5687568"/>
+            <a:ext cx="10972800" cy="594360"/>
+          </a:xfrm>
+          <a:prstGeom prst="rect">
+            <a:avLst/>
+          </a:prstGeom>
+          <a:noFill/>
+        </p:spPr>
+        <p:txBody>
+          <a:bodyPr wrap="square" lIns="0" tIns="0" rIns="0" bIns="0">
+            <a:spAutoFit/>
+          </a:bodyPr>
+          <a:lstStyle/>
+          <a:p>
+            <a:pPr>
+              <a:spcAft>
+                <a:spcPts val="600"/>
+              </a:spcAft>
+              <a:defRPr sz="2400" b="0">
+                <a:solidFill>
+                  <a:srgbClr val="647488"/>
+                </a:solidFill>
+                <a:latin typeface="Aptos"/>
+              </a:defRPr>
+            </a:pPr>
+            <a:r>
+              <a:t>Nine additional prevented successes occur in the verification-suffix condition.</a:t>
             </a:r>
           </a:p>
         </p:txBody>
@@ -6868,7 +7165,7 @@
 </file>
 
 <file path=ppt/slides/slide11.xml><?xml version="1.0" encoding="utf-8"?>
-<p:sld xmlns:a="http://schemas.openxmlformats.org/drawingml/2006/main" xmlns:p="http://schemas.openxmlformats.org/presentationml/2006/main" xmlns:r="http://schemas.openxmlformats.org/officeDocument/2006/relationships">
+<p:sld xmlns:a="http://schemas.openxmlformats.org/drawingml/2006/main" xmlns:r="http://schemas.openxmlformats.org/officeDocument/2006/relationships" xmlns:p="http://schemas.openxmlformats.org/presentationml/2006/main">
   <p:cSld>
     <p:bg>
       <p:bgPr>
@@ -6884,7 +7181,14 @@
         <p:cNvGrpSpPr/>
         <p:nvPr/>
       </p:nvGrpSpPr>
-      <p:grpSpPr/>
+      <p:grpSpPr>
+        <a:xfrm>
+          <a:off x="0" y="0"/>
+          <a:ext cx="0" cy="0"/>
+          <a:chOff x="0" y="0"/>
+          <a:chExt cx="0" cy="0"/>
+        </a:xfrm>
+      </p:grpSpPr>
       <p:sp>
         <p:nvSpPr>
           <p:cNvPr id="2" name="TextBox 1"/>
@@ -6902,7 +7206,7 @@
           <a:noFill/>
         </p:spPr>
         <p:txBody>
-          <a:bodyPr wrap="square" lIns="9144" rIns="9144" tIns="0" bIns="0">
+          <a:bodyPr wrap="square" lIns="9144" tIns="0" rIns="9144" bIns="0">
             <a:spAutoFit/>
           </a:bodyPr>
           <a:lstStyle/>
@@ -6941,7 +7245,7 @@
           <a:noFill/>
         </p:spPr>
         <p:txBody>
-          <a:bodyPr wrap="square" lIns="9144" rIns="9144" tIns="0" bIns="0">
+          <a:bodyPr wrap="square" lIns="9144" tIns="0" rIns="9144" bIns="0">
             <a:spAutoFit/>
           </a:bodyPr>
           <a:lstStyle/>
@@ -6973,11 +7277,11 @@
         </p:nvGraphicFramePr>
         <p:xfrm>
           <a:off x="594360" y="1554480"/>
-          <a:ext cx="8778240" cy="4389120"/>
+          <a:ext cx="8778240" cy="4114800"/>
         </p:xfrm>
         <a:graphic>
           <a:graphicData uri="http://schemas.openxmlformats.org/drawingml/2006/chart">
-            <c:chart xmlns:c="http://schemas.openxmlformats.org/drawingml/2006/chart" r:id="rId2"/>
+            <c:chart xmlns:c="http://schemas.openxmlformats.org/drawingml/2006/chart" xmlns:r="http://schemas.openxmlformats.org/officeDocument/2006/relationships" r:id="rId3"/>
           </a:graphicData>
         </a:graphic>
       </p:graphicFrame>
@@ -6998,7 +7302,7 @@
           <a:noFill/>
         </p:spPr>
         <p:txBody>
-          <a:bodyPr wrap="square" lIns="9144" rIns="9144" tIns="0" bIns="0">
+          <a:bodyPr wrap="square" lIns="9144" tIns="0" rIns="9144" bIns="0">
             <a:spAutoFit/>
           </a:bodyPr>
           <a:lstStyle/>
@@ -7037,7 +7341,7 @@
           <a:noFill/>
         </p:spPr>
         <p:txBody>
-          <a:bodyPr wrap="square" lIns="9144" rIns="9144" tIns="0" bIns="0">
+          <a:bodyPr wrap="square" lIns="9144" tIns="0" rIns="9144" bIns="0">
             <a:spAutoFit/>
           </a:bodyPr>
           <a:lstStyle/>
@@ -7055,6 +7359,45 @@
             </a:pPr>
             <a:r>
               <a:t>Combined</a:t>
+            </a:r>
+          </a:p>
+        </p:txBody>
+      </p:sp>
+      <p:sp>
+        <p:nvSpPr>
+          <p:cNvPr id="7" name="TextBox 6"/>
+          <p:cNvSpPr txBox="1"/>
+          <p:nvPr/>
+        </p:nvSpPr>
+        <p:spPr>
+          <a:xfrm>
+            <a:off x="594360" y="5897880"/>
+            <a:ext cx="10972800" cy="457200"/>
+          </a:xfrm>
+          <a:prstGeom prst="rect">
+            <a:avLst/>
+          </a:prstGeom>
+          <a:noFill/>
+        </p:spPr>
+        <p:txBody>
+          <a:bodyPr wrap="square" lIns="0" tIns="0" rIns="0" bIns="0">
+            <a:spAutoFit/>
+          </a:bodyPr>
+          <a:lstStyle/>
+          <a:p>
+            <a:pPr>
+              <a:spcAft>
+                <a:spcPts val="600"/>
+              </a:spcAft>
+              <a:defRPr sz="2400" b="0">
+                <a:solidFill>
+                  <a:srgbClr val="FFFFFF"/>
+                </a:solidFill>
+                <a:latin typeface="Aptos"/>
+              </a:defRPr>
+            </a:pPr>
+            <a:r>
+              <a:t>Legitimate instructions expose false-positive failures.</a:t>
             </a:r>
           </a:p>
         </p:txBody>
@@ -7068,7 +7411,7 @@
 </file>
 
 <file path=ppt/slides/slide12.xml><?xml version="1.0" encoding="utf-8"?>
-<p:sld xmlns:a="http://schemas.openxmlformats.org/drawingml/2006/main" xmlns:p="http://schemas.openxmlformats.org/presentationml/2006/main" xmlns:r="http://schemas.openxmlformats.org/officeDocument/2006/relationships">
+<p:sld xmlns:a="http://schemas.openxmlformats.org/drawingml/2006/main" xmlns:r="http://schemas.openxmlformats.org/officeDocument/2006/relationships" xmlns:p="http://schemas.openxmlformats.org/presentationml/2006/main">
   <p:cSld>
     <p:bg>
       <p:bgPr>
@@ -7084,7 +7427,14 @@
         <p:cNvGrpSpPr/>
         <p:nvPr/>
       </p:nvGrpSpPr>
-      <p:grpSpPr/>
+      <p:grpSpPr>
+        <a:xfrm>
+          <a:off x="0" y="0"/>
+          <a:ext cx="0" cy="0"/>
+          <a:chOff x="0" y="0"/>
+          <a:chExt cx="0" cy="0"/>
+        </a:xfrm>
+      </p:grpSpPr>
       <p:sp>
         <p:nvSpPr>
           <p:cNvPr id="2" name="TextBox 1"/>
@@ -7102,7 +7452,7 @@
           <a:noFill/>
         </p:spPr>
         <p:txBody>
-          <a:bodyPr wrap="square" lIns="9144" rIns="9144" tIns="0" bIns="0">
+          <a:bodyPr wrap="square" lIns="9144" tIns="0" rIns="9144" bIns="0">
             <a:spAutoFit/>
           </a:bodyPr>
           <a:lstStyle/>
@@ -7141,7 +7491,7 @@
           <a:noFill/>
         </p:spPr>
         <p:txBody>
-          <a:bodyPr wrap="square" lIns="9144" rIns="9144" tIns="0" bIns="0">
+          <a:bodyPr wrap="square" lIns="9144" tIns="0" rIns="9144" bIns="0">
             <a:spAutoFit/>
           </a:bodyPr>
           <a:lstStyle/>
@@ -7203,6 +7553,7 @@
           <a:lstStyle/>
           <a:p>
             <a:pPr algn="ctr"/>
+            <a:endParaRPr/>
           </a:p>
         </p:txBody>
       </p:sp>
@@ -7223,7 +7574,7 @@
           <a:noFill/>
         </p:spPr>
         <p:txBody>
-          <a:bodyPr wrap="square" lIns="9144" rIns="9144" tIns="0" bIns="0">
+          <a:bodyPr wrap="square" lIns="9144" tIns="0" rIns="9144" bIns="0">
             <a:spAutoFit/>
           </a:bodyPr>
           <a:lstStyle/>
@@ -7262,7 +7613,7 @@
           <a:noFill/>
         </p:spPr>
         <p:txBody>
-          <a:bodyPr wrap="square" lIns="9144" rIns="9144" tIns="0" bIns="0">
+          <a:bodyPr wrap="square" lIns="9144" tIns="0" rIns="9144" bIns="0">
             <a:spAutoFit/>
           </a:bodyPr>
           <a:lstStyle/>
@@ -7324,6 +7675,7 @@
           <a:lstStyle/>
           <a:p>
             <a:pPr algn="ctr"/>
+            <a:endParaRPr/>
           </a:p>
         </p:txBody>
       </p:sp>
@@ -7344,7 +7696,7 @@
           <a:noFill/>
         </p:spPr>
         <p:txBody>
-          <a:bodyPr wrap="square" lIns="9144" rIns="9144" tIns="0" bIns="0">
+          <a:bodyPr wrap="square" lIns="9144" tIns="0" rIns="9144" bIns="0">
             <a:spAutoFit/>
           </a:bodyPr>
           <a:lstStyle/>
@@ -7383,7 +7735,7 @@
           <a:noFill/>
         </p:spPr>
         <p:txBody>
-          <a:bodyPr wrap="square" lIns="9144" rIns="9144" tIns="0" bIns="0">
+          <a:bodyPr wrap="square" lIns="9144" tIns="0" rIns="9144" bIns="0">
             <a:spAutoFit/>
           </a:bodyPr>
           <a:lstStyle/>
@@ -7422,7 +7774,7 @@
           <a:noFill/>
         </p:spPr>
         <p:txBody>
-          <a:bodyPr wrap="square" lIns="9144" rIns="9144" tIns="0" bIns="0">
+          <a:bodyPr wrap="square" lIns="9144" tIns="0" rIns="9144" bIns="0">
             <a:spAutoFit/>
           </a:bodyPr>
           <a:lstStyle/>
@@ -7440,6 +7792,100 @@
             </a:pPr>
             <a:r>
               <a:t>Recall: 19.8% → 11.7%</a:t>
+            </a:r>
+          </a:p>
+        </p:txBody>
+      </p:sp>
+      <p:sp>
+        <p:nvSpPr>
+          <p:cNvPr id="11" name="TextBox 10"/>
+          <p:cNvSpPr txBox="1"/>
+          <p:nvPr/>
+        </p:nvSpPr>
+        <p:spPr>
+          <a:xfrm>
+            <a:off x="868680" y="4343400"/>
+            <a:ext cx="4754880" cy="914400"/>
+          </a:xfrm>
+          <a:prstGeom prst="rect">
+            <a:avLst/>
+          </a:prstGeom>
+          <a:noFill/>
+        </p:spPr>
+        <p:txBody>
+          <a:bodyPr wrap="square" lIns="0" tIns="0" rIns="0" bIns="0">
+            <a:spAutoFit/>
+          </a:bodyPr>
+          <a:lstStyle/>
+          <a:p>
+            <a:pPr>
+              <a:spcAft>
+                <a:spcPts val="600"/>
+              </a:spcAft>
+              <a:defRPr sz="2500" b="0">
+                <a:solidFill>
+                  <a:srgbClr val="647488"/>
+                </a:solidFill>
+                <a:latin typeface="Aptos"/>
+              </a:defRPr>
+            </a:pPr>
+            <a:r>
+              <a:t>126-token windows</a:t>
+            </a:r>
+          </a:p>
+          <a:p>
+            <a:pPr>
+              <a:spcAft>
+                <a:spcPts val="600"/>
+              </a:spcAft>
+              <a:defRPr sz="2500" b="0">
+                <a:solidFill>
+                  <a:srgbClr val="647488"/>
+                </a:solidFill>
+                <a:latin typeface="Aptos"/>
+              </a:defRPr>
+            </a:pPr>
+            <a:r>
+              <a:t>to direct 512-token input</a:t>
+            </a:r>
+          </a:p>
+        </p:txBody>
+      </p:sp>
+      <p:sp>
+        <p:nvSpPr>
+          <p:cNvPr id="12" name="TextBox 11"/>
+          <p:cNvSpPr txBox="1"/>
+          <p:nvPr/>
+        </p:nvSpPr>
+        <p:spPr>
+          <a:xfrm>
+            <a:off x="594360" y="5806440"/>
+            <a:ext cx="10972800" cy="457200"/>
+          </a:xfrm>
+          <a:prstGeom prst="rect">
+            <a:avLst/>
+          </a:prstGeom>
+          <a:noFill/>
+        </p:spPr>
+        <p:txBody>
+          <a:bodyPr wrap="square" lIns="0" tIns="0" rIns="0" bIns="0">
+            <a:spAutoFit/>
+          </a:bodyPr>
+          <a:lstStyle/>
+          <a:p>
+            <a:pPr>
+              <a:spcAft>
+                <a:spcPts val="600"/>
+              </a:spcAft>
+              <a:defRPr sz="2600" b="0">
+                <a:solidFill>
+                  <a:srgbClr val="647488"/>
+                </a:solidFill>
+                <a:latin typeface="Aptos"/>
+              </a:defRPr>
+            </a:pPr>
+            <a:r>
+              <a:t>Better ranking does not fix calibration.</a:t>
             </a:r>
           </a:p>
         </p:txBody>
@@ -7453,7 +7899,7 @@
 </file>
 
 <file path=ppt/slides/slide13.xml><?xml version="1.0" encoding="utf-8"?>
-<p:sld xmlns:a="http://schemas.openxmlformats.org/drawingml/2006/main" xmlns:p="http://schemas.openxmlformats.org/presentationml/2006/main" xmlns:r="http://schemas.openxmlformats.org/officeDocument/2006/relationships">
+<p:sld xmlns:a="http://schemas.openxmlformats.org/drawingml/2006/main" xmlns:r="http://schemas.openxmlformats.org/officeDocument/2006/relationships" xmlns:p="http://schemas.openxmlformats.org/presentationml/2006/main">
   <p:cSld>
     <p:bg>
       <p:bgPr>
@@ -7469,7 +7915,14 @@
         <p:cNvGrpSpPr/>
         <p:nvPr/>
       </p:nvGrpSpPr>
-      <p:grpSpPr/>
+      <p:grpSpPr>
+        <a:xfrm>
+          <a:off x="0" y="0"/>
+          <a:ext cx="0" cy="0"/>
+          <a:chOff x="0" y="0"/>
+          <a:chExt cx="0" cy="0"/>
+        </a:xfrm>
+      </p:grpSpPr>
       <p:sp>
         <p:nvSpPr>
           <p:cNvPr id="2" name="TextBox 1"/>
@@ -7487,7 +7940,7 @@
           <a:noFill/>
         </p:spPr>
         <p:txBody>
-          <a:bodyPr wrap="square" lIns="9144" rIns="9144" tIns="0" bIns="0">
+          <a:bodyPr wrap="square" lIns="9144" tIns="0" rIns="9144" bIns="0">
             <a:spAutoFit/>
           </a:bodyPr>
           <a:lstStyle/>
@@ -7526,7 +7979,7 @@
           <a:noFill/>
         </p:spPr>
         <p:txBody>
-          <a:bodyPr wrap="square" lIns="9144" rIns="9144" tIns="0" bIns="0">
+          <a:bodyPr wrap="square" lIns="9144" tIns="0" rIns="9144" bIns="0">
             <a:spAutoFit/>
           </a:bodyPr>
           <a:lstStyle/>
@@ -7588,6 +8041,7 @@
           <a:lstStyle/>
           <a:p>
             <a:pPr algn="ctr"/>
+            <a:endParaRPr/>
           </a:p>
         </p:txBody>
       </p:sp>
@@ -7599,8 +8053,8 @@
         </p:nvSpPr>
         <p:spPr>
           <a:xfrm>
-            <a:off x="822960" y="2011680"/>
-            <a:ext cx="1828800" cy="411480"/>
+            <a:off x="822960" y="1965960"/>
+            <a:ext cx="4572000" cy="685800"/>
           </a:xfrm>
           <a:prstGeom prst="rect">
             <a:avLst/>
@@ -7608,7 +8062,7 @@
           <a:noFill/>
         </p:spPr>
         <p:txBody>
-          <a:bodyPr wrap="square" lIns="9144" rIns="9144" tIns="0" bIns="0">
+          <a:bodyPr wrap="square" lIns="9144" tIns="0" rIns="9144" bIns="0">
             <a:spAutoFit/>
           </a:bodyPr>
           <a:lstStyle/>
@@ -7617,7 +8071,7 @@
               <a:spcAft>
                 <a:spcPts val="600"/>
               </a:spcAft>
-              <a:defRPr sz="2200" b="1">
+              <a:defRPr sz="2400" b="1">
                 <a:solidFill>
                   <a:srgbClr val="098D96"/>
                 </a:solidFill>
@@ -7625,7 +8079,7 @@
               </a:defRPr>
             </a:pPr>
             <a:r>
-              <a:t>Kept</a:t>
+              <a:t>Suffix attack: answer kept</a:t>
             </a:r>
           </a:p>
         </p:txBody>
@@ -7638,8 +8092,8 @@
         </p:nvSpPr>
         <p:spPr>
           <a:xfrm>
-            <a:off x="2057400" y="2286000"/>
-            <a:ext cx="3291840" cy="640080"/>
+            <a:off x="822960" y="2606040"/>
+            <a:ext cx="4572000" cy="594360"/>
           </a:xfrm>
           <a:prstGeom prst="rect">
             <a:avLst/>
@@ -7647,7 +8101,7 @@
           <a:noFill/>
         </p:spPr>
         <p:txBody>
-          <a:bodyPr wrap="square" lIns="9144" rIns="9144" tIns="0" bIns="0">
+          <a:bodyPr wrap="square" lIns="9144" tIns="0" rIns="9144" bIns="0">
             <a:spAutoFit/>
           </a:bodyPr>
           <a:lstStyle/>
@@ -7656,7 +8110,7 @@
               <a:spcAft>
                 <a:spcPts val="600"/>
               </a:spcAft>
-              <a:defRPr sz="3400" b="1">
+              <a:defRPr sz="3600" b="1">
                 <a:solidFill>
                   <a:srgbClr val="098D96"/>
                 </a:solidFill>
@@ -7709,6 +8163,7 @@
           <a:lstStyle/>
           <a:p>
             <a:pPr algn="ctr"/>
+            <a:endParaRPr/>
           </a:p>
         </p:txBody>
       </p:sp>
@@ -7720,8 +8175,8 @@
         </p:nvSpPr>
         <p:spPr>
           <a:xfrm>
-            <a:off x="822960" y="3749039"/>
-            <a:ext cx="1828800" cy="411480"/>
+            <a:off x="822960" y="3703320"/>
+            <a:ext cx="4572000" cy="685800"/>
           </a:xfrm>
           <a:prstGeom prst="rect">
             <a:avLst/>
@@ -7729,7 +8184,7 @@
           <a:noFill/>
         </p:spPr>
         <p:txBody>
-          <a:bodyPr wrap="square" lIns="9144" rIns="9144" tIns="0" bIns="0">
+          <a:bodyPr wrap="square" lIns="9144" tIns="0" rIns="9144" bIns="0">
             <a:spAutoFit/>
           </a:bodyPr>
           <a:lstStyle/>
@@ -7738,7 +8193,7 @@
               <a:spcAft>
                 <a:spcPts val="600"/>
               </a:spcAft>
-              <a:defRPr sz="2200" b="1">
+              <a:defRPr sz="2400" b="1">
                 <a:solidFill>
                   <a:srgbClr val="BD3B39"/>
                 </a:solidFill>
@@ -7746,7 +8201,7 @@
               </a:defRPr>
             </a:pPr>
             <a:r>
-              <a:t>Lost</a:t>
+              <a:t>Prefix attack: payment fact lost</a:t>
             </a:r>
           </a:p>
         </p:txBody>
@@ -7759,8 +8214,8 @@
         </p:nvSpPr>
         <p:spPr>
           <a:xfrm>
-            <a:off x="2057400" y="4023360"/>
-            <a:ext cx="3291840" cy="640080"/>
+            <a:off x="822960" y="4343400"/>
+            <a:ext cx="4572000" cy="594360"/>
           </a:xfrm>
           <a:prstGeom prst="rect">
             <a:avLst/>
@@ -7768,7 +8223,7 @@
           <a:noFill/>
         </p:spPr>
         <p:txBody>
-          <a:bodyPr wrap="square" lIns="9144" rIns="9144" tIns="0" bIns="0">
+          <a:bodyPr wrap="square" lIns="9144" tIns="0" rIns="9144" bIns="0">
             <a:spAutoFit/>
           </a:bodyPr>
           <a:lstStyle/>
@@ -7777,7 +8232,7 @@
               <a:spcAft>
                 <a:spcPts val="600"/>
               </a:spcAft>
-              <a:defRPr sz="3400" b="1">
+              <a:defRPr sz="3600" b="1">
                 <a:solidFill>
                   <a:srgbClr val="BD3B39"/>
                 </a:solidFill>
@@ -7807,7 +8262,7 @@
           <a:noFill/>
         </p:spPr>
         <p:txBody>
-          <a:bodyPr wrap="square" lIns="9144" rIns="9144" tIns="0" bIns="0">
+          <a:bodyPr wrap="square" lIns="9144" tIns="0" rIns="9144" bIns="0">
             <a:spAutoFit/>
           </a:bodyPr>
           <a:lstStyle/>
@@ -7843,10 +8298,127 @@
         </p:xfrm>
         <a:graphic>
           <a:graphicData uri="http://schemas.openxmlformats.org/drawingml/2006/chart">
-            <c:chart xmlns:c="http://schemas.openxmlformats.org/drawingml/2006/chart" r:id="rId2"/>
+            <c:chart xmlns:c="http://schemas.openxmlformats.org/drawingml/2006/chart" xmlns:r="http://schemas.openxmlformats.org/officeDocument/2006/relationships" r:id="rId3"/>
           </a:graphicData>
         </a:graphic>
       </p:graphicFrame>
+      <p:sp>
+        <p:nvSpPr>
+          <p:cNvPr id="12" name="TextBox 11"/>
+          <p:cNvSpPr txBox="1"/>
+          <p:nvPr/>
+        </p:nvSpPr>
+        <p:spPr>
+          <a:xfrm>
+            <a:off x="6400800" y="5486400"/>
+            <a:ext cx="5029200" cy="365760"/>
+          </a:xfrm>
+          <a:prstGeom prst="rect">
+            <a:avLst/>
+          </a:prstGeom>
+          <a:noFill/>
+        </p:spPr>
+        <p:txBody>
+          <a:bodyPr wrap="square" lIns="0" tIns="0" rIns="0" bIns="0">
+            <a:spAutoFit/>
+          </a:bodyPr>
+          <a:lstStyle/>
+          <a:p>
+            <a:pPr>
+              <a:spcAft>
+                <a:spcPts val="600"/>
+              </a:spcAft>
+              <a:defRPr sz="2400" b="1">
+                <a:solidFill>
+                  <a:srgbClr val="C67A1C"/>
+                </a:solidFill>
+                <a:latin typeface="Aptos"/>
+              </a:defRPr>
+            </a:pPr>
+            <a:r>
+              <a:t>Rules: 0.075 ms</a:t>
+            </a:r>
+          </a:p>
+        </p:txBody>
+      </p:sp>
+      <p:sp>
+        <p:nvSpPr>
+          <p:cNvPr id="13" name="TextBox 12"/>
+          <p:cNvSpPr txBox="1"/>
+          <p:nvPr/>
+        </p:nvSpPr>
+        <p:spPr>
+          <a:xfrm>
+            <a:off x="6400800" y="5897880"/>
+            <a:ext cx="5029200" cy="365760"/>
+          </a:xfrm>
+          <a:prstGeom prst="rect">
+            <a:avLst/>
+          </a:prstGeom>
+          <a:noFill/>
+        </p:spPr>
+        <p:txBody>
+          <a:bodyPr wrap="square" lIns="0" tIns="0" rIns="0" bIns="0">
+            <a:spAutoFit/>
+          </a:bodyPr>
+          <a:lstStyle/>
+          <a:p>
+            <a:pPr>
+              <a:spcAft>
+                <a:spcPts val="600"/>
+              </a:spcAft>
+              <a:defRPr sz="2400" b="1">
+                <a:solidFill>
+                  <a:srgbClr val="098D96"/>
+                </a:solidFill>
+                <a:latin typeface="Aptos"/>
+              </a:defRPr>
+            </a:pPr>
+            <a:r>
+              <a:t>Combined: 191.6 ms</a:t>
+            </a:r>
+          </a:p>
+        </p:txBody>
+      </p:sp>
+      <p:sp>
+        <p:nvSpPr>
+          <p:cNvPr id="14" name="TextBox 13"/>
+          <p:cNvSpPr txBox="1"/>
+          <p:nvPr/>
+        </p:nvSpPr>
+        <p:spPr>
+          <a:xfrm>
+            <a:off x="594360" y="5486400"/>
+            <a:ext cx="5074920" cy="777240"/>
+          </a:xfrm>
+          <a:prstGeom prst="rect">
+            <a:avLst/>
+          </a:prstGeom>
+          <a:noFill/>
+        </p:spPr>
+        <p:txBody>
+          <a:bodyPr wrap="square" lIns="0" tIns="0" rIns="0" bIns="0">
+            <a:spAutoFit/>
+          </a:bodyPr>
+          <a:lstStyle/>
+          <a:p>
+            <a:pPr>
+              <a:spcAft>
+                <a:spcPts val="600"/>
+              </a:spcAft>
+              <a:defRPr sz="2400" b="0">
+                <a:solidFill>
+                  <a:srgbClr val="647488"/>
+                </a:solidFill>
+                <a:latin typeface="Aptos"/>
+              </a:defRPr>
+            </a:pPr>
+            <a:r>
+              <a:t>Whole-chunk rejection can discard useful facts.</a:t>
+            </a:r>
+          </a:p>
+        </p:txBody>
+      </p:sp>
     </p:spTree>
   </p:cSld>
   <p:clrMapOvr>
@@ -7856,7 +8428,7 @@
 </file>
 
 <file path=ppt/slides/slide14.xml><?xml version="1.0" encoding="utf-8"?>
-<p:sld xmlns:a="http://schemas.openxmlformats.org/drawingml/2006/main" xmlns:p="http://schemas.openxmlformats.org/presentationml/2006/main" xmlns:r="http://schemas.openxmlformats.org/officeDocument/2006/relationships">
+<p:sld xmlns:a="http://schemas.openxmlformats.org/drawingml/2006/main" xmlns:r="http://schemas.openxmlformats.org/officeDocument/2006/relationships" xmlns:p="http://schemas.openxmlformats.org/presentationml/2006/main">
   <p:cSld>
     <p:bg>
       <p:bgPr>
@@ -7872,7 +8444,14 @@
         <p:cNvGrpSpPr/>
         <p:nvPr/>
       </p:nvGrpSpPr>
-      <p:grpSpPr/>
+      <p:grpSpPr>
+        <a:xfrm>
+          <a:off x="0" y="0"/>
+          <a:ext cx="0" cy="0"/>
+          <a:chOff x="0" y="0"/>
+          <a:chExt cx="0" cy="0"/>
+        </a:xfrm>
+      </p:grpSpPr>
       <p:sp>
         <p:nvSpPr>
           <p:cNvPr id="2" name="TextBox 1"/>
@@ -7890,7 +8469,7 @@
           <a:noFill/>
         </p:spPr>
         <p:txBody>
-          <a:bodyPr wrap="square" lIns="9144" rIns="9144" tIns="0" bIns="0">
+          <a:bodyPr wrap="square" lIns="9144" tIns="0" rIns="9144" bIns="0">
             <a:spAutoFit/>
           </a:bodyPr>
           <a:lstStyle/>
@@ -7929,7 +8508,7 @@
           <a:noFill/>
         </p:spPr>
         <p:txBody>
-          <a:bodyPr wrap="square" lIns="9144" rIns="9144" tIns="0" bIns="0">
+          <a:bodyPr wrap="square" lIns="9144" tIns="0" rIns="9144" bIns="0">
             <a:spAutoFit/>
           </a:bodyPr>
           <a:lstStyle/>
@@ -7968,7 +8547,7 @@
           <a:noFill/>
         </p:spPr>
         <p:txBody>
-          <a:bodyPr wrap="square" lIns="9144" rIns="9144" tIns="0" bIns="0">
+          <a:bodyPr wrap="square" lIns="9144" tIns="0" rIns="9144" bIns="0">
             <a:spAutoFit/>
           </a:bodyPr>
           <a:lstStyle/>
@@ -7998,8 +8577,8 @@
         </p:nvSpPr>
         <p:spPr>
           <a:xfrm>
-            <a:off x="594360" y="2926080"/>
-            <a:ext cx="3383280" cy="2103120"/>
+            <a:off x="594360" y="2788920"/>
+            <a:ext cx="3383280" cy="2560320"/>
           </a:xfrm>
           <a:prstGeom prst="rect">
             <a:avLst/>
@@ -8007,7 +8586,7 @@
           <a:noFill/>
         </p:spPr>
         <p:txBody>
-          <a:bodyPr wrap="square" lIns="9144" rIns="9144" tIns="0" bIns="0">
+          <a:bodyPr wrap="square" lIns="9144" tIns="0" rIns="9144" bIns="0">
             <a:spAutoFit/>
           </a:bodyPr>
           <a:lstStyle/>
@@ -8016,7 +8595,7 @@
               <a:spcAft>
                 <a:spcPts val="600"/>
               </a:spcAft>
-              <a:defRPr sz="2800" b="0">
+              <a:defRPr sz="2600" b="0">
                 <a:solidFill>
                   <a:srgbClr val="FFFFFF"/>
                 </a:solidFill>
@@ -8024,15 +8603,15 @@
               </a:defRPr>
             </a:pPr>
             <a:r>
-              <a:t>One model</a:t>
-            </a:r>
-          </a:p>
-          <a:p>
-            <a:pPr algn="l">
+              <a:t>One 0.5B generator</a:t>
+            </a:r>
+          </a:p>
+          <a:p>
+            <a:pPr>
               <a:spcAft>
                 <a:spcPts val="600"/>
               </a:spcAft>
-              <a:defRPr sz="2800" b="0">
+              <a:defRPr sz="2600" b="0">
                 <a:solidFill>
                   <a:srgbClr val="FFFFFF"/>
                 </a:solidFill>
@@ -8040,7 +8619,23 @@
               </a:defRPr>
             </a:pPr>
             <a:r>
-              <a:t>Fixed attacks</a:t>
+              <a:t>33 emails · four templates</a:t>
+            </a:r>
+          </a:p>
+          <a:p>
+            <a:pPr>
+              <a:spcAft>
+                <a:spcPts val="600"/>
+              </a:spcAft>
+              <a:defRPr sz="2600" b="0">
+                <a:solidFill>
+                  <a:srgbClr val="FFFFFF"/>
+                </a:solidFill>
+                <a:latin typeface="Aptos"/>
+              </a:defRPr>
+            </a:pPr>
+            <a:r>
+              <a:t>No adaptive attacker</a:t>
             </a:r>
           </a:p>
         </p:txBody>
@@ -8062,7 +8657,7 @@
           <a:noFill/>
         </p:spPr>
         <p:txBody>
-          <a:bodyPr wrap="square" lIns="9144" rIns="9144" tIns="0" bIns="0">
+          <a:bodyPr wrap="square" lIns="9144" tIns="0" rIns="9144" bIns="0">
             <a:spAutoFit/>
           </a:bodyPr>
           <a:lstStyle/>
@@ -8092,8 +8687,8 @@
         </p:nvSpPr>
         <p:spPr>
           <a:xfrm>
-            <a:off x="4389120" y="2926080"/>
-            <a:ext cx="3383280" cy="2103120"/>
+            <a:off x="4389120" y="2788920"/>
+            <a:ext cx="3383280" cy="2560320"/>
           </a:xfrm>
           <a:prstGeom prst="rect">
             <a:avLst/>
@@ -8101,7 +8696,7 @@
           <a:noFill/>
         </p:spPr>
         <p:txBody>
-          <a:bodyPr wrap="square" lIns="9144" rIns="9144" tIns="0" bIns="0">
+          <a:bodyPr wrap="square" lIns="9144" tIns="0" rIns="9144" bIns="0">
             <a:spAutoFit/>
           </a:bodyPr>
           <a:lstStyle/>
@@ -8110,7 +8705,7 @@
               <a:spcAft>
                 <a:spcPts val="600"/>
               </a:spcAft>
-              <a:defRPr sz="2800" b="0">
+              <a:defRPr sz="2600" b="0">
                 <a:solidFill>
                   <a:srgbClr val="FFFFFF"/>
                 </a:solidFill>
@@ -8118,15 +8713,15 @@
               </a:defRPr>
             </a:pPr>
             <a:r>
-              <a:t>Task conditioning</a:t>
-            </a:r>
-          </a:p>
-          <a:p>
-            <a:pPr algn="l">
+              <a:t>Task-conditioned detection</a:t>
+            </a:r>
+          </a:p>
+          <a:p>
+            <a:pPr>
               <a:spcAft>
                 <a:spcPts val="600"/>
               </a:spcAft>
-              <a:defRPr sz="2800" b="0">
+              <a:defRPr sz="2600" b="0">
                 <a:solidFill>
                   <a:srgbClr val="FFFFFF"/>
                 </a:solidFill>
@@ -8134,15 +8729,15 @@
               </a:defRPr>
             </a:pPr>
             <a:r>
-              <a:t>Sentence removal</a:t>
-            </a:r>
-          </a:p>
-          <a:p>
-            <a:pPr algn="l">
+              <a:t>Sentence-level removal</a:t>
+            </a:r>
+          </a:p>
+          <a:p>
+            <a:pPr>
               <a:spcAft>
                 <a:spcPts val="600"/>
               </a:spcAft>
-              <a:defRPr sz="2800" b="0">
+              <a:defRPr sz="2600" b="0">
                 <a:solidFill>
                   <a:srgbClr val="FFFFFF"/>
                 </a:solidFill>
@@ -8172,7 +8767,7 @@
           <a:noFill/>
         </p:spPr>
         <p:txBody>
-          <a:bodyPr wrap="square" lIns="9144" rIns="9144" tIns="0" bIns="0">
+          <a:bodyPr wrap="square" lIns="9144" tIns="0" rIns="9144" bIns="0">
             <a:spAutoFit/>
           </a:bodyPr>
           <a:lstStyle/>
@@ -8202,8 +8797,8 @@
         </p:nvSpPr>
         <p:spPr>
           <a:xfrm>
-            <a:off x="8183880" y="2926080"/>
-            <a:ext cx="3383280" cy="2103120"/>
+            <a:off x="8183880" y="2788920"/>
+            <a:ext cx="3383280" cy="2560320"/>
           </a:xfrm>
           <a:prstGeom prst="rect">
             <a:avLst/>
@@ -8211,7 +8806,7 @@
           <a:noFill/>
         </p:spPr>
         <p:txBody>
-          <a:bodyPr wrap="square" lIns="9144" rIns="9144" tIns="0" bIns="0">
+          <a:bodyPr wrap="square" lIns="9144" tIns="0" rIns="9144" bIns="0">
             <a:spAutoFit/>
           </a:bodyPr>
           <a:lstStyle/>
@@ -8220,7 +8815,7 @@
               <a:spcAft>
                 <a:spcPts val="600"/>
               </a:spcAft>
-              <a:defRPr sz="2800" b="0">
+              <a:defRPr sz="2600" b="0">
                 <a:solidFill>
                   <a:srgbClr val="FFFFFF"/>
                 </a:solidFill>
@@ -8232,11 +8827,11 @@
             </a:r>
           </a:p>
           <a:p>
-            <a:pPr algn="l">
+            <a:pPr>
               <a:spcAft>
                 <a:spcPts val="600"/>
               </a:spcAft>
-              <a:defRPr sz="2800" b="0">
+              <a:defRPr sz="2600" b="0">
                 <a:solidFill>
                   <a:srgbClr val="FFFFFF"/>
                 </a:solidFill>
@@ -8244,7 +8839,23 @@
               </a:defRPr>
             </a:pPr>
             <a:r>
-              <a:t>Benign rejection persists</a:t>
+              <a:t>24/24 benign rejections</a:t>
+            </a:r>
+          </a:p>
+          <a:p>
+            <a:pPr>
+              <a:spcAft>
+                <a:spcPts val="600"/>
+              </a:spcAft>
+              <a:defRPr sz="2600" b="0">
+                <a:solidFill>
+                  <a:srgbClr val="FFFFFF"/>
+                </a:solidFill>
+                <a:latin typeface="Aptos"/>
+              </a:defRPr>
+            </a:pPr>
+            <a:r>
+              <a:t>General use remains limited</a:t>
             </a:r>
           </a:p>
         </p:txBody>
@@ -8266,7 +8877,7 @@
           <a:noFill/>
         </p:spPr>
         <p:txBody>
-          <a:bodyPr wrap="square" lIns="9144" rIns="9144" tIns="0" bIns="0">
+          <a:bodyPr wrap="square" lIns="9144" tIns="0" rIns="9144" bIns="0">
             <a:spAutoFit/>
           </a:bodyPr>
           <a:lstStyle/>
@@ -8297,7 +8908,7 @@
 </file>
 
 <file path=ppt/slides/slide2.xml><?xml version="1.0" encoding="utf-8"?>
-<p:sld xmlns:a="http://schemas.openxmlformats.org/drawingml/2006/main" xmlns:p="http://schemas.openxmlformats.org/presentationml/2006/main" xmlns:r="http://schemas.openxmlformats.org/officeDocument/2006/relationships">
+<p:sld xmlns:a="http://schemas.openxmlformats.org/drawingml/2006/main" xmlns:r="http://schemas.openxmlformats.org/officeDocument/2006/relationships" xmlns:p="http://schemas.openxmlformats.org/presentationml/2006/main">
   <p:cSld>
     <p:bg>
       <p:bgPr>
@@ -8313,7 +8924,14 @@
         <p:cNvGrpSpPr/>
         <p:nvPr/>
       </p:nvGrpSpPr>
-      <p:grpSpPr/>
+      <p:grpSpPr>
+        <a:xfrm>
+          <a:off x="0" y="0"/>
+          <a:ext cx="0" cy="0"/>
+          <a:chOff x="0" y="0"/>
+          <a:chExt cx="0" cy="0"/>
+        </a:xfrm>
+      </p:grpSpPr>
       <p:sp>
         <p:nvSpPr>
           <p:cNvPr id="2" name="TextBox 1"/>
@@ -8331,7 +8949,7 @@
           <a:noFill/>
         </p:spPr>
         <p:txBody>
-          <a:bodyPr wrap="square" lIns="9144" rIns="9144" tIns="0" bIns="0">
+          <a:bodyPr wrap="square" lIns="9144" tIns="0" rIns="9144" bIns="0">
             <a:spAutoFit/>
           </a:bodyPr>
           <a:lstStyle/>
@@ -8370,7 +8988,7 @@
           <a:noFill/>
         </p:spPr>
         <p:txBody>
-          <a:bodyPr wrap="square" lIns="9144" rIns="9144" tIns="0" bIns="0">
+          <a:bodyPr wrap="square" lIns="9144" tIns="0" rIns="9144" bIns="0">
             <a:spAutoFit/>
           </a:bodyPr>
           <a:lstStyle/>
@@ -8432,6 +9050,7 @@
           <a:lstStyle/>
           <a:p>
             <a:pPr algn="ctr"/>
+            <a:endParaRPr/>
           </a:p>
         </p:txBody>
       </p:sp>
@@ -8452,7 +9071,7 @@
           <a:noFill/>
         </p:spPr>
         <p:txBody>
-          <a:bodyPr wrap="square" lIns="9144" rIns="9144" tIns="0" bIns="0">
+          <a:bodyPr wrap="square" lIns="9144" tIns="0" rIns="9144" bIns="0">
             <a:spAutoFit/>
           </a:bodyPr>
           <a:lstStyle/>
@@ -8491,7 +9110,7 @@
           <a:noFill/>
         </p:spPr>
         <p:txBody>
-          <a:bodyPr wrap="square" lIns="9144" rIns="9144" tIns="0" bIns="0">
+          <a:bodyPr wrap="square" lIns="9144" tIns="0" rIns="9144" bIns="0">
             <a:spAutoFit/>
           </a:bodyPr>
           <a:lstStyle/>
@@ -8553,6 +9172,7 @@
           <a:lstStyle/>
           <a:p>
             <a:pPr algn="ctr"/>
+            <a:endParaRPr/>
           </a:p>
         </p:txBody>
       </p:sp>
@@ -8573,7 +9193,7 @@
           <a:noFill/>
         </p:spPr>
         <p:txBody>
-          <a:bodyPr wrap="square" lIns="9144" rIns="9144" tIns="0" bIns="0">
+          <a:bodyPr wrap="square" lIns="9144" tIns="0" rIns="9144" bIns="0">
             <a:spAutoFit/>
           </a:bodyPr>
           <a:lstStyle/>
@@ -8651,6 +9271,7 @@
           <a:lstStyle/>
           <a:p>
             <a:pPr algn="ctr"/>
+            <a:endParaRPr/>
           </a:p>
         </p:txBody>
       </p:sp>
@@ -8694,6 +9315,7 @@
           <a:lstStyle/>
           <a:p>
             <a:pPr algn="ctr"/>
+            <a:endParaRPr/>
           </a:p>
         </p:txBody>
       </p:sp>
@@ -8714,7 +9336,7 @@
           <a:noFill/>
         </p:spPr>
         <p:txBody>
-          <a:bodyPr wrap="square" lIns="9144" rIns="9144" tIns="0" bIns="0">
+          <a:bodyPr wrap="square" lIns="9144" tIns="0" rIns="9144" bIns="0">
             <a:spAutoFit/>
           </a:bodyPr>
           <a:lstStyle/>
@@ -8776,6 +9398,7 @@
           <a:lstStyle/>
           <a:p>
             <a:pPr algn="ctr"/>
+            <a:endParaRPr/>
           </a:p>
         </p:txBody>
       </p:sp>
@@ -8796,7 +9419,7 @@
           <a:noFill/>
         </p:spPr>
         <p:txBody>
-          <a:bodyPr wrap="square" lIns="9144" rIns="9144" tIns="0" bIns="0">
+          <a:bodyPr wrap="square" lIns="9144" tIns="0" rIns="9144" bIns="0">
             <a:spAutoFit/>
           </a:bodyPr>
           <a:lstStyle/>
@@ -8835,7 +9458,7 @@
           <a:noFill/>
         </p:spPr>
         <p:txBody>
-          <a:bodyPr wrap="square" lIns="9144" rIns="9144" tIns="0" bIns="0">
+          <a:bodyPr wrap="square" lIns="9144" tIns="0" rIns="9144" bIns="0">
             <a:spAutoFit/>
           </a:bodyPr>
           <a:lstStyle/>
@@ -8853,6 +9476,45 @@
             </a:pPr>
             <a:r>
               <a:t>RAG_OVERRIDE_764</a:t>
+            </a:r>
+          </a:p>
+        </p:txBody>
+      </p:sp>
+      <p:sp>
+        <p:nvSpPr>
+          <p:cNvPr id="15" name="TextBox 14"/>
+          <p:cNvSpPr txBox="1"/>
+          <p:nvPr/>
+        </p:nvSpPr>
+        <p:spPr>
+          <a:xfrm>
+            <a:off x="594360" y="5687568"/>
+            <a:ext cx="10972800" cy="548640"/>
+          </a:xfrm>
+          <a:prstGeom prst="rect">
+            <a:avLst/>
+          </a:prstGeom>
+          <a:noFill/>
+        </p:spPr>
+        <p:txBody>
+          <a:bodyPr wrap="square" lIns="0" tIns="0" rIns="0" bIns="0">
+            <a:spAutoFit/>
+          </a:bodyPr>
+          <a:lstStyle/>
+          <a:p>
+            <a:pPr>
+              <a:spcAft>
+                <a:spcPts val="600"/>
+              </a:spcAft>
+              <a:defRPr sz="2400" b="0">
+                <a:solidFill>
+                  <a:srgbClr val="647488"/>
+                </a:solidFill>
+                <a:latin typeface="Aptos"/>
+              </a:defRPr>
+            </a:pPr>
+            <a:r>
+              <a:t>Relevant evidence can contain instructions that redirect the task.</a:t>
             </a:r>
           </a:p>
         </p:txBody>
@@ -8866,7 +9528,7 @@
 </file>
 
 <file path=ppt/slides/slide3.xml><?xml version="1.0" encoding="utf-8"?>
-<p:sld xmlns:a="http://schemas.openxmlformats.org/drawingml/2006/main" xmlns:p="http://schemas.openxmlformats.org/presentationml/2006/main" xmlns:r="http://schemas.openxmlformats.org/officeDocument/2006/relationships">
+<p:sld xmlns:a="http://schemas.openxmlformats.org/drawingml/2006/main" xmlns:r="http://schemas.openxmlformats.org/officeDocument/2006/relationships" xmlns:p="http://schemas.openxmlformats.org/presentationml/2006/main">
   <p:cSld>
     <p:bg>
       <p:bgPr>
@@ -8882,7 +9544,14 @@
         <p:cNvGrpSpPr/>
         <p:nvPr/>
       </p:nvGrpSpPr>
-      <p:grpSpPr/>
+      <p:grpSpPr>
+        <a:xfrm>
+          <a:off x="0" y="0"/>
+          <a:ext cx="0" cy="0"/>
+          <a:chOff x="0" y="0"/>
+          <a:chExt cx="0" cy="0"/>
+        </a:xfrm>
+      </p:grpSpPr>
       <p:sp>
         <p:nvSpPr>
           <p:cNvPr id="2" name="TextBox 1"/>
@@ -8900,7 +9569,7 @@
           <a:noFill/>
         </p:spPr>
         <p:txBody>
-          <a:bodyPr wrap="square" lIns="9144" rIns="9144" tIns="0" bIns="0">
+          <a:bodyPr wrap="square" lIns="9144" tIns="0" rIns="9144" bIns="0">
             <a:spAutoFit/>
           </a:bodyPr>
           <a:lstStyle/>
@@ -8939,7 +9608,7 @@
           <a:noFill/>
         </p:spPr>
         <p:txBody>
-          <a:bodyPr wrap="square" lIns="9144" rIns="9144" tIns="0" bIns="0">
+          <a:bodyPr wrap="square" lIns="9144" tIns="0" rIns="9144" bIns="0">
             <a:spAutoFit/>
           </a:bodyPr>
           <a:lstStyle/>
@@ -8970,7 +9639,7 @@
         <p:spPr>
           <a:xfrm>
             <a:off x="594360" y="1920240"/>
-            <a:ext cx="3429000" cy="2194560"/>
+            <a:ext cx="3429000" cy="2743200"/>
           </a:xfrm>
           <a:prstGeom prst="rect">
             <a:avLst/>
@@ -9001,6 +9670,7 @@
           <a:lstStyle/>
           <a:p>
             <a:pPr algn="ctr"/>
+            <a:endParaRPr/>
           </a:p>
         </p:txBody>
       </p:sp>
@@ -9021,7 +9691,7 @@
           <a:noFill/>
         </p:spPr>
         <p:txBody>
-          <a:bodyPr wrap="square" lIns="9144" rIns="9144" tIns="0" bIns="0">
+          <a:bodyPr wrap="square" lIns="9144" tIns="0" rIns="9144" bIns="0">
             <a:spAutoFit/>
           </a:bodyPr>
           <a:lstStyle/>
@@ -9051,8 +9721,8 @@
         </p:nvSpPr>
         <p:spPr>
           <a:xfrm>
-            <a:off x="804672" y="3474720"/>
-            <a:ext cx="3017520" cy="457200"/>
+            <a:off x="804672" y="3291840"/>
+            <a:ext cx="3017520" cy="1005840"/>
           </a:xfrm>
           <a:prstGeom prst="rect">
             <a:avLst/>
@@ -9060,7 +9730,7 @@
           <a:noFill/>
         </p:spPr>
         <p:txBody>
-          <a:bodyPr wrap="square" lIns="9144" rIns="9144" tIns="0" bIns="0">
+          <a:bodyPr wrap="square" lIns="9144" tIns="0" rIns="9144" bIns="0">
             <a:spAutoFit/>
           </a:bodyPr>
           <a:lstStyle/>
@@ -9069,7 +9739,7 @@
               <a:spcAft>
                 <a:spcPts val="600"/>
               </a:spcAft>
-              <a:defRPr sz="2100" b="0">
+              <a:defRPr sz="2500" b="0">
                 <a:solidFill>
                   <a:srgbClr val="647488"/>
                 </a:solidFill>
@@ -9077,7 +9747,23 @@
               </a:defRPr>
             </a:pPr>
             <a:r>
-              <a:t>Authority</a:t>
+              <a:t>Separate instructions</a:t>
+            </a:r>
+          </a:p>
+          <a:p>
+            <a:pPr>
+              <a:spcAft>
+                <a:spcPts val="600"/>
+              </a:spcAft>
+              <a:defRPr sz="2500" b="0">
+                <a:solidFill>
+                  <a:srgbClr val="647488"/>
+                </a:solidFill>
+                <a:latin typeface="Aptos"/>
+              </a:defRPr>
+            </a:pPr>
+            <a:r>
+              <a:t>from evidence</a:t>
             </a:r>
           </a:p>
         </p:txBody>
@@ -9091,7 +9777,7 @@
         <p:spPr>
           <a:xfrm>
             <a:off x="4389120" y="1920240"/>
-            <a:ext cx="3429000" cy="2194560"/>
+            <a:ext cx="3429000" cy="2743200"/>
           </a:xfrm>
           <a:prstGeom prst="rect">
             <a:avLst/>
@@ -9122,6 +9808,7 @@
           <a:lstStyle/>
           <a:p>
             <a:pPr algn="ctr"/>
+            <a:endParaRPr/>
           </a:p>
         </p:txBody>
       </p:sp>
@@ -9142,7 +9829,7 @@
           <a:noFill/>
         </p:spPr>
         <p:txBody>
-          <a:bodyPr wrap="square" lIns="9144" rIns="9144" tIns="0" bIns="0">
+          <a:bodyPr wrap="square" lIns="9144" tIns="0" rIns="9144" bIns="0">
             <a:spAutoFit/>
           </a:bodyPr>
           <a:lstStyle/>
@@ -9172,8 +9859,8 @@
         </p:nvSpPr>
         <p:spPr>
           <a:xfrm>
-            <a:off x="4599432" y="3474720"/>
-            <a:ext cx="3017520" cy="457200"/>
+            <a:off x="4599432" y="3291840"/>
+            <a:ext cx="3017520" cy="1005840"/>
           </a:xfrm>
           <a:prstGeom prst="rect">
             <a:avLst/>
@@ -9181,7 +9868,7 @@
           <a:noFill/>
         </p:spPr>
         <p:txBody>
-          <a:bodyPr wrap="square" lIns="9144" rIns="9144" tIns="0" bIns="0">
+          <a:bodyPr wrap="square" lIns="9144" tIns="0" rIns="9144" bIns="0">
             <a:spAutoFit/>
           </a:bodyPr>
           <a:lstStyle/>
@@ -9190,7 +9877,7 @@
               <a:spcAft>
                 <a:spcPts val="600"/>
               </a:spcAft>
-              <a:defRPr sz="2100" b="0">
+              <a:defRPr sz="2500" b="0">
                 <a:solidFill>
                   <a:srgbClr val="647488"/>
                 </a:solidFill>
@@ -9198,7 +9885,23 @@
               </a:defRPr>
             </a:pPr>
             <a:r>
-              <a:t>Inspection</a:t>
+              <a:t>Inspect and remove</a:t>
+            </a:r>
+          </a:p>
+          <a:p>
+            <a:pPr>
+              <a:spcAft>
+                <a:spcPts val="600"/>
+              </a:spcAft>
+              <a:defRPr sz="2500" b="0">
+                <a:solidFill>
+                  <a:srgbClr val="647488"/>
+                </a:solidFill>
+                <a:latin typeface="Aptos"/>
+              </a:defRPr>
+            </a:pPr>
+            <a:r>
+              <a:t>suspect text</a:t>
             </a:r>
           </a:p>
         </p:txBody>
@@ -9212,7 +9915,7 @@
         <p:spPr>
           <a:xfrm>
             <a:off x="8183880" y="1920240"/>
-            <a:ext cx="3429000" cy="2194560"/>
+            <a:ext cx="3429000" cy="2743200"/>
           </a:xfrm>
           <a:prstGeom prst="rect">
             <a:avLst/>
@@ -9243,6 +9946,7 @@
           <a:lstStyle/>
           <a:p>
             <a:pPr algn="ctr"/>
+            <a:endParaRPr/>
           </a:p>
         </p:txBody>
       </p:sp>
@@ -9263,7 +9967,7 @@
           <a:noFill/>
         </p:spPr>
         <p:txBody>
-          <a:bodyPr wrap="square" lIns="9144" rIns="9144" tIns="0" bIns="0">
+          <a:bodyPr wrap="square" lIns="9144" tIns="0" rIns="9144" bIns="0">
             <a:spAutoFit/>
           </a:bodyPr>
           <a:lstStyle/>
@@ -9293,8 +9997,8 @@
         </p:nvSpPr>
         <p:spPr>
           <a:xfrm>
-            <a:off x="8394192" y="3474720"/>
-            <a:ext cx="3017520" cy="457200"/>
+            <a:off x="8394192" y="3291840"/>
+            <a:ext cx="3017520" cy="1280160"/>
           </a:xfrm>
           <a:prstGeom prst="rect">
             <a:avLst/>
@@ -9302,7 +10006,7 @@
           <a:noFill/>
         </p:spPr>
         <p:txBody>
-          <a:bodyPr wrap="square" lIns="9144" rIns="9144" tIns="0" bIns="0">
+          <a:bodyPr wrap="square" lIns="9144" tIns="0" rIns="9144" bIns="0">
             <a:spAutoFit/>
           </a:bodyPr>
           <a:lstStyle/>
@@ -9311,7 +10015,7 @@
               <a:spcAft>
                 <a:spcPts val="600"/>
               </a:spcAft>
-              <a:defRPr sz="2100" b="0">
+              <a:defRPr sz="2500" b="0">
                 <a:solidFill>
                   <a:srgbClr val="647488"/>
                 </a:solidFill>
@@ -9319,7 +10023,23 @@
               </a:defRPr>
             </a:pPr>
             <a:r>
-              <a:t>Aggregation</a:t>
+              <a:t>Isolate passages</a:t>
+            </a:r>
+          </a:p>
+          <a:p>
+            <a:pPr>
+              <a:spcAft>
+                <a:spcPts val="600"/>
+              </a:spcAft>
+              <a:defRPr sz="2500" b="0">
+                <a:solidFill>
+                  <a:srgbClr val="647488"/>
+                </a:solidFill>
+                <a:latin typeface="Aptos"/>
+              </a:defRPr>
+            </a:pPr>
+            <a:r>
+              <a:t>and combine answers</a:t>
             </a:r>
           </a:p>
         </p:txBody>
@@ -9364,6 +10084,7 @@
           <a:lstStyle/>
           <a:p>
             <a:pPr algn="ctr"/>
+            <a:endParaRPr/>
           </a:p>
         </p:txBody>
       </p:sp>
@@ -9384,7 +10105,7 @@
           <a:noFill/>
         </p:spPr>
         <p:txBody>
-          <a:bodyPr wrap="square" lIns="9144" rIns="9144" tIns="0" bIns="0">
+          <a:bodyPr wrap="square" lIns="9144" tIns="0" rIns="9144" bIns="0">
             <a:spAutoFit/>
           </a:bodyPr>
           <a:lstStyle/>
@@ -9415,7 +10136,7 @@
 </file>
 
 <file path=ppt/slides/slide4.xml><?xml version="1.0" encoding="utf-8"?>
-<p:sld xmlns:a="http://schemas.openxmlformats.org/drawingml/2006/main" xmlns:p="http://schemas.openxmlformats.org/presentationml/2006/main" xmlns:r="http://schemas.openxmlformats.org/officeDocument/2006/relationships">
+<p:sld xmlns:a="http://schemas.openxmlformats.org/drawingml/2006/main" xmlns:r="http://schemas.openxmlformats.org/officeDocument/2006/relationships" xmlns:p="http://schemas.openxmlformats.org/presentationml/2006/main">
   <p:cSld>
     <p:bg>
       <p:bgPr>
@@ -9431,7 +10152,14 @@
         <p:cNvGrpSpPr/>
         <p:nvPr/>
       </p:nvGrpSpPr>
-      <p:grpSpPr/>
+      <p:grpSpPr>
+        <a:xfrm>
+          <a:off x="0" y="0"/>
+          <a:ext cx="0" cy="0"/>
+          <a:chOff x="0" y="0"/>
+          <a:chExt cx="0" cy="0"/>
+        </a:xfrm>
+      </p:grpSpPr>
       <p:sp>
         <p:nvSpPr>
           <p:cNvPr id="2" name="TextBox 1"/>
@@ -9449,7 +10177,7 @@
           <a:noFill/>
         </p:spPr>
         <p:txBody>
-          <a:bodyPr wrap="square" lIns="9144" rIns="9144" tIns="0" bIns="0">
+          <a:bodyPr wrap="square" lIns="9144" tIns="0" rIns="9144" bIns="0">
             <a:spAutoFit/>
           </a:bodyPr>
           <a:lstStyle/>
@@ -9488,7 +10216,7 @@
           <a:noFill/>
         </p:spPr>
         <p:txBody>
-          <a:bodyPr wrap="square" lIns="9144" rIns="9144" tIns="0" bIns="0">
+          <a:bodyPr wrap="square" lIns="9144" tIns="0" rIns="9144" bIns="0">
             <a:spAutoFit/>
           </a:bodyPr>
           <a:lstStyle/>
@@ -9550,6 +10278,7 @@
           <a:lstStyle/>
           <a:p>
             <a:pPr algn="ctr"/>
+            <a:endParaRPr/>
           </a:p>
         </p:txBody>
       </p:sp>
@@ -9570,7 +10299,7 @@
           <a:noFill/>
         </p:spPr>
         <p:txBody>
-          <a:bodyPr wrap="square" lIns="9144" rIns="9144" tIns="0" bIns="0">
+          <a:bodyPr wrap="square" lIns="9144" tIns="0" rIns="9144" bIns="0">
             <a:spAutoFit/>
           </a:bodyPr>
           <a:lstStyle/>
@@ -9601,7 +10330,7 @@
         <p:spPr>
           <a:xfrm>
             <a:off x="1737360" y="1920240"/>
-            <a:ext cx="2468880" cy="1097280"/>
+            <a:ext cx="2761488" cy="1371600"/>
           </a:xfrm>
           <a:prstGeom prst="rect">
             <a:avLst/>
@@ -9609,7 +10338,7 @@
           <a:noFill/>
         </p:spPr>
         <p:txBody>
-          <a:bodyPr wrap="square" lIns="9144" rIns="9144" tIns="0" bIns="0">
+          <a:bodyPr wrap="square" lIns="9144" tIns="0" rIns="9144" bIns="0">
             <a:spAutoFit/>
           </a:bodyPr>
           <a:lstStyle/>
@@ -9618,7 +10347,7 @@
               <a:spcAft>
                 <a:spcPts val="600"/>
               </a:spcAft>
-              <a:defRPr sz="2500" b="1">
+              <a:defRPr sz="2600" b="1">
                 <a:solidFill>
                   <a:srgbClr val="14283F"/>
                 </a:solidFill>
@@ -9626,7 +10355,23 @@
               </a:defRPr>
             </a:pPr>
             <a:r>
-              <a:t>Attack detection coverage</a:t>
+              <a:t>Attack detection</a:t>
+            </a:r>
+          </a:p>
+          <a:p>
+            <a:pPr>
+              <a:spcAft>
+                <a:spcPts val="600"/>
+              </a:spcAft>
+              <a:defRPr sz="2600" b="1">
+                <a:solidFill>
+                  <a:srgbClr val="14283F"/>
+                </a:solidFill>
+                <a:latin typeface="Aptos"/>
+              </a:defRPr>
+            </a:pPr>
+            <a:r>
+              <a:t>coverage</a:t>
             </a:r>
           </a:p>
         </p:txBody>
@@ -9671,6 +10416,7 @@
           <a:lstStyle/>
           <a:p>
             <a:pPr algn="ctr"/>
+            <a:endParaRPr/>
           </a:p>
         </p:txBody>
       </p:sp>
@@ -9691,7 +10437,7 @@
           <a:noFill/>
         </p:spPr>
         <p:txBody>
-          <a:bodyPr wrap="square" lIns="9144" rIns="9144" tIns="0" bIns="0">
+          <a:bodyPr wrap="square" lIns="9144" tIns="0" rIns="9144" bIns="0">
             <a:spAutoFit/>
           </a:bodyPr>
           <a:lstStyle/>
@@ -9722,7 +10468,7 @@
         <p:spPr>
           <a:xfrm>
             <a:off x="5532120" y="1920240"/>
-            <a:ext cx="2468880" cy="1097280"/>
+            <a:ext cx="2761488" cy="1234440"/>
           </a:xfrm>
           <a:prstGeom prst="rect">
             <a:avLst/>
@@ -9730,7 +10476,7 @@
           <a:noFill/>
         </p:spPr>
         <p:txBody>
-          <a:bodyPr wrap="square" lIns="9144" rIns="9144" tIns="0" bIns="0">
+          <a:bodyPr wrap="square" lIns="9144" tIns="0" rIns="9144" bIns="0">
             <a:spAutoFit/>
           </a:bodyPr>
           <a:lstStyle/>
@@ -9739,7 +10485,7 @@
               <a:spcAft>
                 <a:spcPts val="600"/>
               </a:spcAft>
-              <a:defRPr sz="2500" b="1">
+              <a:defRPr sz="2600" b="1">
                 <a:solidFill>
                   <a:srgbClr val="14283F"/>
                 </a:solidFill>
@@ -9747,7 +10493,23 @@
               </a:defRPr>
             </a:pPr>
             <a:r>
-              <a:t>Complementary signal coverage</a:t>
+              <a:t>Complementary</a:t>
+            </a:r>
+          </a:p>
+          <a:p>
+            <a:pPr>
+              <a:spcAft>
+                <a:spcPts val="600"/>
+              </a:spcAft>
+              <a:defRPr sz="2600" b="1">
+                <a:solidFill>
+                  <a:srgbClr val="14283F"/>
+                </a:solidFill>
+                <a:latin typeface="Aptos"/>
+              </a:defRPr>
+            </a:pPr>
+            <a:r>
+              <a:t>signal coverage</a:t>
             </a:r>
           </a:p>
         </p:txBody>
@@ -9792,6 +10554,7 @@
           <a:lstStyle/>
           <a:p>
             <a:pPr algn="ctr"/>
+            <a:endParaRPr/>
           </a:p>
         </p:txBody>
       </p:sp>
@@ -9812,7 +10575,7 @@
           <a:noFill/>
         </p:spPr>
         <p:txBody>
-          <a:bodyPr wrap="square" lIns="9144" rIns="9144" tIns="0" bIns="0">
+          <a:bodyPr wrap="square" lIns="9144" tIns="0" rIns="9144" bIns="0">
             <a:spAutoFit/>
           </a:bodyPr>
           <a:lstStyle/>
@@ -9851,7 +10614,7 @@
           <a:noFill/>
         </p:spPr>
         <p:txBody>
-          <a:bodyPr wrap="square" lIns="9144" rIns="9144" tIns="0" bIns="0">
+          <a:bodyPr wrap="square" lIns="9144" tIns="0" rIns="9144" bIns="0">
             <a:spAutoFit/>
           </a:bodyPr>
           <a:lstStyle/>
@@ -9860,7 +10623,7 @@
               <a:spcAft>
                 <a:spcPts val="600"/>
               </a:spcAft>
-              <a:defRPr sz="2500" b="1">
+              <a:defRPr sz="2600" b="1">
                 <a:solidFill>
                   <a:srgbClr val="14283F"/>
                 </a:solidFill>
@@ -9868,7 +10631,23 @@
               </a:defRPr>
             </a:pPr>
             <a:r>
-              <a:t>Answer quality cost</a:t>
+              <a:t>Answer quality</a:t>
+            </a:r>
+          </a:p>
+          <a:p>
+            <a:pPr>
+              <a:spcAft>
+                <a:spcPts val="600"/>
+              </a:spcAft>
+              <a:defRPr sz="2600" b="1">
+                <a:solidFill>
+                  <a:srgbClr val="14283F"/>
+                </a:solidFill>
+                <a:latin typeface="Aptos"/>
+              </a:defRPr>
+            </a:pPr>
+            <a:r>
+              <a:t>and cost</a:t>
             </a:r>
           </a:p>
         </p:txBody>
@@ -9913,6 +10692,7 @@
           <a:lstStyle/>
           <a:p>
             <a:pPr algn="ctr"/>
+            <a:endParaRPr/>
           </a:p>
         </p:txBody>
       </p:sp>
@@ -9933,7 +10713,7 @@
           <a:noFill/>
         </p:spPr>
         <p:txBody>
-          <a:bodyPr wrap="square" lIns="9144" rIns="9144" tIns="0" bIns="0">
+          <a:bodyPr wrap="square" lIns="9144" tIns="0" rIns="9144" bIns="0">
             <a:spAutoFit/>
           </a:bodyPr>
           <a:lstStyle/>
@@ -9951,6 +10731,45 @@
             </a:pPr>
             <a:r>
               <a:t>H1: complementary signals improve attack coverage</a:t>
+            </a:r>
+          </a:p>
+        </p:txBody>
+      </p:sp>
+      <p:sp>
+        <p:nvSpPr>
+          <p:cNvPr id="15" name="TextBox 14"/>
+          <p:cNvSpPr txBox="1"/>
+          <p:nvPr/>
+        </p:nvSpPr>
+        <p:spPr>
+          <a:xfrm>
+            <a:off x="777240" y="5742432"/>
+            <a:ext cx="10652760" cy="548640"/>
+          </a:xfrm>
+          <a:prstGeom prst="rect">
+            <a:avLst/>
+          </a:prstGeom>
+          <a:noFill/>
+        </p:spPr>
+        <p:txBody>
+          <a:bodyPr wrap="square" lIns="0" tIns="0" rIns="0" bIns="0">
+            <a:spAutoFit/>
+          </a:bodyPr>
+          <a:lstStyle/>
+          <a:p>
+            <a:pPr>
+              <a:spcAft>
+                <a:spcPts val="600"/>
+              </a:spcAft>
+              <a:defRPr sz="2400" b="0">
+                <a:solidFill>
+                  <a:srgbClr val="647488"/>
+                </a:solidFill>
+                <a:latin typeface="Aptos"/>
+              </a:defRPr>
+            </a:pPr>
+            <a:r>
+              <a:t>H1 tests coverage; deployment also requires useful answers.</a:t>
             </a:r>
           </a:p>
         </p:txBody>
@@ -9964,7 +10783,7 @@
 </file>
 
 <file path=ppt/slides/slide5.xml><?xml version="1.0" encoding="utf-8"?>
-<p:sld xmlns:a="http://schemas.openxmlformats.org/drawingml/2006/main" xmlns:p="http://schemas.openxmlformats.org/presentationml/2006/main" xmlns:r="http://schemas.openxmlformats.org/officeDocument/2006/relationships">
+<p:sld xmlns:a="http://schemas.openxmlformats.org/drawingml/2006/main" xmlns:r="http://schemas.openxmlformats.org/officeDocument/2006/relationships" xmlns:p="http://schemas.openxmlformats.org/presentationml/2006/main">
   <p:cSld>
     <p:bg>
       <p:bgPr>
@@ -9980,7 +10799,14 @@
         <p:cNvGrpSpPr/>
         <p:nvPr/>
       </p:nvGrpSpPr>
-      <p:grpSpPr/>
+      <p:grpSpPr>
+        <a:xfrm>
+          <a:off x="0" y="0"/>
+          <a:ext cx="0" cy="0"/>
+          <a:chOff x="0" y="0"/>
+          <a:chExt cx="0" cy="0"/>
+        </a:xfrm>
+      </p:grpSpPr>
       <p:sp>
         <p:nvSpPr>
           <p:cNvPr id="2" name="TextBox 1"/>
@@ -9998,7 +10824,7 @@
           <a:noFill/>
         </p:spPr>
         <p:txBody>
-          <a:bodyPr wrap="square" lIns="9144" rIns="9144" tIns="0" bIns="0">
+          <a:bodyPr wrap="square" lIns="9144" tIns="0" rIns="9144" bIns="0">
             <a:spAutoFit/>
           </a:bodyPr>
           <a:lstStyle/>
@@ -10037,7 +10863,7 @@
           <a:noFill/>
         </p:spPr>
         <p:txBody>
-          <a:bodyPr wrap="square" lIns="9144" rIns="9144" tIns="0" bIns="0">
+          <a:bodyPr wrap="square" lIns="9144" tIns="0" rIns="9144" bIns="0">
             <a:spAutoFit/>
           </a:bodyPr>
           <a:lstStyle/>
@@ -10099,6 +10925,7 @@
           <a:lstStyle/>
           <a:p>
             <a:pPr algn="ctr"/>
+            <a:endParaRPr/>
           </a:p>
         </p:txBody>
       </p:sp>
@@ -10119,7 +10946,7 @@
           <a:noFill/>
         </p:spPr>
         <p:txBody>
-          <a:bodyPr wrap="square" lIns="9144" rIns="9144" tIns="0" bIns="0">
+          <a:bodyPr wrap="square" lIns="9144" tIns="0" rIns="9144" bIns="0">
             <a:spAutoFit/>
           </a:bodyPr>
           <a:lstStyle/>
@@ -10181,6 +11008,7 @@
           <a:lstStyle/>
           <a:p>
             <a:pPr algn="ctr"/>
+            <a:endParaRPr/>
           </a:p>
         </p:txBody>
       </p:sp>
@@ -10224,6 +11052,7 @@
           <a:lstStyle/>
           <a:p>
             <a:pPr algn="ctr"/>
+            <a:endParaRPr/>
           </a:p>
         </p:txBody>
       </p:sp>
@@ -10244,7 +11073,7 @@
           <a:noFill/>
         </p:spPr>
         <p:txBody>
-          <a:bodyPr wrap="square" lIns="9144" rIns="9144" tIns="0" bIns="0">
+          <a:bodyPr wrap="square" lIns="9144" tIns="0" rIns="9144" bIns="0">
             <a:spAutoFit/>
           </a:bodyPr>
           <a:lstStyle/>
@@ -10306,6 +11135,7 @@
           <a:lstStyle/>
           <a:p>
             <a:pPr algn="ctr"/>
+            <a:endParaRPr/>
           </a:p>
         </p:txBody>
       </p:sp>
@@ -10349,6 +11179,7 @@
           <a:lstStyle/>
           <a:p>
             <a:pPr algn="ctr"/>
+            <a:endParaRPr/>
           </a:p>
         </p:txBody>
       </p:sp>
@@ -10369,7 +11200,7 @@
           <a:noFill/>
         </p:spPr>
         <p:txBody>
-          <a:bodyPr wrap="square" lIns="9144" rIns="9144" tIns="0" bIns="0">
+          <a:bodyPr wrap="square" lIns="9144" tIns="0" rIns="9144" bIns="0">
             <a:spAutoFit/>
           </a:bodyPr>
           <a:lstStyle/>
@@ -10431,6 +11262,7 @@
           <a:lstStyle/>
           <a:p>
             <a:pPr algn="ctr"/>
+            <a:endParaRPr/>
           </a:p>
         </p:txBody>
       </p:sp>
@@ -10474,6 +11306,7 @@
           <a:lstStyle/>
           <a:p>
             <a:pPr algn="ctr"/>
+            <a:endParaRPr/>
           </a:p>
         </p:txBody>
       </p:sp>
@@ -10494,7 +11327,7 @@
           <a:noFill/>
         </p:spPr>
         <p:txBody>
-          <a:bodyPr wrap="square" lIns="9144" rIns="9144" tIns="0" bIns="0">
+          <a:bodyPr wrap="square" lIns="9144" tIns="0" rIns="9144" bIns="0">
             <a:spAutoFit/>
           </a:bodyPr>
           <a:lstStyle/>
@@ -10556,6 +11389,7 @@
           <a:lstStyle/>
           <a:p>
             <a:pPr algn="ctr"/>
+            <a:endParaRPr/>
           </a:p>
         </p:txBody>
       </p:sp>
@@ -10599,6 +11433,7 @@
           <a:lstStyle/>
           <a:p>
             <a:pPr algn="ctr"/>
+            <a:endParaRPr/>
           </a:p>
         </p:txBody>
       </p:sp>
@@ -10619,7 +11454,7 @@
           <a:noFill/>
         </p:spPr>
         <p:txBody>
-          <a:bodyPr wrap="square" lIns="9144" rIns="9144" tIns="0" bIns="0">
+          <a:bodyPr wrap="square" lIns="9144" tIns="0" rIns="9144" bIns="0">
             <a:spAutoFit/>
           </a:bodyPr>
           <a:lstStyle/>
@@ -10658,7 +11493,7 @@
           <a:noFill/>
         </p:spPr>
         <p:txBody>
-          <a:bodyPr wrap="square" lIns="9144" rIns="9144" tIns="0" bIns="0">
+          <a:bodyPr wrap="square" lIns="9144" tIns="0" rIns="9144" bIns="0">
             <a:spAutoFit/>
           </a:bodyPr>
           <a:lstStyle/>
@@ -10720,6 +11555,7 @@
           <a:lstStyle/>
           <a:p>
             <a:pPr algn="ctr"/>
+            <a:endParaRPr/>
           </a:p>
         </p:txBody>
       </p:sp>
@@ -10763,6 +11599,7 @@
           <a:lstStyle/>
           <a:p>
             <a:pPr algn="ctr"/>
+            <a:endParaRPr/>
           </a:p>
         </p:txBody>
       </p:sp>
@@ -10783,7 +11620,7 @@
           <a:noFill/>
         </p:spPr>
         <p:txBody>
-          <a:bodyPr wrap="square" lIns="9144" rIns="9144" tIns="0" bIns="0">
+          <a:bodyPr wrap="square" lIns="9144" tIns="0" rIns="9144" bIns="0">
             <a:spAutoFit/>
           </a:bodyPr>
           <a:lstStyle/>
@@ -10801,6 +11638,61 @@
             </a:pPr>
             <a:r>
               <a:t>Trust boundary</a:t>
+            </a:r>
+          </a:p>
+        </p:txBody>
+      </p:sp>
+      <p:sp>
+        <p:nvSpPr>
+          <p:cNvPr id="22" name="TextBox 21"/>
+          <p:cNvSpPr txBox="1"/>
+          <p:nvPr/>
+        </p:nvSpPr>
+        <p:spPr>
+          <a:xfrm>
+            <a:off x="594360" y="5166360"/>
+            <a:ext cx="10972800" cy="914400"/>
+          </a:xfrm>
+          <a:prstGeom prst="rect">
+            <a:avLst/>
+          </a:prstGeom>
+          <a:noFill/>
+        </p:spPr>
+        <p:txBody>
+          <a:bodyPr wrap="square" lIns="0" tIns="0" rIns="0" bIns="0">
+            <a:spAutoFit/>
+          </a:bodyPr>
+          <a:lstStyle/>
+          <a:p>
+            <a:pPr>
+              <a:spcAft>
+                <a:spcPts val="600"/>
+              </a:spcAft>
+              <a:defRPr sz="2600" b="0">
+                <a:solidFill>
+                  <a:srgbClr val="14283F"/>
+                </a:solidFill>
+                <a:latin typeface="Aptos"/>
+              </a:defRPr>
+            </a:pPr>
+            <a:r>
+              <a:t>600-character chunks; top-2 retrieval</a:t>
+            </a:r>
+          </a:p>
+          <a:p>
+            <a:pPr>
+              <a:spcAft>
+                <a:spcPts val="600"/>
+              </a:spcAft>
+              <a:defRPr sz="2600" b="0">
+                <a:solidFill>
+                  <a:srgbClr val="14283F"/>
+                </a:solidFill>
+                <a:latin typeface="Aptos"/>
+              </a:defRPr>
+            </a:pPr>
+            <a:r>
+              <a:t>Empty retained context returns UNKNOWN.</a:t>
             </a:r>
           </a:p>
         </p:txBody>
@@ -10814,7 +11706,7 @@
 </file>
 
 <file path=ppt/slides/slide6.xml><?xml version="1.0" encoding="utf-8"?>
-<p:sld xmlns:a="http://schemas.openxmlformats.org/drawingml/2006/main" xmlns:p="http://schemas.openxmlformats.org/presentationml/2006/main" xmlns:r="http://schemas.openxmlformats.org/officeDocument/2006/relationships">
+<p:sld xmlns:a="http://schemas.openxmlformats.org/drawingml/2006/main" xmlns:r="http://schemas.openxmlformats.org/officeDocument/2006/relationships" xmlns:p="http://schemas.openxmlformats.org/presentationml/2006/main">
   <p:cSld>
     <p:bg>
       <p:bgPr>
@@ -10830,7 +11722,14 @@
         <p:cNvGrpSpPr/>
         <p:nvPr/>
       </p:nvGrpSpPr>
-      <p:grpSpPr/>
+      <p:grpSpPr>
+        <a:xfrm>
+          <a:off x="0" y="0"/>
+          <a:ext cx="0" cy="0"/>
+          <a:chOff x="0" y="0"/>
+          <a:chExt cx="0" cy="0"/>
+        </a:xfrm>
+      </p:grpSpPr>
       <p:sp>
         <p:nvSpPr>
           <p:cNvPr id="2" name="TextBox 1"/>
@@ -10848,7 +11747,7 @@
           <a:noFill/>
         </p:spPr>
         <p:txBody>
-          <a:bodyPr wrap="square" lIns="9144" rIns="9144" tIns="0" bIns="0">
+          <a:bodyPr wrap="square" lIns="9144" tIns="0" rIns="9144" bIns="0">
             <a:spAutoFit/>
           </a:bodyPr>
           <a:lstStyle/>
@@ -10887,7 +11786,7 @@
           <a:noFill/>
         </p:spPr>
         <p:txBody>
-          <a:bodyPr wrap="square" lIns="9144" rIns="9144" tIns="0" bIns="0">
+          <a:bodyPr wrap="square" lIns="9144" tIns="0" rIns="9144" bIns="0">
             <a:spAutoFit/>
           </a:bodyPr>
           <a:lstStyle/>
@@ -10926,7 +11825,7 @@
           <a:noFill/>
         </p:spPr>
         <p:txBody>
-          <a:bodyPr wrap="square" lIns="9144" rIns="9144" tIns="0" bIns="0">
+          <a:bodyPr wrap="square" lIns="9144" tIns="0" rIns="9144" bIns="0">
             <a:spAutoFit/>
           </a:bodyPr>
           <a:lstStyle/>
@@ -10988,6 +11887,7 @@
           <a:lstStyle/>
           <a:p>
             <a:pPr algn="ctr"/>
+            <a:endParaRPr/>
           </a:p>
         </p:txBody>
       </p:sp>
@@ -11031,6 +11931,7 @@
           <a:lstStyle/>
           <a:p>
             <a:pPr algn="ctr"/>
+            <a:endParaRPr/>
           </a:p>
         </p:txBody>
       </p:sp>
@@ -11074,6 +11975,7 @@
           <a:lstStyle/>
           <a:p>
             <a:pPr algn="ctr"/>
+            <a:endParaRPr/>
           </a:p>
         </p:txBody>
       </p:sp>
@@ -11094,7 +11996,7 @@
           <a:noFill/>
         </p:spPr>
         <p:txBody>
-          <a:bodyPr wrap="square" lIns="9144" rIns="9144" tIns="0" bIns="0">
+          <a:bodyPr wrap="square" lIns="9144" tIns="0" rIns="9144" bIns="0">
             <a:spAutoFit/>
           </a:bodyPr>
           <a:lstStyle/>
@@ -11133,7 +12035,7 @@
           <a:noFill/>
         </p:spPr>
         <p:txBody>
-          <a:bodyPr wrap="square" lIns="9144" rIns="9144" tIns="0" bIns="0">
+          <a:bodyPr wrap="square" lIns="9144" tIns="0" rIns="9144" bIns="0">
             <a:spAutoFit/>
           </a:bodyPr>
           <a:lstStyle/>
@@ -11172,7 +12074,7 @@
           <a:noFill/>
         </p:spPr>
         <p:txBody>
-          <a:bodyPr wrap="square" lIns="9144" rIns="9144" tIns="0" bIns="0">
+          <a:bodyPr wrap="square" lIns="9144" tIns="0" rIns="9144" bIns="0">
             <a:spAutoFit/>
           </a:bodyPr>
           <a:lstStyle/>
@@ -11236,6 +12138,7 @@
           <a:lstStyle/>
           <a:p>
             <a:pPr algn="ctr"/>
+            <a:endParaRPr/>
           </a:p>
         </p:txBody>
       </p:sp>
@@ -11281,6 +12184,7 @@
           <a:lstStyle/>
           <a:p>
             <a:pPr algn="ctr"/>
+            <a:endParaRPr/>
           </a:p>
         </p:txBody>
       </p:sp>
@@ -11301,7 +12205,7 @@
           <a:noFill/>
         </p:spPr>
         <p:txBody>
-          <a:bodyPr wrap="square" lIns="9144" rIns="9144" tIns="0" bIns="0">
+          <a:bodyPr wrap="square" lIns="9144" tIns="0" rIns="9144" bIns="0">
             <a:spAutoFit/>
           </a:bodyPr>
           <a:lstStyle/>
@@ -11340,7 +12244,7 @@
           <a:noFill/>
         </p:spPr>
         <p:txBody>
-          <a:bodyPr wrap="square" lIns="9144" rIns="9144" tIns="0" bIns="0">
+          <a:bodyPr wrap="square" lIns="9144" tIns="0" rIns="9144" bIns="0">
             <a:spAutoFit/>
           </a:bodyPr>
           <a:lstStyle/>
@@ -11379,7 +12283,7 @@
           <a:noFill/>
         </p:spPr>
         <p:txBody>
-          <a:bodyPr wrap="square" lIns="9144" rIns="9144" tIns="0" bIns="0">
+          <a:bodyPr wrap="square" lIns="9144" tIns="0" rIns="9144" bIns="0">
             <a:spAutoFit/>
           </a:bodyPr>
           <a:lstStyle/>
@@ -11418,7 +12322,7 @@
           <a:noFill/>
         </p:spPr>
         <p:txBody>
-          <a:bodyPr wrap="square" lIns="9144" rIns="9144" tIns="0" bIns="0">
+          <a:bodyPr wrap="square" lIns="9144" tIns="0" rIns="9144" bIns="0">
             <a:spAutoFit/>
           </a:bodyPr>
           <a:lstStyle/>
@@ -11452,6 +12356,52 @@
             </a:pPr>
             <a:r>
               <a:t>74</a:t>
+            </a:r>
+          </a:p>
+        </p:txBody>
+      </p:sp>
+      <p:sp>
+        <p:nvSpPr>
+          <p:cNvPr id="17" name="TextBox 16"/>
+          <p:cNvSpPr txBox="1"/>
+          <p:nvPr/>
+        </p:nvSpPr>
+        <p:spPr>
+          <a:xfrm>
+            <a:off x="594360" y="5852160"/>
+            <a:ext cx="10972800" cy="430887"/>
+          </a:xfrm>
+          <a:prstGeom prst="rect">
+            <a:avLst/>
+          </a:prstGeom>
+          <a:noFill/>
+        </p:spPr>
+        <p:txBody>
+          <a:bodyPr wrap="square" lIns="0" tIns="0" rIns="0" bIns="0">
+            <a:spAutoFit/>
+          </a:bodyPr>
+          <a:lstStyle/>
+          <a:p>
+            <a:pPr>
+              <a:spcAft>
+                <a:spcPts val="600"/>
+              </a:spcAft>
+              <a:defRPr sz="2400" b="0">
+                <a:solidFill>
+                  <a:srgbClr val="647488"/>
+                </a:solidFill>
+                <a:latin typeface="Aptos"/>
+              </a:defRPr>
+            </a:pPr>
+            <a:r>
+              <a:t>At this threshold, either signal can </a:t>
+            </a:r>
+            <a:r>
+              <a:rPr sz="2800"/>
+              <a:t>reject</a:t>
+            </a:r>
+            <a:r>
+              <a:t> a passage.</a:t>
             </a:r>
           </a:p>
         </p:txBody>
@@ -11465,7 +12415,7 @@
 </file>
 
 <file path=ppt/slides/slide7.xml><?xml version="1.0" encoding="utf-8"?>
-<p:sld xmlns:a="http://schemas.openxmlformats.org/drawingml/2006/main" xmlns:p="http://schemas.openxmlformats.org/presentationml/2006/main" xmlns:r="http://schemas.openxmlformats.org/officeDocument/2006/relationships">
+<p:sld xmlns:a="http://schemas.openxmlformats.org/drawingml/2006/main" xmlns:r="http://schemas.openxmlformats.org/officeDocument/2006/relationships" xmlns:p="http://schemas.openxmlformats.org/presentationml/2006/main">
   <p:cSld>
     <p:bg>
       <p:bgPr>
@@ -11481,7 +12431,14 @@
         <p:cNvGrpSpPr/>
         <p:nvPr/>
       </p:nvGrpSpPr>
-      <p:grpSpPr/>
+      <p:grpSpPr>
+        <a:xfrm>
+          <a:off x="0" y="0"/>
+          <a:ext cx="0" cy="0"/>
+          <a:chOff x="0" y="0"/>
+          <a:chExt cx="0" cy="0"/>
+        </a:xfrm>
+      </p:grpSpPr>
       <p:sp>
         <p:nvSpPr>
           <p:cNvPr id="2" name="TextBox 1"/>
@@ -11499,7 +12456,7 @@
           <a:noFill/>
         </p:spPr>
         <p:txBody>
-          <a:bodyPr wrap="square" lIns="9144" rIns="9144" tIns="0" bIns="0">
+          <a:bodyPr wrap="square" lIns="9144" tIns="0" rIns="9144" bIns="0">
             <a:spAutoFit/>
           </a:bodyPr>
           <a:lstStyle/>
@@ -11538,7 +12495,7 @@
           <a:noFill/>
         </p:spPr>
         <p:txBody>
-          <a:bodyPr wrap="square" lIns="9144" rIns="9144" tIns="0" bIns="0">
+          <a:bodyPr wrap="square" lIns="9144" tIns="0" rIns="9144" bIns="0">
             <a:spAutoFit/>
           </a:bodyPr>
           <a:lstStyle/>
@@ -11600,6 +12557,7 @@
           <a:lstStyle/>
           <a:p>
             <a:pPr algn="ctr"/>
+            <a:endParaRPr/>
           </a:p>
         </p:txBody>
       </p:sp>
@@ -11620,7 +12578,7 @@
           <a:noFill/>
         </p:spPr>
         <p:txBody>
-          <a:bodyPr wrap="square" lIns="9144" rIns="9144" tIns="0" bIns="0">
+          <a:bodyPr wrap="square" lIns="9144" tIns="0" rIns="9144" bIns="0">
             <a:spAutoFit/>
           </a:bodyPr>
           <a:lstStyle/>
@@ -11659,7 +12617,7 @@
           <a:noFill/>
         </p:spPr>
         <p:txBody>
-          <a:bodyPr wrap="square" lIns="9144" rIns="9144" tIns="0" bIns="0">
+          <a:bodyPr wrap="square" lIns="9144" tIns="0" rIns="9144" bIns="0">
             <a:spAutoFit/>
           </a:bodyPr>
           <a:lstStyle/>
@@ -11721,6 +12679,7 @@
           <a:lstStyle/>
           <a:p>
             <a:pPr algn="ctr"/>
+            <a:endParaRPr/>
           </a:p>
         </p:txBody>
       </p:sp>
@@ -11741,7 +12700,7 @@
           <a:noFill/>
         </p:spPr>
         <p:txBody>
-          <a:bodyPr wrap="square" lIns="9144" rIns="9144" tIns="0" bIns="0">
+          <a:bodyPr wrap="square" lIns="9144" tIns="0" rIns="9144" bIns="0">
             <a:spAutoFit/>
           </a:bodyPr>
           <a:lstStyle/>
@@ -11780,7 +12739,7 @@
           <a:noFill/>
         </p:spPr>
         <p:txBody>
-          <a:bodyPr wrap="square" lIns="9144" rIns="9144" tIns="0" bIns="0">
+          <a:bodyPr wrap="square" lIns="9144" tIns="0" rIns="9144" bIns="0">
             <a:spAutoFit/>
           </a:bodyPr>
           <a:lstStyle/>
@@ -11842,6 +12801,7 @@
           <a:lstStyle/>
           <a:p>
             <a:pPr algn="ctr"/>
+            <a:endParaRPr/>
           </a:p>
         </p:txBody>
       </p:sp>
@@ -11862,7 +12822,7 @@
           <a:noFill/>
         </p:spPr>
         <p:txBody>
-          <a:bodyPr wrap="square" lIns="9144" rIns="9144" tIns="0" bIns="0">
+          <a:bodyPr wrap="square" lIns="9144" tIns="0" rIns="9144" bIns="0">
             <a:spAutoFit/>
           </a:bodyPr>
           <a:lstStyle/>
@@ -11901,7 +12861,7 @@
           <a:noFill/>
         </p:spPr>
         <p:txBody>
-          <a:bodyPr wrap="square" lIns="9144" rIns="9144" tIns="0" bIns="0">
+          <a:bodyPr wrap="square" lIns="9144" tIns="0" rIns="9144" bIns="0">
             <a:spAutoFit/>
           </a:bodyPr>
           <a:lstStyle/>
@@ -11919,6 +12879,45 @@
             </a:pPr>
             <a:r>
               <a:t>Benign instructions</a:t>
+            </a:r>
+          </a:p>
+        </p:txBody>
+      </p:sp>
+      <p:sp>
+        <p:nvSpPr>
+          <p:cNvPr id="13" name="TextBox 12"/>
+          <p:cNvSpPr txBox="1"/>
+          <p:nvPr/>
+        </p:nvSpPr>
+        <p:spPr>
+          <a:xfrm>
+            <a:off x="594360" y="5806440"/>
+            <a:ext cx="10972800" cy="457200"/>
+          </a:xfrm>
+          <a:prstGeom prst="rect">
+            <a:avLst/>
+          </a:prstGeom>
+          <a:noFill/>
+        </p:spPr>
+        <p:txBody>
+          <a:bodyPr wrap="square" lIns="0" tIns="0" rIns="0" bIns="0">
+            <a:spAutoFit/>
+          </a:bodyPr>
+          <a:lstStyle/>
+          <a:p>
+            <a:pPr>
+              <a:spcAft>
+                <a:spcPts val="600"/>
+              </a:spcAft>
+              <a:defRPr sz="2400" b="0">
+                <a:solidFill>
+                  <a:srgbClr val="647488"/>
+                </a:solidFill>
+                <a:latin typeface="Aptos"/>
+              </a:defRPr>
+            </a:pPr>
+            <a:r>
+              <a:t>Fixed attacks; uncertainty clustered by source email.</a:t>
             </a:r>
           </a:p>
         </p:txBody>
@@ -11932,7 +12931,7 @@
 </file>
 
 <file path=ppt/slides/slide8.xml><?xml version="1.0" encoding="utf-8"?>
-<p:sld xmlns:a="http://schemas.openxmlformats.org/drawingml/2006/main" xmlns:p="http://schemas.openxmlformats.org/presentationml/2006/main" xmlns:r="http://schemas.openxmlformats.org/officeDocument/2006/relationships">
+<p:sld xmlns:a="http://schemas.openxmlformats.org/drawingml/2006/main" xmlns:r="http://schemas.openxmlformats.org/officeDocument/2006/relationships" xmlns:p="http://schemas.openxmlformats.org/presentationml/2006/main">
   <p:cSld>
     <p:bg>
       <p:bgPr>
@@ -11948,7 +12947,14 @@
         <p:cNvGrpSpPr/>
         <p:nvPr/>
       </p:nvGrpSpPr>
-      <p:grpSpPr/>
+      <p:grpSpPr>
+        <a:xfrm>
+          <a:off x="0" y="0"/>
+          <a:ext cx="0" cy="0"/>
+          <a:chOff x="0" y="0"/>
+          <a:chExt cx="0" cy="0"/>
+        </a:xfrm>
+      </p:grpSpPr>
       <p:sp>
         <p:nvSpPr>
           <p:cNvPr id="2" name="TextBox 1"/>
@@ -11966,7 +12972,7 @@
           <a:noFill/>
         </p:spPr>
         <p:txBody>
-          <a:bodyPr wrap="square" lIns="9144" rIns="9144" tIns="0" bIns="0">
+          <a:bodyPr wrap="square" lIns="9144" tIns="0" rIns="9144" bIns="0">
             <a:spAutoFit/>
           </a:bodyPr>
           <a:lstStyle/>
@@ -12005,7 +13011,7 @@
           <a:noFill/>
         </p:spPr>
         <p:txBody>
-          <a:bodyPr wrap="square" lIns="9144" rIns="9144" tIns="0" bIns="0">
+          <a:bodyPr wrap="square" lIns="9144" tIns="0" rIns="9144" bIns="0">
             <a:spAutoFit/>
           </a:bodyPr>
           <a:lstStyle/>
@@ -12041,7 +13047,7 @@
         </p:xfrm>
         <a:graphic>
           <a:graphicData uri="http://schemas.openxmlformats.org/drawingml/2006/chart">
-            <c:chart xmlns:c="http://schemas.openxmlformats.org/drawingml/2006/chart" r:id="rId2"/>
+            <c:chart xmlns:c="http://schemas.openxmlformats.org/drawingml/2006/chart" xmlns:r="http://schemas.openxmlformats.org/officeDocument/2006/relationships" r:id="rId3"/>
           </a:graphicData>
         </a:graphic>
       </p:graphicFrame>
@@ -12062,7 +13068,7 @@
           <a:noFill/>
         </p:spPr>
         <p:txBody>
-          <a:bodyPr wrap="square" lIns="9144" rIns="9144" tIns="0" bIns="0">
+          <a:bodyPr wrap="square" lIns="9144" tIns="0" rIns="9144" bIns="0">
             <a:spAutoFit/>
           </a:bodyPr>
           <a:lstStyle/>
@@ -12101,7 +13107,7 @@
           <a:noFill/>
         </p:spPr>
         <p:txBody>
-          <a:bodyPr wrap="square" lIns="9144" rIns="9144" tIns="0" bIns="0">
+          <a:bodyPr wrap="square" lIns="9144" tIns="0" rIns="9144" bIns="0">
             <a:spAutoFit/>
           </a:bodyPr>
           <a:lstStyle/>
@@ -12135,6 +13141,45 @@
             </a:pPr>
             <a:r>
               <a:t>false rejections</a:t>
+            </a:r>
+          </a:p>
+        </p:txBody>
+      </p:sp>
+      <p:sp>
+        <p:nvSpPr>
+          <p:cNvPr id="7" name="TextBox 6"/>
+          <p:cNvSpPr txBox="1"/>
+          <p:nvPr/>
+        </p:nvSpPr>
+        <p:spPr>
+          <a:xfrm>
+            <a:off x="594360" y="5943600"/>
+            <a:ext cx="10972800" cy="457200"/>
+          </a:xfrm>
+          <a:prstGeom prst="rect">
+            <a:avLst/>
+          </a:prstGeom>
+          <a:noFill/>
+        </p:spPr>
+        <p:txBody>
+          <a:bodyPr wrap="square" lIns="0" tIns="0" rIns="0" bIns="0">
+            <a:spAutoFit/>
+          </a:bodyPr>
+          <a:lstStyle/>
+          <a:p>
+            <a:pPr>
+              <a:spcAft>
+                <a:spcPts val="600"/>
+              </a:spcAft>
+              <a:defRPr sz="2400" b="0">
+                <a:solidFill>
+                  <a:srgbClr val="647488"/>
+                </a:solidFill>
+                <a:latin typeface="Aptos"/>
+              </a:defRPr>
+            </a:pPr>
+            <a:r>
+              <a:t>Clean email retention alone does not establish benign transfer.</a:t>
             </a:r>
           </a:p>
         </p:txBody>
@@ -12148,7 +13193,7 @@
 </file>
 
 <file path=ppt/slides/slide9.xml><?xml version="1.0" encoding="utf-8"?>
-<p:sld xmlns:a="http://schemas.openxmlformats.org/drawingml/2006/main" xmlns:p="http://schemas.openxmlformats.org/presentationml/2006/main" xmlns:r="http://schemas.openxmlformats.org/officeDocument/2006/relationships">
+<p:sld xmlns:a="http://schemas.openxmlformats.org/drawingml/2006/main" xmlns:r="http://schemas.openxmlformats.org/officeDocument/2006/relationships" xmlns:p="http://schemas.openxmlformats.org/presentationml/2006/main">
   <p:cSld>
     <p:bg>
       <p:bgPr>
@@ -12164,7 +13209,14 @@
         <p:cNvGrpSpPr/>
         <p:nvPr/>
       </p:nvGrpSpPr>
-      <p:grpSpPr/>
+      <p:grpSpPr>
+        <a:xfrm>
+          <a:off x="0" y="0"/>
+          <a:ext cx="0" cy="0"/>
+          <a:chOff x="0" y="0"/>
+          <a:chExt cx="0" cy="0"/>
+        </a:xfrm>
+      </p:grpSpPr>
       <p:sp>
         <p:nvSpPr>
           <p:cNvPr id="2" name="TextBox 1"/>
@@ -12182,7 +13234,7 @@
           <a:noFill/>
         </p:spPr>
         <p:txBody>
-          <a:bodyPr wrap="square" lIns="9144" rIns="9144" tIns="0" bIns="0">
+          <a:bodyPr wrap="square" lIns="9144" tIns="0" rIns="9144" bIns="0">
             <a:spAutoFit/>
           </a:bodyPr>
           <a:lstStyle/>
@@ -12221,7 +13273,7 @@
           <a:noFill/>
         </p:spPr>
         <p:txBody>
-          <a:bodyPr wrap="square" lIns="9144" rIns="9144" tIns="0" bIns="0">
+          <a:bodyPr wrap="square" lIns="9144" tIns="0" rIns="9144" bIns="0">
             <a:spAutoFit/>
           </a:bodyPr>
           <a:lstStyle/>
@@ -12260,7 +13312,7 @@
           <a:noFill/>
         </p:spPr>
         <p:txBody>
-          <a:bodyPr wrap="square" lIns="9144" rIns="9144" tIns="0" bIns="0">
+          <a:bodyPr wrap="square" lIns="9144" tIns="0" rIns="9144" bIns="0">
             <a:spAutoFit/>
           </a:bodyPr>
           <a:lstStyle/>
@@ -12299,7 +13351,7 @@
           <a:noFill/>
         </p:spPr>
         <p:txBody>
-          <a:bodyPr wrap="square" lIns="9144" rIns="9144" tIns="0" bIns="0">
+          <a:bodyPr wrap="square" lIns="9144" tIns="0" rIns="9144" bIns="0">
             <a:spAutoFit/>
           </a:bodyPr>
           <a:lstStyle/>
@@ -12338,7 +13390,7 @@
           <a:noFill/>
         </p:spPr>
         <p:txBody>
-          <a:bodyPr wrap="square" lIns="9144" rIns="9144" tIns="0" bIns="0">
+          <a:bodyPr wrap="square" lIns="9144" tIns="0" rIns="9144" bIns="0">
             <a:spAutoFit/>
           </a:bodyPr>
           <a:lstStyle/>
@@ -12374,7 +13426,7 @@
         </p:xfrm>
         <a:graphic>
           <a:graphicData uri="http://schemas.openxmlformats.org/drawingml/2006/chart">
-            <c:chart xmlns:c="http://schemas.openxmlformats.org/drawingml/2006/chart" r:id="rId2"/>
+            <c:chart xmlns:c="http://schemas.openxmlformats.org/drawingml/2006/chart" xmlns:r="http://schemas.openxmlformats.org/officeDocument/2006/relationships" r:id="rId3"/>
           </a:graphicData>
         </a:graphic>
       </p:graphicFrame>
@@ -12392,7 +13444,7 @@
         </p:xfrm>
         <a:graphic>
           <a:graphicData uri="http://schemas.openxmlformats.org/drawingml/2006/chart">
-            <c:chart xmlns:c="http://schemas.openxmlformats.org/drawingml/2006/chart" r:id="rId3"/>
+            <c:chart xmlns:c="http://schemas.openxmlformats.org/drawingml/2006/chart" xmlns:r="http://schemas.openxmlformats.org/officeDocument/2006/relationships" r:id="rId4"/>
           </a:graphicData>
         </a:graphic>
       </p:graphicFrame>
@@ -12404,7 +13456,7 @@
         </p:nvSpPr>
         <p:spPr>
           <a:xfrm>
-            <a:off x="640080" y="5440680"/>
+            <a:off x="640080" y="5285232"/>
             <a:ext cx="9144000" cy="548640"/>
           </a:xfrm>
           <a:prstGeom prst="rect">
@@ -12413,7 +13465,7 @@
           <a:noFill/>
         </p:spPr>
         <p:txBody>
-          <a:bodyPr wrap="square" lIns="9144" rIns="9144" tIns="0" bIns="0">
+          <a:bodyPr wrap="square" lIns="9144" tIns="0" rIns="9144" bIns="0">
             <a:spAutoFit/>
           </a:bodyPr>
           <a:lstStyle/>
@@ -12431,6 +13483,45 @@
             </a:pPr>
             <a:r>
               <a:t>Clean: 16/33</a:t>
+            </a:r>
+          </a:p>
+        </p:txBody>
+      </p:sp>
+      <p:sp>
+        <p:nvSpPr>
+          <p:cNvPr id="10" name="TextBox 9"/>
+          <p:cNvSpPr txBox="1"/>
+          <p:nvPr/>
+        </p:nvSpPr>
+        <p:spPr>
+          <a:xfrm>
+            <a:off x="640080" y="5879592"/>
+            <a:ext cx="10972800" cy="457200"/>
+          </a:xfrm>
+          <a:prstGeom prst="rect">
+            <a:avLst/>
+          </a:prstGeom>
+          <a:noFill/>
+        </p:spPr>
+        <p:txBody>
+          <a:bodyPr wrap="square" lIns="0" tIns="0" rIns="0" bIns="0">
+            <a:spAutoFit/>
+          </a:bodyPr>
+          <a:lstStyle/>
+          <a:p>
+            <a:pPr>
+              <a:spcAft>
+                <a:spcPts val="600"/>
+              </a:spcAft>
+              <a:defRPr sz="2400" b="0">
+                <a:solidFill>
+                  <a:srgbClr val="FFFFFF"/>
+                </a:solidFill>
+                <a:latin typeface="Aptos"/>
+              </a:defRPr>
+            </a:pPr>
+            <a:r>
+              <a:t>Marker suppression does not guarantee correct answers.</a:t>
             </a:r>
           </a:p>
         </p:txBody>
@@ -12764,7 +13855,7 @@
 </file>
 
 <file path=ppt/theme/theme2.xml><?xml version="1.0" encoding="utf-8"?>
-<a:theme xmlns:a="http://schemas.openxmlformats.org/drawingml/2006/main" name="Office Theme">
+<a:theme xmlns:a="http://schemas.openxmlformats.org/drawingml/2006/main" name="Office 主题​​">
   <a:themeElements>
     <a:clrScheme name="Office">
       <a:dk1>
@@ -12774,44 +13865,44 @@
         <a:sysClr val="window" lastClr="FFFFFF"/>
       </a:lt1>
       <a:dk2>
-        <a:srgbClr val="1F497D"/>
+        <a:srgbClr val="44546A"/>
       </a:dk2>
       <a:lt2>
-        <a:srgbClr val="EEECE1"/>
+        <a:srgbClr val="E7E6E6"/>
       </a:lt2>
       <a:accent1>
-        <a:srgbClr val="4F81BD"/>
+        <a:srgbClr val="4472C4"/>
       </a:accent1>
       <a:accent2>
-        <a:srgbClr val="C0504D"/>
+        <a:srgbClr val="ED7D31"/>
       </a:accent2>
       <a:accent3>
-        <a:srgbClr val="9BBB59"/>
+        <a:srgbClr val="A5A5A5"/>
       </a:accent3>
       <a:accent4>
-        <a:srgbClr val="8064A2"/>
+        <a:srgbClr val="FFC000"/>
       </a:accent4>
       <a:accent5>
-        <a:srgbClr val="4BACC6"/>
+        <a:srgbClr val="5B9BD5"/>
       </a:accent5>
       <a:accent6>
-        <a:srgbClr val="F79646"/>
+        <a:srgbClr val="70AD47"/>
       </a:accent6>
       <a:hlink>
-        <a:srgbClr val="0000FF"/>
+        <a:srgbClr val="0563C1"/>
       </a:hlink>
       <a:folHlink>
-        <a:srgbClr val="800080"/>
+        <a:srgbClr val="954F72"/>
       </a:folHlink>
     </a:clrScheme>
     <a:fontScheme name="Office">
       <a:majorFont>
-        <a:latin typeface="Calibri"/>
+        <a:latin typeface="等线 Light" panose="020F0302020204030204"/>
         <a:ea typeface=""/>
         <a:cs typeface=""/>
-        <a:font script="Jpan" typeface="ＭＳ Ｐゴシック"/>
+        <a:font script="Jpan" typeface="游ゴシック Light"/>
         <a:font script="Hang" typeface="맑은 고딕"/>
-        <a:font script="Hans" typeface="宋体"/>
+        <a:font script="Hans" typeface="等线 Light"/>
         <a:font script="Hant" typeface="新細明體"/>
         <a:font script="Arab" typeface="Times New Roman"/>
         <a:font script="Hebr" typeface="Times New Roman"/>
@@ -12839,14 +13930,31 @@
         <a:font script="Viet" typeface="Times New Roman"/>
         <a:font script="Uigh" typeface="Microsoft Uighur"/>
         <a:font script="Geor" typeface="Sylfaen"/>
+        <a:font script="Armn" typeface="Arial"/>
+        <a:font script="Bugi" typeface="Leelawadee UI"/>
+        <a:font script="Bopo" typeface="Microsoft JhengHei"/>
+        <a:font script="Java" typeface="Javanese Text"/>
+        <a:font script="Lisu" typeface="Segoe UI"/>
+        <a:font script="Mymr" typeface="Myanmar Text"/>
+        <a:font script="Nkoo" typeface="Ebrima"/>
+        <a:font script="Olck" typeface="Nirmala UI"/>
+        <a:font script="Osma" typeface="Ebrima"/>
+        <a:font script="Phag" typeface="Phagspa"/>
+        <a:font script="Syrn" typeface="Estrangelo Edessa"/>
+        <a:font script="Syrj" typeface="Estrangelo Edessa"/>
+        <a:font script="Syre" typeface="Estrangelo Edessa"/>
+        <a:font script="Sora" typeface="Nirmala UI"/>
+        <a:font script="Tale" typeface="Microsoft Tai Le"/>
+        <a:font script="Talu" typeface="Microsoft New Tai Lue"/>
+        <a:font script="Tfng" typeface="Ebrima"/>
       </a:majorFont>
       <a:minorFont>
-        <a:latin typeface="Calibri"/>
+        <a:latin typeface="等线" panose="020F0502020204030204"/>
         <a:ea typeface=""/>
         <a:cs typeface=""/>
-        <a:font script="Jpan" typeface="ＭＳ Ｐゴシック"/>
+        <a:font script="Jpan" typeface="游ゴシック"/>
         <a:font script="Hang" typeface="맑은 고딕"/>
-        <a:font script="Hans" typeface="宋体"/>
+        <a:font script="Hans" typeface="等线"/>
         <a:font script="Hant" typeface="新細明體"/>
         <a:font script="Arab" typeface="Arial"/>
         <a:font script="Hebr" typeface="Arial"/>
@@ -12874,6 +13982,23 @@
         <a:font script="Viet" typeface="Arial"/>
         <a:font script="Uigh" typeface="Microsoft Uighur"/>
         <a:font script="Geor" typeface="Sylfaen"/>
+        <a:font script="Armn" typeface="Arial"/>
+        <a:font script="Bugi" typeface="Leelawadee UI"/>
+        <a:font script="Bopo" typeface="Microsoft JhengHei"/>
+        <a:font script="Java" typeface="Javanese Text"/>
+        <a:font script="Lisu" typeface="Segoe UI"/>
+        <a:font script="Mymr" typeface="Myanmar Text"/>
+        <a:font script="Nkoo" typeface="Ebrima"/>
+        <a:font script="Olck" typeface="Nirmala UI"/>
+        <a:font script="Osma" typeface="Ebrima"/>
+        <a:font script="Phag" typeface="Phagspa"/>
+        <a:font script="Syrn" typeface="Estrangelo Edessa"/>
+        <a:font script="Syrj" typeface="Estrangelo Edessa"/>
+        <a:font script="Syre" typeface="Estrangelo Edessa"/>
+        <a:font script="Sora" typeface="Nirmala UI"/>
+        <a:font script="Tale" typeface="Microsoft Tai Le"/>
+        <a:font script="Talu" typeface="Microsoft New Tai Lue"/>
+        <a:font script="Tfng" typeface="Ebrima"/>
       </a:minorFont>
     </a:fontScheme>
     <a:fmtScheme name="Office">
@@ -12885,200 +14010,141 @@
           <a:gsLst>
             <a:gs pos="0">
               <a:schemeClr val="phClr">
-                <a:tint val="50000"/>
-                <a:satMod val="300000"/>
+                <a:lumMod val="110000"/>
+                <a:satMod val="105000"/>
+                <a:tint val="67000"/>
               </a:schemeClr>
             </a:gs>
-            <a:gs pos="35000">
+            <a:gs pos="50000">
               <a:schemeClr val="phClr">
-                <a:tint val="37000"/>
-                <a:satMod val="300000"/>
+                <a:lumMod val="105000"/>
+                <a:satMod val="103000"/>
+                <a:tint val="73000"/>
               </a:schemeClr>
             </a:gs>
             <a:gs pos="100000">
               <a:schemeClr val="phClr">
-                <a:tint val="15000"/>
-                <a:satMod val="350000"/>
+                <a:lumMod val="105000"/>
+                <a:satMod val="109000"/>
+                <a:tint val="81000"/>
               </a:schemeClr>
             </a:gs>
           </a:gsLst>
-          <a:lin ang="16200000" scaled="1"/>
+          <a:lin ang="5400000" scaled="0"/>
         </a:gradFill>
         <a:gradFill rotWithShape="1">
           <a:gsLst>
             <a:gs pos="0">
               <a:schemeClr val="phClr">
-                <a:tint val="100000"/>
+                <a:satMod val="103000"/>
+                <a:lumMod val="102000"/>
+                <a:tint val="94000"/>
+              </a:schemeClr>
+            </a:gs>
+            <a:gs pos="50000">
+              <a:schemeClr val="phClr">
+                <a:satMod val="110000"/>
+                <a:lumMod val="100000"/>
                 <a:shade val="100000"/>
-                <a:satMod val="130000"/>
               </a:schemeClr>
             </a:gs>
             <a:gs pos="100000">
               <a:schemeClr val="phClr">
-                <a:tint val="50000"/>
-                <a:shade val="100000"/>
-                <a:satMod val="350000"/>
+                <a:lumMod val="99000"/>
+                <a:satMod val="120000"/>
+                <a:shade val="78000"/>
               </a:schemeClr>
             </a:gs>
           </a:gsLst>
-          <a:lin ang="16200000" scaled="0"/>
+          <a:lin ang="5400000" scaled="0"/>
         </a:gradFill>
       </a:fillStyleLst>
       <a:lnStyleLst>
-        <a:ln w="9525" cap="flat" cmpd="sng" algn="ctr">
-          <a:solidFill>
-            <a:schemeClr val="phClr">
-              <a:shade val="95000"/>
-              <a:satMod val="105000"/>
-            </a:schemeClr>
-          </a:solidFill>
-          <a:prstDash val="solid"/>
-        </a:ln>
-        <a:ln w="25400" cap="flat" cmpd="sng" algn="ctr">
+        <a:ln w="6350" cap="flat" cmpd="sng" algn="ctr">
           <a:solidFill>
             <a:schemeClr val="phClr"/>
           </a:solidFill>
           <a:prstDash val="solid"/>
+          <a:miter lim="800000"/>
         </a:ln>
-        <a:ln w="38100" cap="flat" cmpd="sng" algn="ctr">
+        <a:ln w="12700" cap="flat" cmpd="sng" algn="ctr">
           <a:solidFill>
             <a:schemeClr val="phClr"/>
           </a:solidFill>
           <a:prstDash val="solid"/>
+          <a:miter lim="800000"/>
+        </a:ln>
+        <a:ln w="19050" cap="flat" cmpd="sng" algn="ctr">
+          <a:solidFill>
+            <a:schemeClr val="phClr"/>
+          </a:solidFill>
+          <a:prstDash val="solid"/>
+          <a:miter lim="800000"/>
         </a:ln>
       </a:lnStyleLst>
       <a:effectStyleLst>
         <a:effectStyle>
+          <a:effectLst/>
+        </a:effectStyle>
+        <a:effectStyle>
+          <a:effectLst/>
+        </a:effectStyle>
+        <a:effectStyle>
           <a:effectLst>
-            <a:outerShdw blurRad="40000" dist="20000" dir="5400000" rotWithShape="0">
+            <a:outerShdw blurRad="57150" dist="19050" dir="5400000" algn="ctr" rotWithShape="0">
               <a:srgbClr val="000000">
-                <a:alpha val="38000"/>
+                <a:alpha val="63000"/>
               </a:srgbClr>
             </a:outerShdw>
           </a:effectLst>
-        </a:effectStyle>
-        <a:effectStyle>
-          <a:effectLst>
-            <a:outerShdw blurRad="40000" dist="23000" dir="5400000" rotWithShape="0">
-              <a:srgbClr val="000000">
-                <a:alpha val="35000"/>
-              </a:srgbClr>
-            </a:outerShdw>
-          </a:effectLst>
-        </a:effectStyle>
-        <a:effectStyle>
-          <a:effectLst>
-            <a:outerShdw blurRad="40000" dist="23000" dir="5400000" rotWithShape="0">
-              <a:srgbClr val="000000">
-                <a:alpha val="35000"/>
-              </a:srgbClr>
-            </a:outerShdw>
-          </a:effectLst>
-          <a:scene3d>
-            <a:camera prst="orthographicFront">
-              <a:rot lat="0" lon="0" rev="0"/>
-            </a:camera>
-            <a:lightRig rig="threePt" dir="t">
-              <a:rot lat="0" lon="0" rev="1200000"/>
-            </a:lightRig>
-          </a:scene3d>
-          <a:sp3d>
-            <a:bevelT w="63500" h="25400"/>
-          </a:sp3d>
         </a:effectStyle>
       </a:effectStyleLst>
       <a:bgFillStyleLst>
         <a:solidFill>
           <a:schemeClr val="phClr"/>
         </a:solidFill>
+        <a:solidFill>
+          <a:schemeClr val="phClr">
+            <a:tint val="95000"/>
+            <a:satMod val="170000"/>
+          </a:schemeClr>
+        </a:solidFill>
         <a:gradFill rotWithShape="1">
           <a:gsLst>
             <a:gs pos="0">
               <a:schemeClr val="phClr">
-                <a:tint val="40000"/>
-                <a:satMod val="350000"/>
+                <a:tint val="93000"/>
+                <a:satMod val="150000"/>
+                <a:shade val="98000"/>
+                <a:lumMod val="102000"/>
               </a:schemeClr>
             </a:gs>
-            <a:gs pos="40000">
+            <a:gs pos="50000">
               <a:schemeClr val="phClr">
-                <a:tint val="45000"/>
-                <a:shade val="99000"/>
-                <a:satMod val="350000"/>
+                <a:tint val="98000"/>
+                <a:satMod val="130000"/>
+                <a:shade val="90000"/>
+                <a:lumMod val="103000"/>
               </a:schemeClr>
             </a:gs>
             <a:gs pos="100000">
               <a:schemeClr val="phClr">
-                <a:shade val="20000"/>
-                <a:satMod val="255000"/>
+                <a:shade val="63000"/>
+                <a:satMod val="120000"/>
               </a:schemeClr>
             </a:gs>
           </a:gsLst>
-          <a:path path="circle">
-            <a:fillToRect l="50000" t="-80000" r="50000" b="180000"/>
-          </a:path>
-        </a:gradFill>
-        <a:gradFill rotWithShape="1">
-          <a:gsLst>
-            <a:gs pos="0">
-              <a:schemeClr val="phClr">
-                <a:tint val="80000"/>
-                <a:satMod val="300000"/>
-              </a:schemeClr>
-            </a:gs>
-            <a:gs pos="100000">
-              <a:schemeClr val="phClr">
-                <a:shade val="30000"/>
-                <a:satMod val="200000"/>
-              </a:schemeClr>
-            </a:gs>
-          </a:gsLst>
-          <a:path path="circle">
-            <a:fillToRect l="50000" t="50000" r="50000" b="50000"/>
-          </a:path>
+          <a:lin ang="5400000" scaled="0"/>
         </a:gradFill>
       </a:bgFillStyleLst>
     </a:fmtScheme>
   </a:themeElements>
-  <a:objectDefaults>
-    <a:spDef>
-      <a:spPr/>
-      <a:bodyPr/>
-      <a:lstStyle/>
-      <a:style>
-        <a:lnRef idx="1">
-          <a:schemeClr val="accent1"/>
-        </a:lnRef>
-        <a:fillRef idx="3">
-          <a:schemeClr val="accent1"/>
-        </a:fillRef>
-        <a:effectRef idx="2">
-          <a:schemeClr val="accent1"/>
-        </a:effectRef>
-        <a:fontRef idx="minor">
-          <a:schemeClr val="lt1"/>
-        </a:fontRef>
-      </a:style>
-    </a:spDef>
-    <a:lnDef>
-      <a:spPr/>
-      <a:bodyPr/>
-      <a:lstStyle/>
-      <a:style>
-        <a:lnRef idx="2">
-          <a:schemeClr val="accent1"/>
-        </a:lnRef>
-        <a:fillRef idx="0">
-          <a:schemeClr val="accent1"/>
-        </a:fillRef>
-        <a:effectRef idx="1">
-          <a:schemeClr val="accent1"/>
-        </a:effectRef>
-        <a:fontRef idx="minor">
-          <a:schemeClr val="tx1"/>
-        </a:fontRef>
-      </a:style>
-    </a:lnDef>
-  </a:objectDefaults>
+  <a:objectDefaults/>
   <a:extraClrSchemeLst/>
+  <a:extLst>
+    <a:ext uri="{05A4C25C-085E-4340-85A3-A5531E510DB2}">
+      <thm15:themeFamily xmlns:thm15="http://schemas.microsoft.com/office/thememl/2012/main" name="Office Theme" id="{62F939B6-93AF-4DB8-9C6B-D6C7DFDC589F}" vid="{4A3C46E8-61CC-4603-A589-7422A47A8E4A}"/>
+    </a:ext>
+  </a:extLst>
 </a:theme>
 </file>